--- a/sources/presentation.pptx
+++ b/sources/presentation.pptx
@@ -82,29 +82,7 @@
                 <a:uFillTx/>
                 <a:latin typeface="Calibri"/>
               </a:rPr>
-              <a:t>Click to edit </a:t>
-            </a:r>
-            <a:r>
-              <a:rPr lang="en-US" sz="4400" b="0" u="none" strike="noStrike">
-                <a:solidFill>
-                  <a:schemeClr val="dk1"/>
-                </a:solidFill>
-                <a:effectLst/>
-                <a:uFillTx/>
-                <a:latin typeface="Calibri"/>
-              </a:rPr>
-              <a:t>Master title </a:t>
-            </a:r>
-            <a:r>
-              <a:rPr lang="en-US" sz="4400" b="0" u="none" strike="noStrike">
-                <a:solidFill>
-                  <a:schemeClr val="dk1"/>
-                </a:solidFill>
-                <a:effectLst/>
-                <a:uFillTx/>
-                <a:latin typeface="Calibri"/>
-              </a:rPr>
-              <a:t>style</a:t>
+              <a:t>Click to edit Master title style</a:t>
             </a:r>
             <a:endParaRPr lang="en-US" sz="4400" b="0" u="none" strike="noStrike">
               <a:solidFill>
@@ -311,7 +289,7 @@
               </a:lnSpc>
               <a:buNone/>
             </a:pPr>
-            <a:fld id="{24131B15-4C71-4BEA-BA2D-6C2EA8FC5F0D}" type="slidenum">
+            <a:fld id="{78E97040-7BC1-42B2-BF01-9A80D735D261}" type="slidenum">
               <a:rPr lang="en-US" sz="1200" b="0" u="none" strike="noStrike">
                 <a:solidFill>
                   <a:schemeClr val="dk1">
@@ -875,7 +853,7 @@
               </a:lnSpc>
               <a:buNone/>
             </a:pPr>
-            <a:fld id="{594F2B6D-6215-4211-AA4F-77C94FA7586B}" type="slidenum">
+            <a:fld id="{E93C9091-5A0A-4F10-AC1E-3C3D4363DD96}" type="slidenum">
               <a:rPr lang="en-US" sz="1200" b="0" u="none" strike="noStrike">
                 <a:solidFill>
                   <a:schemeClr val="dk1">
@@ -1493,7 +1471,7 @@
               </a:lnSpc>
               <a:buNone/>
             </a:pPr>
-            <a:fld id="{AD013405-5BDE-4A82-B6C0-39ECBCFCB46E}" type="slidenum">
+            <a:fld id="{E924DDE4-D626-45E3-998D-CA185A37B35B}" type="slidenum">
               <a:rPr lang="en-US" sz="1200" b="0" u="none" strike="noStrike">
                 <a:solidFill>
                   <a:schemeClr val="dk1">
@@ -1995,7 +1973,7 @@
               </a:lnSpc>
               <a:buNone/>
             </a:pPr>
-            <a:fld id="{79D7AC4E-5997-42CD-A764-451FE91C63E1}" type="slidenum">
+            <a:fld id="{1AE3BE8C-F3A4-4826-9A9B-E28574BDBEC1}" type="slidenum">
               <a:rPr lang="en-US" sz="1200" b="0" u="none" strike="noStrike">
                 <a:solidFill>
                   <a:schemeClr val="dk1">
@@ -2497,7 +2475,7 @@
               </a:lnSpc>
               <a:buNone/>
             </a:pPr>
-            <a:fld id="{5916FC18-C280-4C4A-AC81-AD1463A1E9CC}" type="slidenum">
+            <a:fld id="{885FA272-3F62-43E6-A4E9-17051895272C}" type="slidenum">
               <a:rPr lang="en-US" sz="1200" b="0" u="none" strike="noStrike">
                 <a:solidFill>
                   <a:schemeClr val="dk1">
@@ -2999,7 +2977,7 @@
               </a:lnSpc>
               <a:buNone/>
             </a:pPr>
-            <a:fld id="{FF46D947-8B41-44DD-B9E1-C592FA82E4F9}" type="slidenum">
+            <a:fld id="{08070EC8-2A96-486D-BCF7-260C83A8D9C2}" type="slidenum">
               <a:rPr lang="en-US" sz="1200" b="0" u="none" strike="noStrike">
                 <a:solidFill>
                   <a:schemeClr val="dk1">
@@ -3366,7 +3344,7 @@
               </a:lnSpc>
               <a:buNone/>
             </a:pPr>
-            <a:fld id="{F01F8B4F-865C-49AE-8359-B64927779756}" type="slidenum">
+            <a:fld id="{A831A36E-CEDA-443A-BE51-B5450F81E9FD}" type="slidenum">
               <a:rPr lang="en-US" sz="1200" b="0" u="none" strike="noStrike">
                 <a:solidFill>
                   <a:schemeClr val="dk1">
@@ -4067,7 +4045,7 @@
               </a:lnSpc>
               <a:buNone/>
             </a:pPr>
-            <a:fld id="{A4D004B6-703B-4202-9868-DF0A5863DD0A}" type="slidenum">
+            <a:fld id="{798B49F0-2405-4480-B689-4FF0F5489C37}" type="slidenum">
               <a:rPr lang="en-US" sz="1200" b="0" u="none" strike="noStrike">
                 <a:solidFill>
                   <a:schemeClr val="dk1">
@@ -4892,7 +4870,7 @@
               </a:lnSpc>
               <a:buNone/>
             </a:pPr>
-            <a:fld id="{AE6966A6-F358-407D-828E-94C040F37C21}" type="slidenum">
+            <a:fld id="{CDDBDC07-5636-4852-89CB-BF5487C576C7}" type="slidenum">
               <a:rPr lang="en-US" sz="1200" b="0" u="none" strike="noStrike">
                 <a:solidFill>
                   <a:schemeClr val="dk1">
@@ -5195,7 +5173,7 @@
               </a:lnSpc>
               <a:buNone/>
             </a:pPr>
-            <a:fld id="{5DA107F7-A3E1-498C-A4AE-AA4440E1F095}" type="slidenum">
+            <a:fld id="{D4ABFE02-E662-48DC-8182-ED2EC897E673}" type="slidenum">
               <a:rPr lang="en-US" sz="1200" b="0" u="none" strike="noStrike">
                 <a:solidFill>
                   <a:schemeClr val="dk1">
@@ -5442,7 +5420,7 @@
               </a:lnSpc>
               <a:buNone/>
             </a:pPr>
-            <a:fld id="{43A5697D-5917-43E3-B122-12F4CA825F85}" type="slidenum">
+            <a:fld id="{EF43974B-0903-4D23-982C-E59C808FF6D2}" type="slidenum">
               <a:rPr lang="en-US" sz="1200" b="0" u="none" strike="noStrike">
                 <a:solidFill>
                   <a:schemeClr val="dk1">
@@ -5970,7 +5948,7 @@
         <p:spPr>
           <a:xfrm>
             <a:off x="2438280" y="2057400"/>
-            <a:ext cx="7314840" cy="699840"/>
+            <a:ext cx="7314840" cy="822600"/>
           </a:xfrm>
           <a:prstGeom prst="rect">
             <a:avLst/>
@@ -6005,7 +5983,7 @@
                 <a:uFillTx/>
                 <a:latin typeface="Calibri"/>
               </a:rPr>
-              <a:t>System Pulse</a:t>
+              <a:t>Server Monitor</a:t>
             </a:r>
             <a:endParaRPr lang="en-US" sz="4000" b="0" u="none" strike="noStrike">
               <a:solidFill>
@@ -7375,7 +7353,7 @@
         <p:spPr>
           <a:xfrm>
             <a:off x="6126480" y="1188720"/>
-            <a:ext cx="5668920" cy="2240280"/>
+            <a:ext cx="5668920" cy="2194200"/>
           </a:xfrm>
           <a:prstGeom prst="roundRect">
             <a:avLst>
@@ -8309,7 +8287,7 @@
                 <a:uFillTx/>
                 <a:latin typeface="Calibri"/>
               </a:rPr>
-              <a:t>https://your-deployed-url-here.com</a:t>
+              <a:t>http://10.93.25.129:8000/static/index.html</a:t>
             </a:r>
             <a:endParaRPr lang="en-US" sz="1100" b="0" u="none" strike="noStrike">
               <a:solidFill>

--- a/sources/presentation.pptx
+++ b/sources/presentation.pptx
@@ -16,8 +16,8 @@
 </file>
 
 <file path=ppt/slideLayouts/slideLayout1.xml><?xml version="1.0" encoding="utf-8"?>
-<p:sldLayout xmlns:a="http://schemas.openxmlformats.org/drawingml/2006/main" xmlns:p="http://schemas.openxmlformats.org/presentationml/2006/main" xmlns:r="http://schemas.openxmlformats.org/officeDocument/2006/relationships" xmlns:p14="http://schemas.microsoft.com/office/powerpoint/2010/main" xmlns:p15="http://schemas.microsoft.com/office/powerpoint/2012/main" xmlns:mc="http://schemas.openxmlformats.org/markup-compatibility/2006" type="title" preserve="1">
-  <p:cSld name="Title Slide">
+<p:sldLayout xmlns:a="http://schemas.openxmlformats.org/drawingml/2006/main" xmlns:p="http://schemas.openxmlformats.org/presentationml/2006/main" xmlns:r="http://schemas.openxmlformats.org/officeDocument/2006/relationships" xmlns:p14="http://schemas.microsoft.com/office/powerpoint/2010/main" xmlns:p15="http://schemas.microsoft.com/office/powerpoint/2012/main" xmlns:mc="http://schemas.openxmlformats.org/markup-compatibility/2006" type="blank" preserve="1">
+  <p:cSld name="Blank">
     <p:bg>
       <p:bgPr>
         <a:solidFill>
@@ -46,69 +46,13 @@
             <a:spLocks noGrp="1"/>
           </p:cNvSpPr>
           <p:nvPr>
-            <p:ph type="title"/>
-          </p:nvPr>
-        </p:nvSpPr>
-        <p:spPr>
-          <a:xfrm>
-            <a:off x="685800" y="2130480"/>
-            <a:ext cx="7772040" cy="1469520"/>
-          </a:xfrm>
-          <a:prstGeom prst="rect">
-            <a:avLst/>
-          </a:prstGeom>
-          <a:noFill/>
-          <a:ln w="0">
-            <a:noFill/>
-          </a:ln>
-        </p:spPr>
-        <p:txBody>
-          <a:bodyPr lIns="91440" rIns="91440" tIns="45720" bIns="45720" anchor="ctr">
-            <a:noAutofit/>
-          </a:bodyPr>
-          <a:p>
-            <a:pPr indent="0" algn="ctr" defTabSz="457200">
-              <a:lnSpc>
-                <a:spcPct val="100000"/>
-              </a:lnSpc>
-              <a:buNone/>
-            </a:pPr>
-            <a:r>
-              <a:rPr lang="en-US" sz="4400" b="0" u="none" strike="noStrike">
-                <a:solidFill>
-                  <a:schemeClr val="dk1"/>
-                </a:solidFill>
-                <a:effectLst/>
-                <a:uFillTx/>
-                <a:latin typeface="Calibri"/>
-              </a:rPr>
-              <a:t>Click to edit Master title style</a:t>
-            </a:r>
-            <a:endParaRPr lang="en-US" sz="4400" b="0" u="none" strike="noStrike">
-              <a:solidFill>
-                <a:schemeClr val="dk1"/>
-              </a:solidFill>
-              <a:effectLst/>
-              <a:uFillTx/>
-              <a:latin typeface="Calibri"/>
-            </a:endParaRPr>
-          </a:p>
-        </p:txBody>
-      </p:sp>
-      <p:sp>
-        <p:nvSpPr>
-          <p:cNvPr id="3" name="PlaceHolder 2"/>
-          <p:cNvSpPr>
-            <a:spLocks noGrp="1"/>
-          </p:cNvSpPr>
-          <p:nvPr>
             <p:ph type="dt" idx="1"/>
           </p:nvPr>
         </p:nvSpPr>
         <p:spPr>
           <a:xfrm>
             <a:off x="457200" y="6356520"/>
-            <a:ext cx="2133360" cy="364680"/>
+            <a:ext cx="2133000" cy="364320"/>
           </a:xfrm>
           <a:prstGeom prst="rect">
             <a:avLst/>
@@ -128,6 +72,9 @@
                 <a:spcPct val="100000"/>
               </a:lnSpc>
               <a:buNone/>
+              <a:tabLst>
+                <a:tab algn="l" pos="0"/>
+              </a:tabLst>
               <a:defRPr lang="en-US" sz="1200" b="0" u="none" strike="noStrike">
                 <a:solidFill>
                   <a:schemeClr val="dk1">
@@ -146,6 +93,9 @@
                 <a:spcPct val="100000"/>
               </a:lnSpc>
               <a:buNone/>
+              <a:tabLst>
+                <a:tab algn="l" pos="0"/>
+              </a:tabLst>
             </a:pPr>
             <a:r>
               <a:rPr lang="en-US" sz="1200" b="0" u="none" strike="noStrike">
@@ -173,7 +123,7 @@
       </p:sp>
       <p:sp>
         <p:nvSpPr>
-          <p:cNvPr id="4" name="PlaceHolder 3"/>
+          <p:cNvPr id="3" name="PlaceHolder 2"/>
           <p:cNvSpPr>
             <a:spLocks noGrp="1"/>
           </p:cNvSpPr>
@@ -184,7 +134,7 @@
         <p:spPr>
           <a:xfrm>
             <a:off x="3124080" y="6356520"/>
-            <a:ext cx="2895120" cy="364680"/>
+            <a:ext cx="2894760" cy="364320"/>
           </a:xfrm>
           <a:prstGeom prst="rect">
             <a:avLst/>
@@ -200,7 +150,13 @@
           </a:bodyPr>
           <a:lstStyle>
             <a:lvl1pPr indent="0" algn="ctr">
+              <a:lnSpc>
+                <a:spcPct val="100000"/>
+              </a:lnSpc>
               <a:buNone/>
+              <a:tabLst>
+                <a:tab algn="l" pos="0"/>
+              </a:tabLst>
               <a:defRPr lang="en-US" sz="1400" b="0" u="none" strike="noStrike">
                 <a:solidFill>
                   <a:srgbClr val="000000"/>
@@ -213,7 +169,13 @@
           </a:lstStyle>
           <a:p>
             <a:pPr indent="0" algn="ctr">
+              <a:lnSpc>
+                <a:spcPct val="100000"/>
+              </a:lnSpc>
               <a:buNone/>
+              <a:tabLst>
+                <a:tab algn="l" pos="0"/>
+              </a:tabLst>
             </a:pPr>
             <a:r>
               <a:rPr lang="en-US" sz="1400" b="0" u="none" strike="noStrike">
@@ -239,7 +201,7 @@
       </p:sp>
       <p:sp>
         <p:nvSpPr>
-          <p:cNvPr id="5" name="PlaceHolder 4"/>
+          <p:cNvPr id="4" name="PlaceHolder 3"/>
           <p:cNvSpPr>
             <a:spLocks noGrp="1"/>
           </p:cNvSpPr>
@@ -250,7 +212,7 @@
         <p:spPr>
           <a:xfrm>
             <a:off x="6553080" y="6356520"/>
-            <a:ext cx="2133360" cy="364680"/>
+            <a:ext cx="2133000" cy="364320"/>
           </a:xfrm>
           <a:prstGeom prst="rect">
             <a:avLst/>
@@ -270,6 +232,9 @@
                 <a:spcPct val="100000"/>
               </a:lnSpc>
               <a:buNone/>
+              <a:tabLst>
+                <a:tab algn="l" pos="0"/>
+              </a:tabLst>
               <a:defRPr lang="en-US" sz="1200" b="0" u="none" strike="noStrike">
                 <a:solidFill>
                   <a:schemeClr val="dk1">
@@ -288,8 +253,11 @@
                 <a:spcPct val="100000"/>
               </a:lnSpc>
               <a:buNone/>
-            </a:pPr>
-            <a:fld id="{78E97040-7BC1-42B2-BF01-9A80D735D261}" type="slidenum">
+              <a:tabLst>
+                <a:tab algn="l" pos="0"/>
+              </a:tabLst>
+            </a:pPr>
+            <a:fld id="{F7DDC160-2368-4BEE-A0E3-BA665126344E}" type="slidenum">
               <a:rPr lang="en-US" sz="1200" b="0" u="none" strike="noStrike">
                 <a:solidFill>
                   <a:schemeClr val="dk1">
@@ -309,6 +277,339 @@
               <a:effectLst/>
               <a:uFillTx/>
               <a:latin typeface="Times New Roman"/>
+            </a:endParaRPr>
+          </a:p>
+        </p:txBody>
+      </p:sp>
+      <p:sp>
+        <p:nvSpPr>
+          <p:cNvPr id="5" name="PlaceHolder 4"/>
+          <p:cNvSpPr>
+            <a:spLocks noGrp="1"/>
+          </p:cNvSpPr>
+          <p:nvPr>
+            <p:ph type="title"/>
+          </p:nvPr>
+        </p:nvSpPr>
+        <p:spPr>
+          <a:xfrm>
+            <a:off x="609480" y="273600"/>
+            <a:ext cx="10971720" cy="1144440"/>
+          </a:xfrm>
+          <a:prstGeom prst="rect">
+            <a:avLst/>
+          </a:prstGeom>
+          <a:noFill/>
+          <a:ln w="0">
+            <a:noFill/>
+          </a:ln>
+        </p:spPr>
+        <p:txBody>
+          <a:bodyPr lIns="0" rIns="0" tIns="0" bIns="0" anchor="ctr">
+            <a:noAutofit/>
+          </a:bodyPr>
+          <a:p>
+            <a:pPr indent="0">
+              <a:lnSpc>
+                <a:spcPct val="100000"/>
+              </a:lnSpc>
+              <a:buNone/>
+              <a:tabLst>
+                <a:tab algn="l" pos="0"/>
+              </a:tabLst>
+            </a:pPr>
+            <a:r>
+              <a:rPr lang="en-US" sz="1800" b="0" u="none" strike="noStrike">
+                <a:solidFill>
+                  <a:schemeClr val="dk1"/>
+                </a:solidFill>
+                <a:effectLst/>
+                <a:uFillTx/>
+                <a:latin typeface="Calibri"/>
+              </a:rPr>
+              <a:t>Click to edit the title text format</a:t>
+            </a:r>
+            <a:endParaRPr lang="en-US" sz="1800" b="0" u="none" strike="noStrike">
+              <a:solidFill>
+                <a:srgbClr val="000000"/>
+              </a:solidFill>
+              <a:effectLst/>
+              <a:uFillTx/>
+              <a:latin typeface="Arial"/>
+            </a:endParaRPr>
+          </a:p>
+        </p:txBody>
+      </p:sp>
+      <p:sp>
+        <p:nvSpPr>
+          <p:cNvPr id="6" name="PlaceHolder 5"/>
+          <p:cNvSpPr>
+            <a:spLocks noGrp="1"/>
+          </p:cNvSpPr>
+          <p:nvPr>
+            <p:ph type="body"/>
+          </p:nvPr>
+        </p:nvSpPr>
+        <p:spPr>
+          <a:xfrm>
+            <a:off x="609480" y="1604520"/>
+            <a:ext cx="10971720" cy="3976920"/>
+          </a:xfrm>
+          <a:prstGeom prst="rect">
+            <a:avLst/>
+          </a:prstGeom>
+          <a:noFill/>
+          <a:ln w="0">
+            <a:noFill/>
+          </a:ln>
+        </p:spPr>
+        <p:txBody>
+          <a:bodyPr lIns="0" rIns="0" tIns="0" bIns="0" anchor="t">
+            <a:normAutofit/>
+          </a:bodyPr>
+          <a:p>
+            <a:pPr marL="432000" indent="-324000">
+              <a:lnSpc>
+                <a:spcPct val="100000"/>
+              </a:lnSpc>
+              <a:spcBef>
+                <a:spcPts val="1417"/>
+              </a:spcBef>
+              <a:buClr>
+                <a:srgbClr val="000000"/>
+              </a:buClr>
+              <a:buSzPct val="45000"/>
+              <a:buFont typeface="Wingdings" charset="2"/>
+              <a:buChar char=""/>
+            </a:pPr>
+            <a:r>
+              <a:rPr lang="en-US" sz="3200" b="0" u="none" strike="noStrike">
+                <a:solidFill>
+                  <a:schemeClr val="dk1"/>
+                </a:solidFill>
+                <a:effectLst/>
+                <a:uFillTx/>
+                <a:latin typeface="Calibri"/>
+              </a:rPr>
+              <a:t>Click to edit the outline text format</a:t>
+            </a:r>
+            <a:endParaRPr lang="en-US" sz="3200" b="0" u="none" strike="noStrike">
+              <a:solidFill>
+                <a:srgbClr val="000000"/>
+              </a:solidFill>
+              <a:effectLst/>
+              <a:uFillTx/>
+              <a:latin typeface="Arial"/>
+            </a:endParaRPr>
+          </a:p>
+          <a:p>
+            <a:pPr marL="864000" lvl="1" indent="-324000">
+              <a:lnSpc>
+                <a:spcPct val="100000"/>
+              </a:lnSpc>
+              <a:spcBef>
+                <a:spcPts val="1134"/>
+              </a:spcBef>
+              <a:buClr>
+                <a:srgbClr val="000000"/>
+              </a:buClr>
+              <a:buSzPct val="75000"/>
+              <a:buFont typeface="Symbol" charset="2"/>
+              <a:buChar char=""/>
+            </a:pPr>
+            <a:r>
+              <a:rPr lang="en-US" sz="2400" b="0" u="none" strike="noStrike">
+                <a:solidFill>
+                  <a:schemeClr val="dk1"/>
+                </a:solidFill>
+                <a:effectLst/>
+                <a:uFillTx/>
+                <a:latin typeface="Calibri"/>
+              </a:rPr>
+              <a:t>Second Outline Level</a:t>
+            </a:r>
+            <a:endParaRPr lang="en-US" sz="2400" b="0" u="none" strike="noStrike">
+              <a:solidFill>
+                <a:srgbClr val="000000"/>
+              </a:solidFill>
+              <a:effectLst/>
+              <a:uFillTx/>
+              <a:latin typeface="Arial"/>
+            </a:endParaRPr>
+          </a:p>
+          <a:p>
+            <a:pPr marL="1296000" lvl="2" indent="-288000">
+              <a:lnSpc>
+                <a:spcPct val="100000"/>
+              </a:lnSpc>
+              <a:spcBef>
+                <a:spcPts val="850"/>
+              </a:spcBef>
+              <a:buClr>
+                <a:srgbClr val="000000"/>
+              </a:buClr>
+              <a:buSzPct val="45000"/>
+              <a:buFont typeface="Wingdings" charset="2"/>
+              <a:buChar char=""/>
+            </a:pPr>
+            <a:r>
+              <a:rPr lang="en-US" sz="2000" b="0" u="none" strike="noStrike">
+                <a:solidFill>
+                  <a:schemeClr val="dk1"/>
+                </a:solidFill>
+                <a:effectLst/>
+                <a:uFillTx/>
+                <a:latin typeface="Calibri"/>
+              </a:rPr>
+              <a:t>Third Outline Level</a:t>
+            </a:r>
+            <a:endParaRPr lang="en-US" sz="2000" b="0" u="none" strike="noStrike">
+              <a:solidFill>
+                <a:srgbClr val="000000"/>
+              </a:solidFill>
+              <a:effectLst/>
+              <a:uFillTx/>
+              <a:latin typeface="Arial"/>
+            </a:endParaRPr>
+          </a:p>
+          <a:p>
+            <a:pPr marL="1728000" lvl="3" indent="-216000">
+              <a:lnSpc>
+                <a:spcPct val="100000"/>
+              </a:lnSpc>
+              <a:spcBef>
+                <a:spcPts val="567"/>
+              </a:spcBef>
+              <a:buClr>
+                <a:srgbClr val="000000"/>
+              </a:buClr>
+              <a:buSzPct val="75000"/>
+              <a:buFont typeface="Symbol" charset="2"/>
+              <a:buChar char=""/>
+            </a:pPr>
+            <a:r>
+              <a:rPr lang="en-US" sz="2000" b="0" u="none" strike="noStrike">
+                <a:solidFill>
+                  <a:schemeClr val="dk1"/>
+                </a:solidFill>
+                <a:effectLst/>
+                <a:uFillTx/>
+                <a:latin typeface="Calibri"/>
+              </a:rPr>
+              <a:t>Fourth Outline Level</a:t>
+            </a:r>
+            <a:endParaRPr lang="en-US" sz="2000" b="0" u="none" strike="noStrike">
+              <a:solidFill>
+                <a:srgbClr val="000000"/>
+              </a:solidFill>
+              <a:effectLst/>
+              <a:uFillTx/>
+              <a:latin typeface="Arial"/>
+            </a:endParaRPr>
+          </a:p>
+          <a:p>
+            <a:pPr marL="2160000" lvl="4" indent="-216000">
+              <a:lnSpc>
+                <a:spcPct val="100000"/>
+              </a:lnSpc>
+              <a:spcBef>
+                <a:spcPts val="283"/>
+              </a:spcBef>
+              <a:buClr>
+                <a:srgbClr val="000000"/>
+              </a:buClr>
+              <a:buSzPct val="45000"/>
+              <a:buFont typeface="Wingdings" charset="2"/>
+              <a:buChar char=""/>
+            </a:pPr>
+            <a:r>
+              <a:rPr lang="en-US" sz="2000" b="0" u="none" strike="noStrike">
+                <a:solidFill>
+                  <a:schemeClr val="dk1"/>
+                </a:solidFill>
+                <a:effectLst/>
+                <a:uFillTx/>
+                <a:latin typeface="Calibri"/>
+              </a:rPr>
+              <a:t>Fifth Outline Level</a:t>
+            </a:r>
+            <a:endParaRPr lang="en-US" sz="2000" b="0" u="none" strike="noStrike">
+              <a:solidFill>
+                <a:srgbClr val="000000"/>
+              </a:solidFill>
+              <a:effectLst/>
+              <a:uFillTx/>
+              <a:latin typeface="Arial"/>
+            </a:endParaRPr>
+          </a:p>
+          <a:p>
+            <a:pPr marL="2592000" lvl="5" indent="-216000">
+              <a:lnSpc>
+                <a:spcPct val="100000"/>
+              </a:lnSpc>
+              <a:spcBef>
+                <a:spcPts val="283"/>
+              </a:spcBef>
+              <a:buClr>
+                <a:srgbClr val="000000"/>
+              </a:buClr>
+              <a:buSzPct val="45000"/>
+              <a:buFont typeface="Wingdings" charset="2"/>
+              <a:buChar char=""/>
+            </a:pPr>
+            <a:r>
+              <a:rPr lang="en-US" sz="2000" b="0" u="none" strike="noStrike">
+                <a:solidFill>
+                  <a:schemeClr val="dk1"/>
+                </a:solidFill>
+                <a:effectLst/>
+                <a:uFillTx/>
+                <a:latin typeface="Calibri"/>
+              </a:rPr>
+              <a:t>Sixth Outline Level</a:t>
+            </a:r>
+            <a:endParaRPr lang="en-US" sz="2000" b="0" u="none" strike="noStrike">
+              <a:solidFill>
+                <a:srgbClr val="000000"/>
+              </a:solidFill>
+              <a:effectLst/>
+              <a:uFillTx/>
+              <a:latin typeface="Arial"/>
+            </a:endParaRPr>
+          </a:p>
+          <a:p>
+            <a:pPr marL="3024000" lvl="6" indent="-216000">
+              <a:lnSpc>
+                <a:spcPct val="100000"/>
+              </a:lnSpc>
+              <a:spcBef>
+                <a:spcPts val="283"/>
+              </a:spcBef>
+              <a:buClr>
+                <a:srgbClr val="000000"/>
+              </a:buClr>
+              <a:buSzPct val="45000"/>
+              <a:buFont typeface="Wingdings" charset="2"/>
+              <a:buChar char=""/>
+            </a:pPr>
+            <a:r>
+              <a:rPr lang="en-US" sz="2000" b="0" u="none" strike="noStrike">
+                <a:solidFill>
+                  <a:schemeClr val="dk1"/>
+                </a:solidFill>
+                <a:effectLst/>
+                <a:uFillTx/>
+                <a:latin typeface="Calibri"/>
+              </a:rPr>
+              <a:t>Seventh Outline Level</a:t>
+            </a:r>
+            <a:endParaRPr lang="en-US" sz="2000" b="0" u="none" strike="noStrike">
+              <a:solidFill>
+                <a:srgbClr val="000000"/>
+              </a:solidFill>
+              <a:effectLst/>
+              <a:uFillTx/>
+              <a:latin typeface="Arial"/>
             </a:endParaRPr>
           </a:p>
         </p:txBody>
@@ -320,7 +621,7 @@
 
 <file path=ppt/slideLayouts/slideLayout10.xml><?xml version="1.0" encoding="utf-8"?>
 <p:sldLayout xmlns:a="http://schemas.openxmlformats.org/drawingml/2006/main" xmlns:p="http://schemas.openxmlformats.org/presentationml/2006/main" xmlns:r="http://schemas.openxmlformats.org/officeDocument/2006/relationships" xmlns:p14="http://schemas.microsoft.com/office/powerpoint/2010/main" xmlns:p15="http://schemas.microsoft.com/office/powerpoint/2012/main" xmlns:mc="http://schemas.openxmlformats.org/markup-compatibility/2006" type="blank" preserve="1">
-  <p:cSld name="Content with Caption">
+  <p:cSld name="Comparison">
     <p:bg>
       <p:bgPr>
         <a:solidFill>
@@ -354,8 +655,8 @@
         </p:nvSpPr>
         <p:spPr>
           <a:xfrm>
-            <a:off x="457200" y="272880"/>
-            <a:ext cx="3007800" cy="1161720"/>
+            <a:off x="457200" y="274680"/>
+            <a:ext cx="8228880" cy="1142280"/>
           </a:xfrm>
           <a:prstGeom prst="rect">
             <a:avLst/>
@@ -366,18 +667,21 @@
           </a:ln>
         </p:spPr>
         <p:txBody>
-          <a:bodyPr lIns="91440" rIns="91440" tIns="45720" bIns="45720" anchor="b">
+          <a:bodyPr lIns="91440" rIns="91440" tIns="45720" bIns="45720" anchor="ctr">
             <a:noAutofit/>
           </a:bodyPr>
           <a:p>
-            <a:pPr indent="0" defTabSz="457200">
+            <a:pPr indent="0" algn="ctr" defTabSz="457200">
               <a:lnSpc>
                 <a:spcPct val="100000"/>
               </a:lnSpc>
               <a:buNone/>
-            </a:pPr>
-            <a:r>
-              <a:rPr lang="en-US" sz="2000" b="1" u="none" strike="noStrike">
+              <a:tabLst>
+                <a:tab algn="l" pos="0"/>
+              </a:tabLst>
+            </a:pPr>
+            <a:r>
+              <a:rPr lang="en-US" sz="4400" b="0" u="none" strike="noStrike">
                 <a:solidFill>
                   <a:schemeClr val="dk1"/>
                 </a:solidFill>
@@ -387,13 +691,13 @@
               </a:rPr>
               <a:t>Click to edit Master title style</a:t>
             </a:r>
-            <a:endParaRPr lang="en-US" sz="2000" b="0" u="none" strike="noStrike">
-              <a:solidFill>
-                <a:schemeClr val="dk1"/>
-              </a:solidFill>
-              <a:effectLst/>
-              <a:uFillTx/>
-              <a:latin typeface="Calibri"/>
+            <a:endParaRPr lang="en-US" sz="4400" b="0" u="none" strike="noStrike">
+              <a:solidFill>
+                <a:srgbClr val="000000"/>
+              </a:solidFill>
+              <a:effectLst/>
+              <a:uFillTx/>
+              <a:latin typeface="Arial"/>
             </a:endParaRPr>
           </a:p>
         </p:txBody>
@@ -410,8 +714,8 @@
         </p:nvSpPr>
         <p:spPr>
           <a:xfrm>
-            <a:off x="3575160" y="272880"/>
-            <a:ext cx="5111280" cy="5852880"/>
+            <a:off x="457200" y="1535040"/>
+            <a:ext cx="4039560" cy="639000"/>
           </a:xfrm>
           <a:prstGeom prst="rect">
             <a:avLst/>
@@ -422,93 +726,24 @@
           </a:ln>
         </p:spPr>
         <p:txBody>
-          <a:bodyPr lIns="91440" rIns="91440" tIns="45720" bIns="45720" anchor="t">
+          <a:bodyPr lIns="91440" rIns="91440" tIns="45720" bIns="45720" anchor="b">
             <a:noAutofit/>
           </a:bodyPr>
           <a:p>
-            <a:pPr marL="343080" indent="-343080" defTabSz="457200">
-              <a:lnSpc>
-                <a:spcPct val="100000"/>
-              </a:lnSpc>
-              <a:spcBef>
-                <a:spcPts val="641"/>
-              </a:spcBef>
-              <a:buClr>
-                <a:srgbClr val="000000"/>
-              </a:buClr>
-              <a:buFont typeface="Arial"/>
-              <a:buChar char="•"/>
-            </a:pPr>
-            <a:r>
-              <a:rPr lang="en-US" sz="3200" b="0" u="none" strike="noStrike">
-                <a:solidFill>
-                  <a:schemeClr val="dk1"/>
-                </a:solidFill>
-                <a:effectLst/>
-                <a:uFillTx/>
-                <a:latin typeface="Calibri"/>
-              </a:rPr>
-              <a:t>Click to edit Master text styles</a:t>
-            </a:r>
-            <a:endParaRPr lang="en-US" sz="3200" b="0" u="none" strike="noStrike">
-              <a:solidFill>
-                <a:schemeClr val="dk1"/>
-              </a:solidFill>
-              <a:effectLst/>
-              <a:uFillTx/>
-              <a:latin typeface="Calibri"/>
-            </a:endParaRPr>
-          </a:p>
-          <a:p>
-            <a:pPr marL="743040" lvl="1" indent="-285840" defTabSz="457200">
-              <a:lnSpc>
-                <a:spcPct val="100000"/>
-              </a:lnSpc>
-              <a:spcBef>
-                <a:spcPts val="561"/>
-              </a:spcBef>
-              <a:buClr>
-                <a:srgbClr val="000000"/>
-              </a:buClr>
-              <a:buFont typeface="Arial"/>
-              <a:buChar char="–"/>
-            </a:pPr>
-            <a:r>
-              <a:rPr lang="en-US" sz="2800" b="0" u="none" strike="noStrike">
-                <a:solidFill>
-                  <a:schemeClr val="dk1"/>
-                </a:solidFill>
-                <a:effectLst/>
-                <a:uFillTx/>
-                <a:latin typeface="Calibri"/>
-              </a:rPr>
-              <a:t>Second level</a:t>
-            </a:r>
-            <a:endParaRPr lang="en-US" sz="2800" b="0" u="none" strike="noStrike">
-              <a:solidFill>
-                <a:schemeClr val="dk1"/>
-              </a:solidFill>
-              <a:effectLst/>
-              <a:uFillTx/>
-              <a:latin typeface="Calibri"/>
-            </a:endParaRPr>
-          </a:p>
-          <a:p>
-            <a:pPr marL="1143000" lvl="2" indent="-228600" defTabSz="457200">
+            <a:pPr indent="0" defTabSz="457200">
               <a:lnSpc>
                 <a:spcPct val="100000"/>
               </a:lnSpc>
               <a:spcBef>
                 <a:spcPts val="479"/>
               </a:spcBef>
-              <a:buClr>
-                <a:srgbClr val="000000"/>
-              </a:buClr>
-              <a:buFont typeface="Arial"/>
-              <a:buChar char="•"/>
-            </a:pPr>
-            <a:r>
-              <a:rPr lang="en-US" sz="2400" b="0" u="none" strike="noStrike">
+              <a:buNone/>
+              <a:tabLst>
+                <a:tab algn="l" pos="0"/>
+              </a:tabLst>
+            </a:pPr>
+            <a:r>
+              <a:rPr lang="en-US" sz="2400" b="1" u="none" strike="noStrike">
                 <a:solidFill>
                   <a:schemeClr val="dk1"/>
                 </a:solidFill>
@@ -516,83 +751,15 @@
                 <a:uFillTx/>
                 <a:latin typeface="Calibri"/>
               </a:rPr>
-              <a:t>Third level</a:t>
+              <a:t>Click to edit Master text styles</a:t>
             </a:r>
             <a:endParaRPr lang="en-US" sz="2400" b="0" u="none" strike="noStrike">
               <a:solidFill>
-                <a:schemeClr val="dk1"/>
-              </a:solidFill>
-              <a:effectLst/>
-              <a:uFillTx/>
-              <a:latin typeface="Calibri"/>
-            </a:endParaRPr>
-          </a:p>
-          <a:p>
-            <a:pPr marL="1600200" lvl="3" indent="-228600" defTabSz="457200">
-              <a:lnSpc>
-                <a:spcPct val="100000"/>
-              </a:lnSpc>
-              <a:spcBef>
-                <a:spcPts val="400"/>
-              </a:spcBef>
-              <a:buClr>
-                <a:srgbClr val="000000"/>
-              </a:buClr>
-              <a:buFont typeface="Arial"/>
-              <a:buChar char="–"/>
-            </a:pPr>
-            <a:r>
-              <a:rPr lang="en-US" sz="2000" b="0" u="none" strike="noStrike">
-                <a:solidFill>
-                  <a:schemeClr val="dk1"/>
-                </a:solidFill>
-                <a:effectLst/>
-                <a:uFillTx/>
-                <a:latin typeface="Calibri"/>
-              </a:rPr>
-              <a:t>Fourth level</a:t>
-            </a:r>
-            <a:endParaRPr lang="en-US" sz="2000" b="0" u="none" strike="noStrike">
-              <a:solidFill>
-                <a:schemeClr val="dk1"/>
-              </a:solidFill>
-              <a:effectLst/>
-              <a:uFillTx/>
-              <a:latin typeface="Calibri"/>
-            </a:endParaRPr>
-          </a:p>
-          <a:p>
-            <a:pPr marL="2057400" lvl="4" indent="-228600" defTabSz="457200">
-              <a:lnSpc>
-                <a:spcPct val="100000"/>
-              </a:lnSpc>
-              <a:spcBef>
-                <a:spcPts val="400"/>
-              </a:spcBef>
-              <a:buClr>
-                <a:srgbClr val="000000"/>
-              </a:buClr>
-              <a:buFont typeface="Arial"/>
-              <a:buChar char="»"/>
-            </a:pPr>
-            <a:r>
-              <a:rPr lang="en-US" sz="2000" b="0" u="none" strike="noStrike">
-                <a:solidFill>
-                  <a:schemeClr val="dk1"/>
-                </a:solidFill>
-                <a:effectLst/>
-                <a:uFillTx/>
-                <a:latin typeface="Calibri"/>
-              </a:rPr>
-              <a:t>Fifth level</a:t>
-            </a:r>
-            <a:endParaRPr lang="en-US" sz="2000" b="0" u="none" strike="noStrike">
-              <a:solidFill>
-                <a:schemeClr val="dk1"/>
-              </a:solidFill>
-              <a:effectLst/>
-              <a:uFillTx/>
-              <a:latin typeface="Calibri"/>
+                <a:srgbClr val="000000"/>
+              </a:solidFill>
+              <a:effectLst/>
+              <a:uFillTx/>
+              <a:latin typeface="Arial"/>
             </a:endParaRPr>
           </a:p>
         </p:txBody>
@@ -609,8 +776,8 @@
         </p:nvSpPr>
         <p:spPr>
           <a:xfrm>
-            <a:off x="457200" y="1434960"/>
-            <a:ext cx="3007800" cy="4690800"/>
+            <a:off x="457200" y="2174760"/>
+            <a:ext cx="4039560" cy="3950640"/>
           </a:xfrm>
           <a:prstGeom prst="rect">
             <a:avLst/>
@@ -625,12 +792,211 @@
             <a:noAutofit/>
           </a:bodyPr>
           <a:p>
+            <a:pPr marL="343080" indent="-343080" defTabSz="457200">
+              <a:lnSpc>
+                <a:spcPct val="100000"/>
+              </a:lnSpc>
+              <a:spcBef>
+                <a:spcPts val="479"/>
+              </a:spcBef>
+              <a:buClr>
+                <a:srgbClr val="000000"/>
+              </a:buClr>
+              <a:buFont typeface="Arial"/>
+              <a:buChar char="•"/>
+            </a:pPr>
+            <a:r>
+              <a:rPr lang="en-US" sz="2400" b="0" u="none" strike="noStrike">
+                <a:solidFill>
+                  <a:schemeClr val="dk1"/>
+                </a:solidFill>
+                <a:effectLst/>
+                <a:uFillTx/>
+                <a:latin typeface="Calibri"/>
+              </a:rPr>
+              <a:t>Click to edit Master text styles</a:t>
+            </a:r>
+            <a:endParaRPr lang="en-US" sz="2400" b="0" u="none" strike="noStrike">
+              <a:solidFill>
+                <a:srgbClr val="000000"/>
+              </a:solidFill>
+              <a:effectLst/>
+              <a:uFillTx/>
+              <a:latin typeface="Arial"/>
+            </a:endParaRPr>
+          </a:p>
+          <a:p>
+            <a:pPr marL="743040" lvl="1" indent="-285840" defTabSz="457200">
+              <a:lnSpc>
+                <a:spcPct val="100000"/>
+              </a:lnSpc>
+              <a:spcBef>
+                <a:spcPts val="400"/>
+              </a:spcBef>
+              <a:buClr>
+                <a:srgbClr val="000000"/>
+              </a:buClr>
+              <a:buFont typeface="Arial"/>
+              <a:buChar char="–"/>
+            </a:pPr>
+            <a:r>
+              <a:rPr lang="en-US" sz="2000" b="0" u="none" strike="noStrike">
+                <a:solidFill>
+                  <a:schemeClr val="dk1"/>
+                </a:solidFill>
+                <a:effectLst/>
+                <a:uFillTx/>
+                <a:latin typeface="Calibri"/>
+              </a:rPr>
+              <a:t>Second level</a:t>
+            </a:r>
+            <a:endParaRPr lang="en-US" sz="2000" b="0" u="none" strike="noStrike">
+              <a:solidFill>
+                <a:srgbClr val="000000"/>
+              </a:solidFill>
+              <a:effectLst/>
+              <a:uFillTx/>
+              <a:latin typeface="Arial"/>
+            </a:endParaRPr>
+          </a:p>
+          <a:p>
+            <a:pPr marL="1143000" lvl="2" indent="-228600" defTabSz="457200">
+              <a:lnSpc>
+                <a:spcPct val="100000"/>
+              </a:lnSpc>
+              <a:spcBef>
+                <a:spcPts val="360"/>
+              </a:spcBef>
+              <a:buClr>
+                <a:srgbClr val="000000"/>
+              </a:buClr>
+              <a:buFont typeface="Arial"/>
+              <a:buChar char="•"/>
+            </a:pPr>
+            <a:r>
+              <a:rPr lang="en-US" sz="1800" b="0" u="none" strike="noStrike">
+                <a:solidFill>
+                  <a:schemeClr val="dk1"/>
+                </a:solidFill>
+                <a:effectLst/>
+                <a:uFillTx/>
+                <a:latin typeface="Calibri"/>
+              </a:rPr>
+              <a:t>Third level</a:t>
+            </a:r>
+            <a:endParaRPr lang="en-US" sz="1800" b="0" u="none" strike="noStrike">
+              <a:solidFill>
+                <a:srgbClr val="000000"/>
+              </a:solidFill>
+              <a:effectLst/>
+              <a:uFillTx/>
+              <a:latin typeface="Arial"/>
+            </a:endParaRPr>
+          </a:p>
+          <a:p>
+            <a:pPr marL="1600200" lvl="3" indent="-228600" defTabSz="457200">
+              <a:lnSpc>
+                <a:spcPct val="100000"/>
+              </a:lnSpc>
+              <a:spcBef>
+                <a:spcPts val="320"/>
+              </a:spcBef>
+              <a:buClr>
+                <a:srgbClr val="000000"/>
+              </a:buClr>
+              <a:buFont typeface="Arial"/>
+              <a:buChar char="–"/>
+            </a:pPr>
+            <a:r>
+              <a:rPr lang="en-US" sz="1600" b="0" u="none" strike="noStrike">
+                <a:solidFill>
+                  <a:schemeClr val="dk1"/>
+                </a:solidFill>
+                <a:effectLst/>
+                <a:uFillTx/>
+                <a:latin typeface="Calibri"/>
+              </a:rPr>
+              <a:t>Fourth level</a:t>
+            </a:r>
+            <a:endParaRPr lang="en-US" sz="1600" b="0" u="none" strike="noStrike">
+              <a:solidFill>
+                <a:srgbClr val="000000"/>
+              </a:solidFill>
+              <a:effectLst/>
+              <a:uFillTx/>
+              <a:latin typeface="Arial"/>
+            </a:endParaRPr>
+          </a:p>
+          <a:p>
+            <a:pPr marL="2057400" lvl="4" indent="-228600" defTabSz="457200">
+              <a:lnSpc>
+                <a:spcPct val="100000"/>
+              </a:lnSpc>
+              <a:spcBef>
+                <a:spcPts val="320"/>
+              </a:spcBef>
+              <a:buClr>
+                <a:srgbClr val="000000"/>
+              </a:buClr>
+              <a:buFont typeface="Arial"/>
+              <a:buChar char="»"/>
+            </a:pPr>
+            <a:r>
+              <a:rPr lang="en-US" sz="1600" b="0" u="none" strike="noStrike">
+                <a:solidFill>
+                  <a:schemeClr val="dk1"/>
+                </a:solidFill>
+                <a:effectLst/>
+                <a:uFillTx/>
+                <a:latin typeface="Calibri"/>
+              </a:rPr>
+              <a:t>Fifth level</a:t>
+            </a:r>
+            <a:endParaRPr lang="en-US" sz="1600" b="0" u="none" strike="noStrike">
+              <a:solidFill>
+                <a:srgbClr val="000000"/>
+              </a:solidFill>
+              <a:effectLst/>
+              <a:uFillTx/>
+              <a:latin typeface="Arial"/>
+            </a:endParaRPr>
+          </a:p>
+        </p:txBody>
+      </p:sp>
+      <p:sp>
+        <p:nvSpPr>
+          <p:cNvPr id="52" name="PlaceHolder 4"/>
+          <p:cNvSpPr>
+            <a:spLocks noGrp="1"/>
+          </p:cNvSpPr>
+          <p:nvPr>
+            <p:ph type="body"/>
+          </p:nvPr>
+        </p:nvSpPr>
+        <p:spPr>
+          <a:xfrm>
+            <a:off x="4645080" y="1535040"/>
+            <a:ext cx="4041000" cy="639000"/>
+          </a:xfrm>
+          <a:prstGeom prst="rect">
+            <a:avLst/>
+          </a:prstGeom>
+          <a:noFill/>
+          <a:ln w="0">
+            <a:noFill/>
+          </a:ln>
+        </p:spPr>
+        <p:txBody>
+          <a:bodyPr lIns="91440" rIns="91440" tIns="45720" bIns="45720" anchor="b">
+            <a:noAutofit/>
+          </a:bodyPr>
+          <a:p>
             <a:pPr indent="0" defTabSz="457200">
               <a:lnSpc>
                 <a:spcPct val="100000"/>
               </a:lnSpc>
               <a:spcBef>
-                <a:spcPts val="281"/>
+                <a:spcPts val="479"/>
               </a:spcBef>
               <a:buNone/>
               <a:tabLst>
@@ -638,7 +1004,7 @@
               </a:tabLst>
             </a:pPr>
             <a:r>
-              <a:rPr lang="en-US" sz="1400" b="0" u="none" strike="noStrike">
+              <a:rPr lang="en-US" sz="2400" b="1" u="none" strike="noStrike">
                 <a:solidFill>
                   <a:schemeClr val="dk1"/>
                 </a:solidFill>
@@ -648,20 +1014,219 @@
               </a:rPr>
               <a:t>Click to edit Master text styles</a:t>
             </a:r>
-            <a:endParaRPr lang="en-US" sz="1400" b="0" u="none" strike="noStrike">
-              <a:solidFill>
-                <a:schemeClr val="dk1"/>
-              </a:solidFill>
-              <a:effectLst/>
-              <a:uFillTx/>
-              <a:latin typeface="Calibri"/>
+            <a:endParaRPr lang="en-US" sz="2400" b="0" u="none" strike="noStrike">
+              <a:solidFill>
+                <a:srgbClr val="000000"/>
+              </a:solidFill>
+              <a:effectLst/>
+              <a:uFillTx/>
+              <a:latin typeface="Arial"/>
             </a:endParaRPr>
           </a:p>
         </p:txBody>
       </p:sp>
       <p:sp>
         <p:nvSpPr>
-          <p:cNvPr id="52" name="PlaceHolder 4"/>
+          <p:cNvPr id="53" name="PlaceHolder 5"/>
+          <p:cNvSpPr>
+            <a:spLocks noGrp="1"/>
+          </p:cNvSpPr>
+          <p:nvPr>
+            <p:ph type="body"/>
+          </p:nvPr>
+        </p:nvSpPr>
+        <p:spPr>
+          <a:xfrm>
+            <a:off x="4645080" y="2174760"/>
+            <a:ext cx="4041000" cy="3950640"/>
+          </a:xfrm>
+          <a:prstGeom prst="rect">
+            <a:avLst/>
+          </a:prstGeom>
+          <a:noFill/>
+          <a:ln w="0">
+            <a:noFill/>
+          </a:ln>
+        </p:spPr>
+        <p:txBody>
+          <a:bodyPr lIns="91440" rIns="91440" tIns="45720" bIns="45720" anchor="t">
+            <a:noAutofit/>
+          </a:bodyPr>
+          <a:p>
+            <a:pPr marL="343080" indent="-343080" defTabSz="457200">
+              <a:lnSpc>
+                <a:spcPct val="100000"/>
+              </a:lnSpc>
+              <a:spcBef>
+                <a:spcPts val="479"/>
+              </a:spcBef>
+              <a:buClr>
+                <a:srgbClr val="000000"/>
+              </a:buClr>
+              <a:buFont typeface="Arial"/>
+              <a:buChar char="•"/>
+            </a:pPr>
+            <a:r>
+              <a:rPr lang="en-US" sz="2400" b="0" u="none" strike="noStrike">
+                <a:solidFill>
+                  <a:schemeClr val="dk1"/>
+                </a:solidFill>
+                <a:effectLst/>
+                <a:uFillTx/>
+                <a:latin typeface="Calibri"/>
+              </a:rPr>
+              <a:t>Click to edit Master text styles</a:t>
+            </a:r>
+            <a:endParaRPr lang="en-US" sz="2400" b="0" u="none" strike="noStrike">
+              <a:solidFill>
+                <a:srgbClr val="000000"/>
+              </a:solidFill>
+              <a:effectLst/>
+              <a:uFillTx/>
+              <a:latin typeface="Arial"/>
+            </a:endParaRPr>
+          </a:p>
+          <a:p>
+            <a:pPr marL="743040" lvl="1" indent="-285840" defTabSz="457200">
+              <a:lnSpc>
+                <a:spcPct val="100000"/>
+              </a:lnSpc>
+              <a:spcBef>
+                <a:spcPts val="400"/>
+              </a:spcBef>
+              <a:buClr>
+                <a:srgbClr val="000000"/>
+              </a:buClr>
+              <a:buFont typeface="Arial"/>
+              <a:buChar char="–"/>
+            </a:pPr>
+            <a:r>
+              <a:rPr lang="en-US" sz="2000" b="0" u="none" strike="noStrike">
+                <a:solidFill>
+                  <a:schemeClr val="dk1"/>
+                </a:solidFill>
+                <a:effectLst/>
+                <a:uFillTx/>
+                <a:latin typeface="Calibri"/>
+              </a:rPr>
+              <a:t>Second level</a:t>
+            </a:r>
+            <a:endParaRPr lang="en-US" sz="2000" b="0" u="none" strike="noStrike">
+              <a:solidFill>
+                <a:srgbClr val="000000"/>
+              </a:solidFill>
+              <a:effectLst/>
+              <a:uFillTx/>
+              <a:latin typeface="Arial"/>
+            </a:endParaRPr>
+          </a:p>
+          <a:p>
+            <a:pPr marL="1143000" lvl="2" indent="-228600" defTabSz="457200">
+              <a:lnSpc>
+                <a:spcPct val="100000"/>
+              </a:lnSpc>
+              <a:spcBef>
+                <a:spcPts val="360"/>
+              </a:spcBef>
+              <a:buClr>
+                <a:srgbClr val="000000"/>
+              </a:buClr>
+              <a:buFont typeface="Arial"/>
+              <a:buChar char="•"/>
+            </a:pPr>
+            <a:r>
+              <a:rPr lang="en-US" sz="1800" b="0" u="none" strike="noStrike">
+                <a:solidFill>
+                  <a:schemeClr val="dk1"/>
+                </a:solidFill>
+                <a:effectLst/>
+                <a:uFillTx/>
+                <a:latin typeface="Calibri"/>
+              </a:rPr>
+              <a:t>Third level</a:t>
+            </a:r>
+            <a:endParaRPr lang="en-US" sz="1800" b="0" u="none" strike="noStrike">
+              <a:solidFill>
+                <a:srgbClr val="000000"/>
+              </a:solidFill>
+              <a:effectLst/>
+              <a:uFillTx/>
+              <a:latin typeface="Arial"/>
+            </a:endParaRPr>
+          </a:p>
+          <a:p>
+            <a:pPr marL="1600200" lvl="3" indent="-228600" defTabSz="457200">
+              <a:lnSpc>
+                <a:spcPct val="100000"/>
+              </a:lnSpc>
+              <a:spcBef>
+                <a:spcPts val="320"/>
+              </a:spcBef>
+              <a:buClr>
+                <a:srgbClr val="000000"/>
+              </a:buClr>
+              <a:buFont typeface="Arial"/>
+              <a:buChar char="–"/>
+            </a:pPr>
+            <a:r>
+              <a:rPr lang="en-US" sz="1600" b="0" u="none" strike="noStrike">
+                <a:solidFill>
+                  <a:schemeClr val="dk1"/>
+                </a:solidFill>
+                <a:effectLst/>
+                <a:uFillTx/>
+                <a:latin typeface="Calibri"/>
+              </a:rPr>
+              <a:t>Fourth level</a:t>
+            </a:r>
+            <a:endParaRPr lang="en-US" sz="1600" b="0" u="none" strike="noStrike">
+              <a:solidFill>
+                <a:srgbClr val="000000"/>
+              </a:solidFill>
+              <a:effectLst/>
+              <a:uFillTx/>
+              <a:latin typeface="Arial"/>
+            </a:endParaRPr>
+          </a:p>
+          <a:p>
+            <a:pPr marL="2057400" lvl="4" indent="-228600" defTabSz="457200">
+              <a:lnSpc>
+                <a:spcPct val="100000"/>
+              </a:lnSpc>
+              <a:spcBef>
+                <a:spcPts val="320"/>
+              </a:spcBef>
+              <a:buClr>
+                <a:srgbClr val="000000"/>
+              </a:buClr>
+              <a:buFont typeface="Arial"/>
+              <a:buChar char="»"/>
+            </a:pPr>
+            <a:r>
+              <a:rPr lang="en-US" sz="1600" b="0" u="none" strike="noStrike">
+                <a:solidFill>
+                  <a:schemeClr val="dk1"/>
+                </a:solidFill>
+                <a:effectLst/>
+                <a:uFillTx/>
+                <a:latin typeface="Calibri"/>
+              </a:rPr>
+              <a:t>Fifth level</a:t>
+            </a:r>
+            <a:endParaRPr lang="en-US" sz="1600" b="0" u="none" strike="noStrike">
+              <a:solidFill>
+                <a:srgbClr val="000000"/>
+              </a:solidFill>
+              <a:effectLst/>
+              <a:uFillTx/>
+              <a:latin typeface="Arial"/>
+            </a:endParaRPr>
+          </a:p>
+        </p:txBody>
+      </p:sp>
+      <p:sp>
+        <p:nvSpPr>
+          <p:cNvPr id="54" name="PlaceHolder 6"/>
           <p:cNvSpPr>
             <a:spLocks noGrp="1"/>
           </p:cNvSpPr>
@@ -672,7 +1237,7 @@
         <p:spPr>
           <a:xfrm>
             <a:off x="457200" y="6356520"/>
-            <a:ext cx="2133360" cy="364680"/>
+            <a:ext cx="2133000" cy="364320"/>
           </a:xfrm>
           <a:prstGeom prst="rect">
             <a:avLst/>
@@ -692,6 +1257,9 @@
                 <a:spcPct val="100000"/>
               </a:lnSpc>
               <a:buNone/>
+              <a:tabLst>
+                <a:tab algn="l" pos="0"/>
+              </a:tabLst>
               <a:defRPr lang="en-US" sz="1200" b="0" u="none" strike="noStrike">
                 <a:solidFill>
                   <a:schemeClr val="dk1">
@@ -710,6 +1278,9 @@
                 <a:spcPct val="100000"/>
               </a:lnSpc>
               <a:buNone/>
+              <a:tabLst>
+                <a:tab algn="l" pos="0"/>
+              </a:tabLst>
             </a:pPr>
             <a:r>
               <a:rPr lang="en-US" sz="1200" b="0" u="none" strike="noStrike">
@@ -737,7 +1308,7 @@
       </p:sp>
       <p:sp>
         <p:nvSpPr>
-          <p:cNvPr id="53" name="PlaceHolder 5"/>
+          <p:cNvPr id="55" name="PlaceHolder 7"/>
           <p:cNvSpPr>
             <a:spLocks noGrp="1"/>
           </p:cNvSpPr>
@@ -748,7 +1319,7 @@
         <p:spPr>
           <a:xfrm>
             <a:off x="3124080" y="6356520"/>
-            <a:ext cx="2895120" cy="364680"/>
+            <a:ext cx="2894760" cy="364320"/>
           </a:xfrm>
           <a:prstGeom prst="rect">
             <a:avLst/>
@@ -764,7 +1335,13 @@
           </a:bodyPr>
           <a:lstStyle>
             <a:lvl1pPr indent="0" algn="ctr">
+              <a:lnSpc>
+                <a:spcPct val="100000"/>
+              </a:lnSpc>
               <a:buNone/>
+              <a:tabLst>
+                <a:tab algn="l" pos="0"/>
+              </a:tabLst>
               <a:defRPr lang="en-US" sz="1400" b="0" u="none" strike="noStrike">
                 <a:solidFill>
                   <a:srgbClr val="000000"/>
@@ -777,7 +1354,13 @@
           </a:lstStyle>
           <a:p>
             <a:pPr indent="0" algn="ctr">
+              <a:lnSpc>
+                <a:spcPct val="100000"/>
+              </a:lnSpc>
               <a:buNone/>
+              <a:tabLst>
+                <a:tab algn="l" pos="0"/>
+              </a:tabLst>
             </a:pPr>
             <a:r>
               <a:rPr lang="en-US" sz="1400" b="0" u="none" strike="noStrike">
@@ -803,7 +1386,7 @@
       </p:sp>
       <p:sp>
         <p:nvSpPr>
-          <p:cNvPr id="54" name="PlaceHolder 6"/>
+          <p:cNvPr id="56" name="PlaceHolder 8"/>
           <p:cNvSpPr>
             <a:spLocks noGrp="1"/>
           </p:cNvSpPr>
@@ -814,7 +1397,7 @@
         <p:spPr>
           <a:xfrm>
             <a:off x="6553080" y="6356520"/>
-            <a:ext cx="2133360" cy="364680"/>
+            <a:ext cx="2133000" cy="364320"/>
           </a:xfrm>
           <a:prstGeom prst="rect">
             <a:avLst/>
@@ -834,6 +1417,9 @@
                 <a:spcPct val="100000"/>
               </a:lnSpc>
               <a:buNone/>
+              <a:tabLst>
+                <a:tab algn="l" pos="0"/>
+              </a:tabLst>
               <a:defRPr lang="en-US" sz="1200" b="0" u="none" strike="noStrike">
                 <a:solidFill>
                   <a:schemeClr val="dk1">
@@ -852,8 +1438,11 @@
                 <a:spcPct val="100000"/>
               </a:lnSpc>
               <a:buNone/>
-            </a:pPr>
-            <a:fld id="{E93C9091-5A0A-4F10-AC1E-3C3D4363DD96}" type="slidenum">
+              <a:tabLst>
+                <a:tab algn="l" pos="0"/>
+              </a:tabLst>
+            </a:pPr>
+            <a:fld id="{34771233-6276-4F9B-996A-F98CC5EDB865}" type="slidenum">
               <a:rPr lang="en-US" sz="1200" b="0" u="none" strike="noStrike">
                 <a:solidFill>
                   <a:schemeClr val="dk1">
@@ -883,6 +1472,927 @@
 </file>
 
 <file path=ppt/slideLayouts/slideLayout11.xml><?xml version="1.0" encoding="utf-8"?>
+<p:sldLayout xmlns:a="http://schemas.openxmlformats.org/drawingml/2006/main" xmlns:p="http://schemas.openxmlformats.org/presentationml/2006/main" xmlns:r="http://schemas.openxmlformats.org/officeDocument/2006/relationships" xmlns:p14="http://schemas.microsoft.com/office/powerpoint/2010/main" xmlns:p15="http://schemas.microsoft.com/office/powerpoint/2012/main" xmlns:mc="http://schemas.openxmlformats.org/markup-compatibility/2006" type="titleOnly" preserve="1">
+  <p:cSld name="Title Only">
+    <p:bg>
+      <p:bgPr>
+        <a:solidFill>
+          <a:srgbClr val="ffffff"/>
+        </a:solidFill>
+      </p:bgPr>
+    </p:bg>
+    <p:spTree>
+      <p:nvGrpSpPr>
+        <p:cNvPr id="1" name=""/>
+        <p:cNvGrpSpPr/>
+        <p:nvPr/>
+      </p:nvGrpSpPr>
+      <p:grpSpPr>
+        <a:xfrm>
+          <a:off x="0" y="0"/>
+          <a:ext cx="0" cy="0"/>
+          <a:chOff x="0" y="0"/>
+          <a:chExt cx="0" cy="0"/>
+        </a:xfrm>
+      </p:grpSpPr>
+      <p:sp>
+        <p:nvSpPr>
+          <p:cNvPr id="57" name="PlaceHolder 1"/>
+          <p:cNvSpPr>
+            <a:spLocks noGrp="1"/>
+          </p:cNvSpPr>
+          <p:nvPr>
+            <p:ph type="title"/>
+          </p:nvPr>
+        </p:nvSpPr>
+        <p:spPr>
+          <a:xfrm>
+            <a:off x="457200" y="274680"/>
+            <a:ext cx="8228880" cy="1142280"/>
+          </a:xfrm>
+          <a:prstGeom prst="rect">
+            <a:avLst/>
+          </a:prstGeom>
+          <a:noFill/>
+          <a:ln w="0">
+            <a:noFill/>
+          </a:ln>
+        </p:spPr>
+        <p:txBody>
+          <a:bodyPr lIns="91440" rIns="91440" tIns="45720" bIns="45720" anchor="ctr">
+            <a:noAutofit/>
+          </a:bodyPr>
+          <a:p>
+            <a:pPr indent="0" algn="ctr" defTabSz="457200">
+              <a:lnSpc>
+                <a:spcPct val="100000"/>
+              </a:lnSpc>
+              <a:buNone/>
+              <a:tabLst>
+                <a:tab algn="l" pos="0"/>
+              </a:tabLst>
+            </a:pPr>
+            <a:r>
+              <a:rPr lang="en-US" sz="4400" b="0" u="none" strike="noStrike">
+                <a:solidFill>
+                  <a:schemeClr val="dk1"/>
+                </a:solidFill>
+                <a:effectLst/>
+                <a:uFillTx/>
+                <a:latin typeface="Calibri"/>
+              </a:rPr>
+              <a:t>Click to edit Master title style</a:t>
+            </a:r>
+            <a:endParaRPr lang="en-US" sz="4400" b="0" u="none" strike="noStrike">
+              <a:solidFill>
+                <a:srgbClr val="000000"/>
+              </a:solidFill>
+              <a:effectLst/>
+              <a:uFillTx/>
+              <a:latin typeface="Arial"/>
+            </a:endParaRPr>
+          </a:p>
+        </p:txBody>
+      </p:sp>
+      <p:sp>
+        <p:nvSpPr>
+          <p:cNvPr id="58" name="PlaceHolder 2"/>
+          <p:cNvSpPr>
+            <a:spLocks noGrp="1"/>
+          </p:cNvSpPr>
+          <p:nvPr>
+            <p:ph type="dt" idx="31"/>
+          </p:nvPr>
+        </p:nvSpPr>
+        <p:spPr>
+          <a:xfrm>
+            <a:off x="457200" y="6356520"/>
+            <a:ext cx="2133000" cy="364320"/>
+          </a:xfrm>
+          <a:prstGeom prst="rect">
+            <a:avLst/>
+          </a:prstGeom>
+          <a:noFill/>
+          <a:ln w="0">
+            <a:noFill/>
+          </a:ln>
+        </p:spPr>
+        <p:txBody>
+          <a:bodyPr lIns="91440" rIns="91440" tIns="45720" bIns="45720" anchor="ctr">
+            <a:noAutofit/>
+          </a:bodyPr>
+          <a:lstStyle>
+            <a:lvl1pPr indent="0" defTabSz="457200">
+              <a:lnSpc>
+                <a:spcPct val="100000"/>
+              </a:lnSpc>
+              <a:buNone/>
+              <a:tabLst>
+                <a:tab algn="l" pos="0"/>
+              </a:tabLst>
+              <a:defRPr lang="en-US" sz="1200" b="0" u="none" strike="noStrike">
+                <a:solidFill>
+                  <a:schemeClr val="dk1">
+                    <a:tint val="75000"/>
+                  </a:schemeClr>
+                </a:solidFill>
+                <a:effectLst/>
+                <a:uFillTx/>
+                <a:latin typeface="Calibri"/>
+              </a:defRPr>
+            </a:lvl1pPr>
+          </a:lstStyle>
+          <a:p>
+            <a:pPr indent="0" defTabSz="457200">
+              <a:lnSpc>
+                <a:spcPct val="100000"/>
+              </a:lnSpc>
+              <a:buNone/>
+              <a:tabLst>
+                <a:tab algn="l" pos="0"/>
+              </a:tabLst>
+            </a:pPr>
+            <a:r>
+              <a:rPr lang="en-US" sz="1200" b="0" u="none" strike="noStrike">
+                <a:solidFill>
+                  <a:schemeClr val="dk1">
+                    <a:tint val="75000"/>
+                  </a:schemeClr>
+                </a:solidFill>
+                <a:effectLst/>
+                <a:uFillTx/>
+                <a:latin typeface="Calibri"/>
+              </a:rPr>
+              <a:t>&lt;date/time&gt;</a:t>
+            </a:r>
+            <a:endParaRPr lang="en-US" sz="1200" b="0" u="none" strike="noStrike">
+              <a:solidFill>
+                <a:srgbClr val="000000"/>
+              </a:solidFill>
+              <a:effectLst/>
+              <a:uFillTx/>
+              <a:latin typeface="Times New Roman"/>
+            </a:endParaRPr>
+          </a:p>
+        </p:txBody>
+      </p:sp>
+      <p:sp>
+        <p:nvSpPr>
+          <p:cNvPr id="59" name="PlaceHolder 3"/>
+          <p:cNvSpPr>
+            <a:spLocks noGrp="1"/>
+          </p:cNvSpPr>
+          <p:nvPr>
+            <p:ph type="ftr" idx="32"/>
+          </p:nvPr>
+        </p:nvSpPr>
+        <p:spPr>
+          <a:xfrm>
+            <a:off x="3124080" y="6356520"/>
+            <a:ext cx="2894760" cy="364320"/>
+          </a:xfrm>
+          <a:prstGeom prst="rect">
+            <a:avLst/>
+          </a:prstGeom>
+          <a:noFill/>
+          <a:ln w="0">
+            <a:noFill/>
+          </a:ln>
+        </p:spPr>
+        <p:txBody>
+          <a:bodyPr lIns="91440" rIns="91440" tIns="45720" bIns="45720" anchor="ctr">
+            <a:noAutofit/>
+          </a:bodyPr>
+          <a:lstStyle>
+            <a:lvl1pPr indent="0" algn="ctr">
+              <a:lnSpc>
+                <a:spcPct val="100000"/>
+              </a:lnSpc>
+              <a:buNone/>
+              <a:tabLst>
+                <a:tab algn="l" pos="0"/>
+              </a:tabLst>
+              <a:defRPr lang="en-US" sz="1400" b="0" u="none" strike="noStrike">
+                <a:solidFill>
+                  <a:srgbClr val="000000"/>
+                </a:solidFill>
+                <a:effectLst/>
+                <a:uFillTx/>
+                <a:latin typeface="Times New Roman"/>
+              </a:defRPr>
+            </a:lvl1pPr>
+          </a:lstStyle>
+          <a:p>
+            <a:pPr indent="0" algn="ctr">
+              <a:lnSpc>
+                <a:spcPct val="100000"/>
+              </a:lnSpc>
+              <a:buNone/>
+              <a:tabLst>
+                <a:tab algn="l" pos="0"/>
+              </a:tabLst>
+            </a:pPr>
+            <a:r>
+              <a:rPr lang="en-US" sz="1400" b="0" u="none" strike="noStrike">
+                <a:solidFill>
+                  <a:srgbClr val="000000"/>
+                </a:solidFill>
+                <a:effectLst/>
+                <a:uFillTx/>
+                <a:latin typeface="Times New Roman"/>
+              </a:rPr>
+              <a:t>&lt;footer&gt;</a:t>
+            </a:r>
+            <a:endParaRPr lang="en-US" sz="1400" b="0" u="none" strike="noStrike">
+              <a:solidFill>
+                <a:srgbClr val="000000"/>
+              </a:solidFill>
+              <a:effectLst/>
+              <a:uFillTx/>
+              <a:latin typeface="Times New Roman"/>
+            </a:endParaRPr>
+          </a:p>
+        </p:txBody>
+      </p:sp>
+      <p:sp>
+        <p:nvSpPr>
+          <p:cNvPr id="60" name="PlaceHolder 4"/>
+          <p:cNvSpPr>
+            <a:spLocks noGrp="1"/>
+          </p:cNvSpPr>
+          <p:nvPr>
+            <p:ph type="sldNum" idx="33"/>
+          </p:nvPr>
+        </p:nvSpPr>
+        <p:spPr>
+          <a:xfrm>
+            <a:off x="6553080" y="6356520"/>
+            <a:ext cx="2133000" cy="364320"/>
+          </a:xfrm>
+          <a:prstGeom prst="rect">
+            <a:avLst/>
+          </a:prstGeom>
+          <a:noFill/>
+          <a:ln w="0">
+            <a:noFill/>
+          </a:ln>
+        </p:spPr>
+        <p:txBody>
+          <a:bodyPr lIns="91440" rIns="91440" tIns="45720" bIns="45720" anchor="ctr">
+            <a:noAutofit/>
+          </a:bodyPr>
+          <a:lstStyle>
+            <a:lvl1pPr indent="0" algn="r" defTabSz="457200">
+              <a:lnSpc>
+                <a:spcPct val="100000"/>
+              </a:lnSpc>
+              <a:buNone/>
+              <a:tabLst>
+                <a:tab algn="l" pos="0"/>
+              </a:tabLst>
+              <a:defRPr lang="en-US" sz="1200" b="0" u="none" strike="noStrike">
+                <a:solidFill>
+                  <a:schemeClr val="dk1">
+                    <a:tint val="75000"/>
+                  </a:schemeClr>
+                </a:solidFill>
+                <a:effectLst/>
+                <a:uFillTx/>
+                <a:latin typeface="Calibri"/>
+              </a:defRPr>
+            </a:lvl1pPr>
+          </a:lstStyle>
+          <a:p>
+            <a:pPr indent="0" algn="r" defTabSz="457200">
+              <a:lnSpc>
+                <a:spcPct val="100000"/>
+              </a:lnSpc>
+              <a:buNone/>
+              <a:tabLst>
+                <a:tab algn="l" pos="0"/>
+              </a:tabLst>
+            </a:pPr>
+            <a:fld id="{EBFEBEAF-29A3-4DE3-A234-FC8AE4F504A7}" type="slidenum">
+              <a:rPr lang="en-US" sz="1200" b="0" u="none" strike="noStrike">
+                <a:solidFill>
+                  <a:schemeClr val="dk1">
+                    <a:tint val="75000"/>
+                  </a:schemeClr>
+                </a:solidFill>
+                <a:effectLst/>
+                <a:uFillTx/>
+                <a:latin typeface="Calibri"/>
+              </a:rPr>
+              <a:t>&lt;number&gt;</a:t>
+            </a:fld>
+            <a:endParaRPr lang="en-US" sz="1200" b="0" u="none" strike="noStrike">
+              <a:solidFill>
+                <a:srgbClr val="000000"/>
+              </a:solidFill>
+              <a:effectLst/>
+              <a:uFillTx/>
+              <a:latin typeface="Times New Roman"/>
+            </a:endParaRPr>
+          </a:p>
+        </p:txBody>
+      </p:sp>
+    </p:spTree>
+  </p:cSld>
+</p:sldLayout>
+</file>
+
+<file path=ppt/slideLayouts/slideLayout2.xml><?xml version="1.0" encoding="utf-8"?>
+<p:sldLayout xmlns:a="http://schemas.openxmlformats.org/drawingml/2006/main" xmlns:p="http://schemas.openxmlformats.org/presentationml/2006/main" xmlns:r="http://schemas.openxmlformats.org/officeDocument/2006/relationships" xmlns:p14="http://schemas.microsoft.com/office/powerpoint/2010/main" xmlns:p15="http://schemas.microsoft.com/office/powerpoint/2012/main" xmlns:mc="http://schemas.openxmlformats.org/markup-compatibility/2006" type="blank" preserve="1">
+  <p:cSld name="Content with Caption">
+    <p:bg>
+      <p:bgPr>
+        <a:solidFill>
+          <a:srgbClr val="ffffff"/>
+        </a:solidFill>
+      </p:bgPr>
+    </p:bg>
+    <p:spTree>
+      <p:nvGrpSpPr>
+        <p:cNvPr id="1" name=""/>
+        <p:cNvGrpSpPr/>
+        <p:nvPr/>
+      </p:nvGrpSpPr>
+      <p:grpSpPr>
+        <a:xfrm>
+          <a:off x="0" y="0"/>
+          <a:ext cx="0" cy="0"/>
+          <a:chOff x="0" y="0"/>
+          <a:chExt cx="0" cy="0"/>
+        </a:xfrm>
+      </p:grpSpPr>
+      <p:sp>
+        <p:nvSpPr>
+          <p:cNvPr id="7" name="PlaceHolder 1"/>
+          <p:cNvSpPr>
+            <a:spLocks noGrp="1"/>
+          </p:cNvSpPr>
+          <p:nvPr>
+            <p:ph type="title"/>
+          </p:nvPr>
+        </p:nvSpPr>
+        <p:spPr>
+          <a:xfrm>
+            <a:off x="457200" y="272880"/>
+            <a:ext cx="3007440" cy="1161360"/>
+          </a:xfrm>
+          <a:prstGeom prst="rect">
+            <a:avLst/>
+          </a:prstGeom>
+          <a:noFill/>
+          <a:ln w="0">
+            <a:noFill/>
+          </a:ln>
+        </p:spPr>
+        <p:txBody>
+          <a:bodyPr lIns="91440" rIns="91440" tIns="45720" bIns="45720" anchor="b">
+            <a:noAutofit/>
+          </a:bodyPr>
+          <a:p>
+            <a:pPr indent="0" defTabSz="457200">
+              <a:lnSpc>
+                <a:spcPct val="100000"/>
+              </a:lnSpc>
+              <a:buNone/>
+              <a:tabLst>
+                <a:tab algn="l" pos="0"/>
+              </a:tabLst>
+            </a:pPr>
+            <a:r>
+              <a:rPr lang="en-US" sz="2000" b="1" u="none" strike="noStrike">
+                <a:solidFill>
+                  <a:schemeClr val="dk1"/>
+                </a:solidFill>
+                <a:effectLst/>
+                <a:uFillTx/>
+                <a:latin typeface="Calibri"/>
+              </a:rPr>
+              <a:t>Click to edit Master title style</a:t>
+            </a:r>
+            <a:endParaRPr lang="en-US" sz="2000" b="0" u="none" strike="noStrike">
+              <a:solidFill>
+                <a:srgbClr val="000000"/>
+              </a:solidFill>
+              <a:effectLst/>
+              <a:uFillTx/>
+              <a:latin typeface="Arial"/>
+            </a:endParaRPr>
+          </a:p>
+        </p:txBody>
+      </p:sp>
+      <p:sp>
+        <p:nvSpPr>
+          <p:cNvPr id="8" name="PlaceHolder 2"/>
+          <p:cNvSpPr>
+            <a:spLocks noGrp="1"/>
+          </p:cNvSpPr>
+          <p:nvPr>
+            <p:ph type="body"/>
+          </p:nvPr>
+        </p:nvSpPr>
+        <p:spPr>
+          <a:xfrm>
+            <a:off x="3575160" y="272880"/>
+            <a:ext cx="5110920" cy="5852520"/>
+          </a:xfrm>
+          <a:prstGeom prst="rect">
+            <a:avLst/>
+          </a:prstGeom>
+          <a:noFill/>
+          <a:ln w="0">
+            <a:noFill/>
+          </a:ln>
+        </p:spPr>
+        <p:txBody>
+          <a:bodyPr lIns="91440" rIns="91440" tIns="45720" bIns="45720" anchor="t">
+            <a:noAutofit/>
+          </a:bodyPr>
+          <a:p>
+            <a:pPr marL="343080" indent="-343080" defTabSz="457200">
+              <a:lnSpc>
+                <a:spcPct val="100000"/>
+              </a:lnSpc>
+              <a:spcBef>
+                <a:spcPts val="641"/>
+              </a:spcBef>
+              <a:buClr>
+                <a:srgbClr val="000000"/>
+              </a:buClr>
+              <a:buFont typeface="Arial"/>
+              <a:buChar char="•"/>
+            </a:pPr>
+            <a:r>
+              <a:rPr lang="en-US" sz="3200" b="0" u="none" strike="noStrike">
+                <a:solidFill>
+                  <a:schemeClr val="dk1"/>
+                </a:solidFill>
+                <a:effectLst/>
+                <a:uFillTx/>
+                <a:latin typeface="Calibri"/>
+              </a:rPr>
+              <a:t>Click to edit Master text styles</a:t>
+            </a:r>
+            <a:endParaRPr lang="en-US" sz="3200" b="0" u="none" strike="noStrike">
+              <a:solidFill>
+                <a:srgbClr val="000000"/>
+              </a:solidFill>
+              <a:effectLst/>
+              <a:uFillTx/>
+              <a:latin typeface="Arial"/>
+            </a:endParaRPr>
+          </a:p>
+          <a:p>
+            <a:pPr marL="743040" lvl="1" indent="-285840" defTabSz="457200">
+              <a:lnSpc>
+                <a:spcPct val="100000"/>
+              </a:lnSpc>
+              <a:spcBef>
+                <a:spcPts val="561"/>
+              </a:spcBef>
+              <a:buClr>
+                <a:srgbClr val="000000"/>
+              </a:buClr>
+              <a:buFont typeface="Arial"/>
+              <a:buChar char="–"/>
+            </a:pPr>
+            <a:r>
+              <a:rPr lang="en-US" sz="2800" b="0" u="none" strike="noStrike">
+                <a:solidFill>
+                  <a:schemeClr val="dk1"/>
+                </a:solidFill>
+                <a:effectLst/>
+                <a:uFillTx/>
+                <a:latin typeface="Calibri"/>
+              </a:rPr>
+              <a:t>Second level</a:t>
+            </a:r>
+            <a:endParaRPr lang="en-US" sz="2800" b="0" u="none" strike="noStrike">
+              <a:solidFill>
+                <a:srgbClr val="000000"/>
+              </a:solidFill>
+              <a:effectLst/>
+              <a:uFillTx/>
+              <a:latin typeface="Arial"/>
+            </a:endParaRPr>
+          </a:p>
+          <a:p>
+            <a:pPr marL="1143000" lvl="2" indent="-228600" defTabSz="457200">
+              <a:lnSpc>
+                <a:spcPct val="100000"/>
+              </a:lnSpc>
+              <a:spcBef>
+                <a:spcPts val="479"/>
+              </a:spcBef>
+              <a:buClr>
+                <a:srgbClr val="000000"/>
+              </a:buClr>
+              <a:buFont typeface="Arial"/>
+              <a:buChar char="•"/>
+            </a:pPr>
+            <a:r>
+              <a:rPr lang="en-US" sz="2400" b="0" u="none" strike="noStrike">
+                <a:solidFill>
+                  <a:schemeClr val="dk1"/>
+                </a:solidFill>
+                <a:effectLst/>
+                <a:uFillTx/>
+                <a:latin typeface="Calibri"/>
+              </a:rPr>
+              <a:t>Third level</a:t>
+            </a:r>
+            <a:endParaRPr lang="en-US" sz="2400" b="0" u="none" strike="noStrike">
+              <a:solidFill>
+                <a:srgbClr val="000000"/>
+              </a:solidFill>
+              <a:effectLst/>
+              <a:uFillTx/>
+              <a:latin typeface="Arial"/>
+            </a:endParaRPr>
+          </a:p>
+          <a:p>
+            <a:pPr marL="1600200" lvl="3" indent="-228600" defTabSz="457200">
+              <a:lnSpc>
+                <a:spcPct val="100000"/>
+              </a:lnSpc>
+              <a:spcBef>
+                <a:spcPts val="400"/>
+              </a:spcBef>
+              <a:buClr>
+                <a:srgbClr val="000000"/>
+              </a:buClr>
+              <a:buFont typeface="Arial"/>
+              <a:buChar char="–"/>
+            </a:pPr>
+            <a:r>
+              <a:rPr lang="en-US" sz="2000" b="0" u="none" strike="noStrike">
+                <a:solidFill>
+                  <a:schemeClr val="dk1"/>
+                </a:solidFill>
+                <a:effectLst/>
+                <a:uFillTx/>
+                <a:latin typeface="Calibri"/>
+              </a:rPr>
+              <a:t>Fourth level</a:t>
+            </a:r>
+            <a:endParaRPr lang="en-US" sz="2000" b="0" u="none" strike="noStrike">
+              <a:solidFill>
+                <a:srgbClr val="000000"/>
+              </a:solidFill>
+              <a:effectLst/>
+              <a:uFillTx/>
+              <a:latin typeface="Arial"/>
+            </a:endParaRPr>
+          </a:p>
+          <a:p>
+            <a:pPr marL="2057400" lvl="4" indent="-228600" defTabSz="457200">
+              <a:lnSpc>
+                <a:spcPct val="100000"/>
+              </a:lnSpc>
+              <a:spcBef>
+                <a:spcPts val="400"/>
+              </a:spcBef>
+              <a:buClr>
+                <a:srgbClr val="000000"/>
+              </a:buClr>
+              <a:buFont typeface="Arial"/>
+              <a:buChar char="»"/>
+            </a:pPr>
+            <a:r>
+              <a:rPr lang="en-US" sz="2000" b="0" u="none" strike="noStrike">
+                <a:solidFill>
+                  <a:schemeClr val="dk1"/>
+                </a:solidFill>
+                <a:effectLst/>
+                <a:uFillTx/>
+                <a:latin typeface="Calibri"/>
+              </a:rPr>
+              <a:t>Fifth level</a:t>
+            </a:r>
+            <a:endParaRPr lang="en-US" sz="2000" b="0" u="none" strike="noStrike">
+              <a:solidFill>
+                <a:srgbClr val="000000"/>
+              </a:solidFill>
+              <a:effectLst/>
+              <a:uFillTx/>
+              <a:latin typeface="Arial"/>
+            </a:endParaRPr>
+          </a:p>
+        </p:txBody>
+      </p:sp>
+      <p:sp>
+        <p:nvSpPr>
+          <p:cNvPr id="9" name="PlaceHolder 3"/>
+          <p:cNvSpPr>
+            <a:spLocks noGrp="1"/>
+          </p:cNvSpPr>
+          <p:nvPr>
+            <p:ph type="body"/>
+          </p:nvPr>
+        </p:nvSpPr>
+        <p:spPr>
+          <a:xfrm>
+            <a:off x="457200" y="1434960"/>
+            <a:ext cx="3007440" cy="4690440"/>
+          </a:xfrm>
+          <a:prstGeom prst="rect">
+            <a:avLst/>
+          </a:prstGeom>
+          <a:noFill/>
+          <a:ln w="0">
+            <a:noFill/>
+          </a:ln>
+        </p:spPr>
+        <p:txBody>
+          <a:bodyPr lIns="91440" rIns="91440" tIns="45720" bIns="45720" anchor="t">
+            <a:noAutofit/>
+          </a:bodyPr>
+          <a:p>
+            <a:pPr indent="0" defTabSz="457200">
+              <a:lnSpc>
+                <a:spcPct val="100000"/>
+              </a:lnSpc>
+              <a:spcBef>
+                <a:spcPts val="281"/>
+              </a:spcBef>
+              <a:buNone/>
+              <a:tabLst>
+                <a:tab algn="l" pos="0"/>
+              </a:tabLst>
+            </a:pPr>
+            <a:r>
+              <a:rPr lang="en-US" sz="1400" b="0" u="none" strike="noStrike">
+                <a:solidFill>
+                  <a:schemeClr val="dk1"/>
+                </a:solidFill>
+                <a:effectLst/>
+                <a:uFillTx/>
+                <a:latin typeface="Calibri"/>
+              </a:rPr>
+              <a:t>Click to edit Master text styles</a:t>
+            </a:r>
+            <a:endParaRPr lang="en-US" sz="1400" b="0" u="none" strike="noStrike">
+              <a:solidFill>
+                <a:srgbClr val="000000"/>
+              </a:solidFill>
+              <a:effectLst/>
+              <a:uFillTx/>
+              <a:latin typeface="Arial"/>
+            </a:endParaRPr>
+          </a:p>
+        </p:txBody>
+      </p:sp>
+      <p:sp>
+        <p:nvSpPr>
+          <p:cNvPr id="10" name="PlaceHolder 4"/>
+          <p:cNvSpPr>
+            <a:spLocks noGrp="1"/>
+          </p:cNvSpPr>
+          <p:nvPr>
+            <p:ph type="dt" idx="4"/>
+          </p:nvPr>
+        </p:nvSpPr>
+        <p:spPr>
+          <a:xfrm>
+            <a:off x="457200" y="6356520"/>
+            <a:ext cx="2133000" cy="364320"/>
+          </a:xfrm>
+          <a:prstGeom prst="rect">
+            <a:avLst/>
+          </a:prstGeom>
+          <a:noFill/>
+          <a:ln w="0">
+            <a:noFill/>
+          </a:ln>
+        </p:spPr>
+        <p:txBody>
+          <a:bodyPr lIns="91440" rIns="91440" tIns="45720" bIns="45720" anchor="ctr">
+            <a:noAutofit/>
+          </a:bodyPr>
+          <a:lstStyle>
+            <a:lvl1pPr indent="0" defTabSz="457200">
+              <a:lnSpc>
+                <a:spcPct val="100000"/>
+              </a:lnSpc>
+              <a:buNone/>
+              <a:tabLst>
+                <a:tab algn="l" pos="0"/>
+              </a:tabLst>
+              <a:defRPr lang="en-US" sz="1200" b="0" u="none" strike="noStrike">
+                <a:solidFill>
+                  <a:schemeClr val="dk1">
+                    <a:tint val="75000"/>
+                  </a:schemeClr>
+                </a:solidFill>
+                <a:effectLst/>
+                <a:uFillTx/>
+                <a:latin typeface="Calibri"/>
+              </a:defRPr>
+            </a:lvl1pPr>
+          </a:lstStyle>
+          <a:p>
+            <a:pPr indent="0" defTabSz="457200">
+              <a:lnSpc>
+                <a:spcPct val="100000"/>
+              </a:lnSpc>
+              <a:buNone/>
+              <a:tabLst>
+                <a:tab algn="l" pos="0"/>
+              </a:tabLst>
+            </a:pPr>
+            <a:r>
+              <a:rPr lang="en-US" sz="1200" b="0" u="none" strike="noStrike">
+                <a:solidFill>
+                  <a:schemeClr val="dk1">
+                    <a:tint val="75000"/>
+                  </a:schemeClr>
+                </a:solidFill>
+                <a:effectLst/>
+                <a:uFillTx/>
+                <a:latin typeface="Calibri"/>
+              </a:rPr>
+              <a:t>&lt;date/time&gt;</a:t>
+            </a:r>
+            <a:endParaRPr lang="en-US" sz="1200" b="0" u="none" strike="noStrike">
+              <a:solidFill>
+                <a:srgbClr val="000000"/>
+              </a:solidFill>
+              <a:effectLst/>
+              <a:uFillTx/>
+              <a:latin typeface="Times New Roman"/>
+            </a:endParaRPr>
+          </a:p>
+        </p:txBody>
+      </p:sp>
+      <p:sp>
+        <p:nvSpPr>
+          <p:cNvPr id="11" name="PlaceHolder 5"/>
+          <p:cNvSpPr>
+            <a:spLocks noGrp="1"/>
+          </p:cNvSpPr>
+          <p:nvPr>
+            <p:ph type="ftr" idx="5"/>
+          </p:nvPr>
+        </p:nvSpPr>
+        <p:spPr>
+          <a:xfrm>
+            <a:off x="3124080" y="6356520"/>
+            <a:ext cx="2894760" cy="364320"/>
+          </a:xfrm>
+          <a:prstGeom prst="rect">
+            <a:avLst/>
+          </a:prstGeom>
+          <a:noFill/>
+          <a:ln w="0">
+            <a:noFill/>
+          </a:ln>
+        </p:spPr>
+        <p:txBody>
+          <a:bodyPr lIns="91440" rIns="91440" tIns="45720" bIns="45720" anchor="ctr">
+            <a:noAutofit/>
+          </a:bodyPr>
+          <a:lstStyle>
+            <a:lvl1pPr indent="0" algn="ctr">
+              <a:lnSpc>
+                <a:spcPct val="100000"/>
+              </a:lnSpc>
+              <a:buNone/>
+              <a:tabLst>
+                <a:tab algn="l" pos="0"/>
+              </a:tabLst>
+              <a:defRPr lang="en-US" sz="1400" b="0" u="none" strike="noStrike">
+                <a:solidFill>
+                  <a:srgbClr val="000000"/>
+                </a:solidFill>
+                <a:effectLst/>
+                <a:uFillTx/>
+                <a:latin typeface="Times New Roman"/>
+              </a:defRPr>
+            </a:lvl1pPr>
+          </a:lstStyle>
+          <a:p>
+            <a:pPr indent="0" algn="ctr">
+              <a:lnSpc>
+                <a:spcPct val="100000"/>
+              </a:lnSpc>
+              <a:buNone/>
+              <a:tabLst>
+                <a:tab algn="l" pos="0"/>
+              </a:tabLst>
+            </a:pPr>
+            <a:r>
+              <a:rPr lang="en-US" sz="1400" b="0" u="none" strike="noStrike">
+                <a:solidFill>
+                  <a:srgbClr val="000000"/>
+                </a:solidFill>
+                <a:effectLst/>
+                <a:uFillTx/>
+                <a:latin typeface="Times New Roman"/>
+              </a:rPr>
+              <a:t>&lt;footer&gt;</a:t>
+            </a:r>
+            <a:endParaRPr lang="en-US" sz="1400" b="0" u="none" strike="noStrike">
+              <a:solidFill>
+                <a:srgbClr val="000000"/>
+              </a:solidFill>
+              <a:effectLst/>
+              <a:uFillTx/>
+              <a:latin typeface="Times New Roman"/>
+            </a:endParaRPr>
+          </a:p>
+        </p:txBody>
+      </p:sp>
+      <p:sp>
+        <p:nvSpPr>
+          <p:cNvPr id="12" name="PlaceHolder 6"/>
+          <p:cNvSpPr>
+            <a:spLocks noGrp="1"/>
+          </p:cNvSpPr>
+          <p:nvPr>
+            <p:ph type="sldNum" idx="6"/>
+          </p:nvPr>
+        </p:nvSpPr>
+        <p:spPr>
+          <a:xfrm>
+            <a:off x="6553080" y="6356520"/>
+            <a:ext cx="2133000" cy="364320"/>
+          </a:xfrm>
+          <a:prstGeom prst="rect">
+            <a:avLst/>
+          </a:prstGeom>
+          <a:noFill/>
+          <a:ln w="0">
+            <a:noFill/>
+          </a:ln>
+        </p:spPr>
+        <p:txBody>
+          <a:bodyPr lIns="91440" rIns="91440" tIns="45720" bIns="45720" anchor="ctr">
+            <a:noAutofit/>
+          </a:bodyPr>
+          <a:lstStyle>
+            <a:lvl1pPr indent="0" algn="r" defTabSz="457200">
+              <a:lnSpc>
+                <a:spcPct val="100000"/>
+              </a:lnSpc>
+              <a:buNone/>
+              <a:tabLst>
+                <a:tab algn="l" pos="0"/>
+              </a:tabLst>
+              <a:defRPr lang="en-US" sz="1200" b="0" u="none" strike="noStrike">
+                <a:solidFill>
+                  <a:schemeClr val="dk1">
+                    <a:tint val="75000"/>
+                  </a:schemeClr>
+                </a:solidFill>
+                <a:effectLst/>
+                <a:uFillTx/>
+                <a:latin typeface="Calibri"/>
+              </a:defRPr>
+            </a:lvl1pPr>
+          </a:lstStyle>
+          <a:p>
+            <a:pPr indent="0" algn="r" defTabSz="457200">
+              <a:lnSpc>
+                <a:spcPct val="100000"/>
+              </a:lnSpc>
+              <a:buNone/>
+              <a:tabLst>
+                <a:tab algn="l" pos="0"/>
+              </a:tabLst>
+            </a:pPr>
+            <a:fld id="{7CFA7AA5-B132-4637-A59B-9FBB52F10992}" type="slidenum">
+              <a:rPr lang="en-US" sz="1200" b="0" u="none" strike="noStrike">
+                <a:solidFill>
+                  <a:schemeClr val="dk1">
+                    <a:tint val="75000"/>
+                  </a:schemeClr>
+                </a:solidFill>
+                <a:effectLst/>
+                <a:uFillTx/>
+                <a:latin typeface="Calibri"/>
+              </a:rPr>
+              <a:t>&lt;number&gt;</a:t>
+            </a:fld>
+            <a:endParaRPr lang="en-US" sz="1200" b="0" u="none" strike="noStrike">
+              <a:solidFill>
+                <a:srgbClr val="000000"/>
+              </a:solidFill>
+              <a:effectLst/>
+              <a:uFillTx/>
+              <a:latin typeface="Times New Roman"/>
+            </a:endParaRPr>
+          </a:p>
+        </p:txBody>
+      </p:sp>
+    </p:spTree>
+  </p:cSld>
+</p:sldLayout>
+</file>
+
+<file path=ppt/slideLayouts/slideLayout3.xml><?xml version="1.0" encoding="utf-8"?>
 <p:sldLayout xmlns:a="http://schemas.openxmlformats.org/drawingml/2006/main" xmlns:p="http://schemas.openxmlformats.org/presentationml/2006/main" xmlns:r="http://schemas.openxmlformats.org/officeDocument/2006/relationships" xmlns:p14="http://schemas.microsoft.com/office/powerpoint/2010/main" xmlns:p15="http://schemas.microsoft.com/office/powerpoint/2012/main" xmlns:mc="http://schemas.openxmlformats.org/markup-compatibility/2006" type="blank" preserve="1">
   <p:cSld name="Picture with Caption">
     <p:bg>
@@ -908,7 +2418,7 @@
       </p:grpSpPr>
       <p:sp>
         <p:nvSpPr>
-          <p:cNvPr id="55" name="PlaceHolder 1"/>
+          <p:cNvPr id="13" name="PlaceHolder 1"/>
           <p:cNvSpPr>
             <a:spLocks noGrp="1"/>
           </p:cNvSpPr>
@@ -919,7 +2429,7 @@
         <p:spPr>
           <a:xfrm>
             <a:off x="1792440" y="4800600"/>
-            <a:ext cx="5486040" cy="566280"/>
+            <a:ext cx="5485680" cy="565920"/>
           </a:xfrm>
           <a:prstGeom prst="rect">
             <a:avLst/>
@@ -939,6 +2449,9 @@
                 <a:spcPct val="100000"/>
               </a:lnSpc>
               <a:buNone/>
+              <a:tabLst>
+                <a:tab algn="l" pos="0"/>
+              </a:tabLst>
             </a:pPr>
             <a:r>
               <a:rPr lang="en-US" sz="2000" b="1" u="none" strike="noStrike">
@@ -953,18 +2466,18 @@
             </a:r>
             <a:endParaRPr lang="en-US" sz="2000" b="0" u="none" strike="noStrike">
               <a:solidFill>
-                <a:schemeClr val="dk1"/>
-              </a:solidFill>
-              <a:effectLst/>
-              <a:uFillTx/>
-              <a:latin typeface="Calibri"/>
+                <a:srgbClr val="000000"/>
+              </a:solidFill>
+              <a:effectLst/>
+              <a:uFillTx/>
+              <a:latin typeface="Arial"/>
             </a:endParaRPr>
           </a:p>
         </p:txBody>
       </p:sp>
       <p:sp>
         <p:nvSpPr>
-          <p:cNvPr id="56" name="PlaceHolder 2"/>
+          <p:cNvPr id="14" name="PlaceHolder 2"/>
           <p:cNvSpPr>
             <a:spLocks noGrp="1"/>
           </p:cNvSpPr>
@@ -975,7 +2488,7 @@
         <p:spPr>
           <a:xfrm>
             <a:off x="1792440" y="612720"/>
-            <a:ext cx="5486040" cy="4114440"/>
+            <a:ext cx="5485680" cy="4114080"/>
           </a:xfrm>
           <a:prstGeom prst="rect">
             <a:avLst/>
@@ -991,6 +2504,9 @@
           </a:bodyPr>
           <a:p>
             <a:pPr marL="432000" indent="-324000">
+              <a:lnSpc>
+                <a:spcPct val="100000"/>
+              </a:lnSpc>
               <a:spcBef>
                 <a:spcPts val="1417"/>
               </a:spcBef>
@@ -1014,15 +2530,18 @@
             </a:r>
             <a:endParaRPr lang="en-US" sz="3200" b="0" u="none" strike="noStrike">
               <a:solidFill>
-                <a:schemeClr val="dk1"/>
-              </a:solidFill>
-              <a:effectLst/>
-              <a:uFillTx/>
-              <a:latin typeface="Calibri"/>
+                <a:srgbClr val="000000"/>
+              </a:solidFill>
+              <a:effectLst/>
+              <a:uFillTx/>
+              <a:latin typeface="Arial"/>
             </a:endParaRPr>
           </a:p>
           <a:p>
             <a:pPr marL="864000" lvl="1" indent="-324000">
+              <a:lnSpc>
+                <a:spcPct val="100000"/>
+              </a:lnSpc>
               <a:spcBef>
                 <a:spcPts val="1134"/>
               </a:spcBef>
@@ -1046,15 +2565,18 @@
             </a:r>
             <a:endParaRPr lang="en-US" sz="3200" b="0" u="none" strike="noStrike">
               <a:solidFill>
-                <a:schemeClr val="dk1"/>
-              </a:solidFill>
-              <a:effectLst/>
-              <a:uFillTx/>
-              <a:latin typeface="Calibri"/>
+                <a:srgbClr val="000000"/>
+              </a:solidFill>
+              <a:effectLst/>
+              <a:uFillTx/>
+              <a:latin typeface="Arial"/>
             </a:endParaRPr>
           </a:p>
           <a:p>
             <a:pPr marL="1296000" lvl="2" indent="-288000">
+              <a:lnSpc>
+                <a:spcPct val="100000"/>
+              </a:lnSpc>
               <a:spcBef>
                 <a:spcPts val="850"/>
               </a:spcBef>
@@ -1078,15 +2600,18 @@
             </a:r>
             <a:endParaRPr lang="en-US" sz="3200" b="0" u="none" strike="noStrike">
               <a:solidFill>
-                <a:schemeClr val="dk1"/>
-              </a:solidFill>
-              <a:effectLst/>
-              <a:uFillTx/>
-              <a:latin typeface="Calibri"/>
+                <a:srgbClr val="000000"/>
+              </a:solidFill>
+              <a:effectLst/>
+              <a:uFillTx/>
+              <a:latin typeface="Arial"/>
             </a:endParaRPr>
           </a:p>
           <a:p>
             <a:pPr marL="1728000" lvl="3" indent="-216000">
+              <a:lnSpc>
+                <a:spcPct val="100000"/>
+              </a:lnSpc>
               <a:spcBef>
                 <a:spcPts val="567"/>
               </a:spcBef>
@@ -1110,15 +2635,18 @@
             </a:r>
             <a:endParaRPr lang="en-US" sz="3200" b="0" u="none" strike="noStrike">
               <a:solidFill>
-                <a:schemeClr val="dk1"/>
-              </a:solidFill>
-              <a:effectLst/>
-              <a:uFillTx/>
-              <a:latin typeface="Calibri"/>
+                <a:srgbClr val="000000"/>
+              </a:solidFill>
+              <a:effectLst/>
+              <a:uFillTx/>
+              <a:latin typeface="Arial"/>
             </a:endParaRPr>
           </a:p>
           <a:p>
             <a:pPr marL="2160000" lvl="4" indent="-216000">
+              <a:lnSpc>
+                <a:spcPct val="100000"/>
+              </a:lnSpc>
               <a:spcBef>
                 <a:spcPts val="283"/>
               </a:spcBef>
@@ -1142,15 +2670,18 @@
             </a:r>
             <a:endParaRPr lang="en-US" sz="3200" b="0" u="none" strike="noStrike">
               <a:solidFill>
-                <a:schemeClr val="dk1"/>
-              </a:solidFill>
-              <a:effectLst/>
-              <a:uFillTx/>
-              <a:latin typeface="Calibri"/>
+                <a:srgbClr val="000000"/>
+              </a:solidFill>
+              <a:effectLst/>
+              <a:uFillTx/>
+              <a:latin typeface="Arial"/>
             </a:endParaRPr>
           </a:p>
           <a:p>
             <a:pPr marL="2592000" lvl="5" indent="-216000">
+              <a:lnSpc>
+                <a:spcPct val="100000"/>
+              </a:lnSpc>
               <a:spcBef>
                 <a:spcPts val="283"/>
               </a:spcBef>
@@ -1174,15 +2705,18 @@
             </a:r>
             <a:endParaRPr lang="en-US" sz="3200" b="0" u="none" strike="noStrike">
               <a:solidFill>
-                <a:schemeClr val="dk1"/>
-              </a:solidFill>
-              <a:effectLst/>
-              <a:uFillTx/>
-              <a:latin typeface="Calibri"/>
+                <a:srgbClr val="000000"/>
+              </a:solidFill>
+              <a:effectLst/>
+              <a:uFillTx/>
+              <a:latin typeface="Arial"/>
             </a:endParaRPr>
           </a:p>
           <a:p>
             <a:pPr marL="3024000" lvl="6" indent="-216000">
+              <a:lnSpc>
+                <a:spcPct val="100000"/>
+              </a:lnSpc>
               <a:spcBef>
                 <a:spcPts val="283"/>
               </a:spcBef>
@@ -1206,18 +2740,18 @@
             </a:r>
             <a:endParaRPr lang="en-US" sz="3200" b="0" u="none" strike="noStrike">
               <a:solidFill>
-                <a:schemeClr val="dk1"/>
-              </a:solidFill>
-              <a:effectLst/>
-              <a:uFillTx/>
-              <a:latin typeface="Calibri"/>
+                <a:srgbClr val="000000"/>
+              </a:solidFill>
+              <a:effectLst/>
+              <a:uFillTx/>
+              <a:latin typeface="Arial"/>
             </a:endParaRPr>
           </a:p>
         </p:txBody>
       </p:sp>
       <p:sp>
         <p:nvSpPr>
-          <p:cNvPr id="57" name="PlaceHolder 3"/>
+          <p:cNvPr id="15" name="PlaceHolder 3"/>
           <p:cNvSpPr>
             <a:spLocks noGrp="1"/>
           </p:cNvSpPr>
@@ -1228,7 +2762,7 @@
         <p:spPr>
           <a:xfrm>
             <a:off x="1792440" y="5367240"/>
-            <a:ext cx="5486040" cy="804600"/>
+            <a:ext cx="5485680" cy="804240"/>
           </a:xfrm>
           <a:prstGeom prst="rect">
             <a:avLst/>
@@ -1268,29 +2802,29 @@
             </a:r>
             <a:endParaRPr lang="en-US" sz="1400" b="0" u="none" strike="noStrike">
               <a:solidFill>
-                <a:schemeClr val="dk1"/>
-              </a:solidFill>
-              <a:effectLst/>
-              <a:uFillTx/>
-              <a:latin typeface="Calibri"/>
+                <a:srgbClr val="000000"/>
+              </a:solidFill>
+              <a:effectLst/>
+              <a:uFillTx/>
+              <a:latin typeface="Arial"/>
             </a:endParaRPr>
           </a:p>
         </p:txBody>
       </p:sp>
       <p:sp>
         <p:nvSpPr>
-          <p:cNvPr id="58" name="PlaceHolder 4"/>
+          <p:cNvPr id="16" name="PlaceHolder 4"/>
           <p:cNvSpPr>
             <a:spLocks noGrp="1"/>
           </p:cNvSpPr>
           <p:nvPr>
-            <p:ph type="dt" idx="31"/>
+            <p:ph type="dt" idx="7"/>
           </p:nvPr>
         </p:nvSpPr>
         <p:spPr>
           <a:xfrm>
             <a:off x="457200" y="6356520"/>
-            <a:ext cx="2133360" cy="364680"/>
+            <a:ext cx="2133000" cy="364320"/>
           </a:xfrm>
           <a:prstGeom prst="rect">
             <a:avLst/>
@@ -1310,6 +2844,9 @@
                 <a:spcPct val="100000"/>
               </a:lnSpc>
               <a:buNone/>
+              <a:tabLst>
+                <a:tab algn="l" pos="0"/>
+              </a:tabLst>
               <a:defRPr lang="en-US" sz="1200" b="0" u="none" strike="noStrike">
                 <a:solidFill>
                   <a:schemeClr val="dk1">
@@ -1328,6 +2865,9 @@
                 <a:spcPct val="100000"/>
               </a:lnSpc>
               <a:buNone/>
+              <a:tabLst>
+                <a:tab algn="l" pos="0"/>
+              </a:tabLst>
             </a:pPr>
             <a:r>
               <a:rPr lang="en-US" sz="1200" b="0" u="none" strike="noStrike">
@@ -1355,18 +2895,18 @@
       </p:sp>
       <p:sp>
         <p:nvSpPr>
-          <p:cNvPr id="59" name="PlaceHolder 5"/>
+          <p:cNvPr id="17" name="PlaceHolder 5"/>
           <p:cNvSpPr>
             <a:spLocks noGrp="1"/>
           </p:cNvSpPr>
           <p:nvPr>
-            <p:ph type="ftr" idx="32"/>
+            <p:ph type="ftr" idx="8"/>
           </p:nvPr>
         </p:nvSpPr>
         <p:spPr>
           <a:xfrm>
             <a:off x="3124080" y="6356520"/>
-            <a:ext cx="2895120" cy="364680"/>
+            <a:ext cx="2894760" cy="364320"/>
           </a:xfrm>
           <a:prstGeom prst="rect">
             <a:avLst/>
@@ -1382,7 +2922,13 @@
           </a:bodyPr>
           <a:lstStyle>
             <a:lvl1pPr indent="0" algn="ctr">
+              <a:lnSpc>
+                <a:spcPct val="100000"/>
+              </a:lnSpc>
               <a:buNone/>
+              <a:tabLst>
+                <a:tab algn="l" pos="0"/>
+              </a:tabLst>
               <a:defRPr lang="en-US" sz="1400" b="0" u="none" strike="noStrike">
                 <a:solidFill>
                   <a:srgbClr val="000000"/>
@@ -1395,7 +2941,13 @@
           </a:lstStyle>
           <a:p>
             <a:pPr indent="0" algn="ctr">
+              <a:lnSpc>
+                <a:spcPct val="100000"/>
+              </a:lnSpc>
               <a:buNone/>
+              <a:tabLst>
+                <a:tab algn="l" pos="0"/>
+              </a:tabLst>
             </a:pPr>
             <a:r>
               <a:rPr lang="en-US" sz="1400" b="0" u="none" strike="noStrike">
@@ -1421,18 +2973,18 @@
       </p:sp>
       <p:sp>
         <p:nvSpPr>
-          <p:cNvPr id="60" name="PlaceHolder 6"/>
+          <p:cNvPr id="18" name="PlaceHolder 6"/>
           <p:cNvSpPr>
             <a:spLocks noGrp="1"/>
           </p:cNvSpPr>
           <p:nvPr>
-            <p:ph type="sldNum" idx="33"/>
+            <p:ph type="sldNum" idx="9"/>
           </p:nvPr>
         </p:nvSpPr>
         <p:spPr>
           <a:xfrm>
             <a:off x="6553080" y="6356520"/>
-            <a:ext cx="2133360" cy="364680"/>
+            <a:ext cx="2133000" cy="364320"/>
           </a:xfrm>
           <a:prstGeom prst="rect">
             <a:avLst/>
@@ -1452,6 +3004,9 @@
                 <a:spcPct val="100000"/>
               </a:lnSpc>
               <a:buNone/>
+              <a:tabLst>
+                <a:tab algn="l" pos="0"/>
+              </a:tabLst>
               <a:defRPr lang="en-US" sz="1200" b="0" u="none" strike="noStrike">
                 <a:solidFill>
                   <a:schemeClr val="dk1">
@@ -1470,8 +3025,11 @@
                 <a:spcPct val="100000"/>
               </a:lnSpc>
               <a:buNone/>
-            </a:pPr>
-            <a:fld id="{E924DDE4-D626-45E3-998D-CA185A37B35B}" type="slidenum">
+              <a:tabLst>
+                <a:tab algn="l" pos="0"/>
+              </a:tabLst>
+            </a:pPr>
+            <a:fld id="{56C3D3CD-C22D-4CAB-8332-667A1A493CC3}" type="slidenum">
               <a:rPr lang="en-US" sz="1200" b="0" u="none" strike="noStrike">
                 <a:solidFill>
                   <a:schemeClr val="dk1">
@@ -1500,7 +3058,337 @@
 </p:sldLayout>
 </file>
 
-<file path=ppt/slideLayouts/slideLayout2.xml><?xml version="1.0" encoding="utf-8"?>
+<file path=ppt/slideLayouts/slideLayout4.xml><?xml version="1.0" encoding="utf-8"?>
+<p:sldLayout xmlns:a="http://schemas.openxmlformats.org/drawingml/2006/main" xmlns:p="http://schemas.openxmlformats.org/presentationml/2006/main" xmlns:r="http://schemas.openxmlformats.org/officeDocument/2006/relationships" xmlns:p14="http://schemas.microsoft.com/office/powerpoint/2010/main" xmlns:p15="http://schemas.microsoft.com/office/powerpoint/2012/main" xmlns:mc="http://schemas.openxmlformats.org/markup-compatibility/2006" type="title" preserve="1">
+  <p:cSld name="Title Slide">
+    <p:bg>
+      <p:bgPr>
+        <a:solidFill>
+          <a:srgbClr val="ffffff"/>
+        </a:solidFill>
+      </p:bgPr>
+    </p:bg>
+    <p:spTree>
+      <p:nvGrpSpPr>
+        <p:cNvPr id="1" name=""/>
+        <p:cNvGrpSpPr/>
+        <p:nvPr/>
+      </p:nvGrpSpPr>
+      <p:grpSpPr>
+        <a:xfrm>
+          <a:off x="0" y="0"/>
+          <a:ext cx="0" cy="0"/>
+          <a:chOff x="0" y="0"/>
+          <a:chExt cx="0" cy="0"/>
+        </a:xfrm>
+      </p:grpSpPr>
+      <p:sp>
+        <p:nvSpPr>
+          <p:cNvPr id="19" name="PlaceHolder 1"/>
+          <p:cNvSpPr>
+            <a:spLocks noGrp="1"/>
+          </p:cNvSpPr>
+          <p:nvPr>
+            <p:ph type="title"/>
+          </p:nvPr>
+        </p:nvSpPr>
+        <p:spPr>
+          <a:xfrm>
+            <a:off x="685800" y="2130480"/>
+            <a:ext cx="7771680" cy="1469160"/>
+          </a:xfrm>
+          <a:prstGeom prst="rect">
+            <a:avLst/>
+          </a:prstGeom>
+          <a:noFill/>
+          <a:ln w="0">
+            <a:noFill/>
+          </a:ln>
+        </p:spPr>
+        <p:txBody>
+          <a:bodyPr lIns="91440" rIns="91440" tIns="45720" bIns="45720" anchor="ctr">
+            <a:noAutofit/>
+          </a:bodyPr>
+          <a:p>
+            <a:pPr indent="0" algn="ctr" defTabSz="457200">
+              <a:lnSpc>
+                <a:spcPct val="100000"/>
+              </a:lnSpc>
+              <a:buNone/>
+              <a:tabLst>
+                <a:tab algn="l" pos="0"/>
+              </a:tabLst>
+            </a:pPr>
+            <a:r>
+              <a:rPr lang="en-US" sz="4400" b="0" u="none" strike="noStrike">
+                <a:solidFill>
+                  <a:schemeClr val="dk1"/>
+                </a:solidFill>
+                <a:effectLst/>
+                <a:uFillTx/>
+                <a:latin typeface="Calibri"/>
+              </a:rPr>
+              <a:t>Click to edit Master title style</a:t>
+            </a:r>
+            <a:endParaRPr lang="en-US" sz="4400" b="0" u="none" strike="noStrike">
+              <a:solidFill>
+                <a:srgbClr val="000000"/>
+              </a:solidFill>
+              <a:effectLst/>
+              <a:uFillTx/>
+              <a:latin typeface="Arial"/>
+            </a:endParaRPr>
+          </a:p>
+        </p:txBody>
+      </p:sp>
+      <p:sp>
+        <p:nvSpPr>
+          <p:cNvPr id="20" name="PlaceHolder 2"/>
+          <p:cNvSpPr>
+            <a:spLocks noGrp="1"/>
+          </p:cNvSpPr>
+          <p:nvPr>
+            <p:ph type="dt" idx="10"/>
+          </p:nvPr>
+        </p:nvSpPr>
+        <p:spPr>
+          <a:xfrm>
+            <a:off x="457200" y="6356520"/>
+            <a:ext cx="2133000" cy="364320"/>
+          </a:xfrm>
+          <a:prstGeom prst="rect">
+            <a:avLst/>
+          </a:prstGeom>
+          <a:noFill/>
+          <a:ln w="0">
+            <a:noFill/>
+          </a:ln>
+        </p:spPr>
+        <p:txBody>
+          <a:bodyPr lIns="91440" rIns="91440" tIns="45720" bIns="45720" anchor="ctr">
+            <a:noAutofit/>
+          </a:bodyPr>
+          <a:lstStyle>
+            <a:lvl1pPr indent="0" defTabSz="457200">
+              <a:lnSpc>
+                <a:spcPct val="100000"/>
+              </a:lnSpc>
+              <a:buNone/>
+              <a:tabLst>
+                <a:tab algn="l" pos="0"/>
+              </a:tabLst>
+              <a:defRPr lang="en-US" sz="1200" b="0" u="none" strike="noStrike">
+                <a:solidFill>
+                  <a:schemeClr val="dk1">
+                    <a:tint val="75000"/>
+                  </a:schemeClr>
+                </a:solidFill>
+                <a:effectLst/>
+                <a:uFillTx/>
+                <a:latin typeface="Calibri"/>
+              </a:defRPr>
+            </a:lvl1pPr>
+          </a:lstStyle>
+          <a:p>
+            <a:pPr indent="0" defTabSz="457200">
+              <a:lnSpc>
+                <a:spcPct val="100000"/>
+              </a:lnSpc>
+              <a:buNone/>
+              <a:tabLst>
+                <a:tab algn="l" pos="0"/>
+              </a:tabLst>
+            </a:pPr>
+            <a:r>
+              <a:rPr lang="en-US" sz="1200" b="0" u="none" strike="noStrike">
+                <a:solidFill>
+                  <a:schemeClr val="dk1">
+                    <a:tint val="75000"/>
+                  </a:schemeClr>
+                </a:solidFill>
+                <a:effectLst/>
+                <a:uFillTx/>
+                <a:latin typeface="Calibri"/>
+              </a:rPr>
+              <a:t>&lt;date/time&gt;</a:t>
+            </a:r>
+            <a:endParaRPr lang="en-US" sz="1200" b="0" u="none" strike="noStrike">
+              <a:solidFill>
+                <a:srgbClr val="000000"/>
+              </a:solidFill>
+              <a:effectLst/>
+              <a:uFillTx/>
+              <a:latin typeface="Times New Roman"/>
+            </a:endParaRPr>
+          </a:p>
+        </p:txBody>
+      </p:sp>
+      <p:sp>
+        <p:nvSpPr>
+          <p:cNvPr id="21" name="PlaceHolder 3"/>
+          <p:cNvSpPr>
+            <a:spLocks noGrp="1"/>
+          </p:cNvSpPr>
+          <p:nvPr>
+            <p:ph type="ftr" idx="11"/>
+          </p:nvPr>
+        </p:nvSpPr>
+        <p:spPr>
+          <a:xfrm>
+            <a:off x="3124080" y="6356520"/>
+            <a:ext cx="2894760" cy="364320"/>
+          </a:xfrm>
+          <a:prstGeom prst="rect">
+            <a:avLst/>
+          </a:prstGeom>
+          <a:noFill/>
+          <a:ln w="0">
+            <a:noFill/>
+          </a:ln>
+        </p:spPr>
+        <p:txBody>
+          <a:bodyPr lIns="91440" rIns="91440" tIns="45720" bIns="45720" anchor="ctr">
+            <a:noAutofit/>
+          </a:bodyPr>
+          <a:lstStyle>
+            <a:lvl1pPr indent="0" algn="ctr">
+              <a:lnSpc>
+                <a:spcPct val="100000"/>
+              </a:lnSpc>
+              <a:buNone/>
+              <a:tabLst>
+                <a:tab algn="l" pos="0"/>
+              </a:tabLst>
+              <a:defRPr lang="en-US" sz="1400" b="0" u="none" strike="noStrike">
+                <a:solidFill>
+                  <a:srgbClr val="000000"/>
+                </a:solidFill>
+                <a:effectLst/>
+                <a:uFillTx/>
+                <a:latin typeface="Times New Roman"/>
+              </a:defRPr>
+            </a:lvl1pPr>
+          </a:lstStyle>
+          <a:p>
+            <a:pPr indent="0" algn="ctr">
+              <a:lnSpc>
+                <a:spcPct val="100000"/>
+              </a:lnSpc>
+              <a:buNone/>
+              <a:tabLst>
+                <a:tab algn="l" pos="0"/>
+              </a:tabLst>
+            </a:pPr>
+            <a:r>
+              <a:rPr lang="en-US" sz="1400" b="0" u="none" strike="noStrike">
+                <a:solidFill>
+                  <a:srgbClr val="000000"/>
+                </a:solidFill>
+                <a:effectLst/>
+                <a:uFillTx/>
+                <a:latin typeface="Times New Roman"/>
+              </a:rPr>
+              <a:t>&lt;footer&gt;</a:t>
+            </a:r>
+            <a:endParaRPr lang="en-US" sz="1400" b="0" u="none" strike="noStrike">
+              <a:solidFill>
+                <a:srgbClr val="000000"/>
+              </a:solidFill>
+              <a:effectLst/>
+              <a:uFillTx/>
+              <a:latin typeface="Times New Roman"/>
+            </a:endParaRPr>
+          </a:p>
+        </p:txBody>
+      </p:sp>
+      <p:sp>
+        <p:nvSpPr>
+          <p:cNvPr id="22" name="PlaceHolder 4"/>
+          <p:cNvSpPr>
+            <a:spLocks noGrp="1"/>
+          </p:cNvSpPr>
+          <p:nvPr>
+            <p:ph type="sldNum" idx="12"/>
+          </p:nvPr>
+        </p:nvSpPr>
+        <p:spPr>
+          <a:xfrm>
+            <a:off x="6553080" y="6356520"/>
+            <a:ext cx="2133000" cy="364320"/>
+          </a:xfrm>
+          <a:prstGeom prst="rect">
+            <a:avLst/>
+          </a:prstGeom>
+          <a:noFill/>
+          <a:ln w="0">
+            <a:noFill/>
+          </a:ln>
+        </p:spPr>
+        <p:txBody>
+          <a:bodyPr lIns="91440" rIns="91440" tIns="45720" bIns="45720" anchor="ctr">
+            <a:noAutofit/>
+          </a:bodyPr>
+          <a:lstStyle>
+            <a:lvl1pPr indent="0" algn="r" defTabSz="457200">
+              <a:lnSpc>
+                <a:spcPct val="100000"/>
+              </a:lnSpc>
+              <a:buNone/>
+              <a:tabLst>
+                <a:tab algn="l" pos="0"/>
+              </a:tabLst>
+              <a:defRPr lang="en-US" sz="1200" b="0" u="none" strike="noStrike">
+                <a:solidFill>
+                  <a:schemeClr val="dk1">
+                    <a:tint val="75000"/>
+                  </a:schemeClr>
+                </a:solidFill>
+                <a:effectLst/>
+                <a:uFillTx/>
+                <a:latin typeface="Calibri"/>
+              </a:defRPr>
+            </a:lvl1pPr>
+          </a:lstStyle>
+          <a:p>
+            <a:pPr indent="0" algn="r" defTabSz="457200">
+              <a:lnSpc>
+                <a:spcPct val="100000"/>
+              </a:lnSpc>
+              <a:buNone/>
+              <a:tabLst>
+                <a:tab algn="l" pos="0"/>
+              </a:tabLst>
+            </a:pPr>
+            <a:fld id="{B5F5F12E-67E1-4C7E-B768-3D958B0CB239}" type="slidenum">
+              <a:rPr lang="en-US" sz="1200" b="0" u="none" strike="noStrike">
+                <a:solidFill>
+                  <a:schemeClr val="dk1">
+                    <a:tint val="75000"/>
+                  </a:schemeClr>
+                </a:solidFill>
+                <a:effectLst/>
+                <a:uFillTx/>
+                <a:latin typeface="Calibri"/>
+              </a:rPr>
+              <a:t>&lt;number&gt;</a:t>
+            </a:fld>
+            <a:endParaRPr lang="en-US" sz="1200" b="0" u="none" strike="noStrike">
+              <a:solidFill>
+                <a:srgbClr val="000000"/>
+              </a:solidFill>
+              <a:effectLst/>
+              <a:uFillTx/>
+              <a:latin typeface="Times New Roman"/>
+            </a:endParaRPr>
+          </a:p>
+        </p:txBody>
+      </p:sp>
+    </p:spTree>
+  </p:cSld>
+</p:sldLayout>
+</file>
+
+<file path=ppt/slideLayouts/slideLayout5.xml><?xml version="1.0" encoding="utf-8"?>
 <p:sldLayout xmlns:a="http://schemas.openxmlformats.org/drawingml/2006/main" xmlns:p="http://schemas.openxmlformats.org/presentationml/2006/main" xmlns:r="http://schemas.openxmlformats.org/officeDocument/2006/relationships" xmlns:p14="http://schemas.microsoft.com/office/powerpoint/2010/main" xmlns:p15="http://schemas.microsoft.com/office/powerpoint/2012/main" xmlns:mc="http://schemas.openxmlformats.org/markup-compatibility/2006" type="vertTx" preserve="1">
   <p:cSld name="Title and Vertical Text">
     <p:bg>
@@ -1526,7 +3414,7 @@
       </p:grpSpPr>
       <p:sp>
         <p:nvSpPr>
-          <p:cNvPr id="6" name="PlaceHolder 1"/>
+          <p:cNvPr id="23" name="PlaceHolder 1"/>
           <p:cNvSpPr>
             <a:spLocks noGrp="1"/>
           </p:cNvSpPr>
@@ -1537,7 +3425,7 @@
         <p:spPr>
           <a:xfrm>
             <a:off x="457200" y="274680"/>
-            <a:ext cx="8229240" cy="1142640"/>
+            <a:ext cx="8228880" cy="1142280"/>
           </a:xfrm>
           <a:prstGeom prst="rect">
             <a:avLst/>
@@ -1557,6 +3445,9 @@
                 <a:spcPct val="100000"/>
               </a:lnSpc>
               <a:buNone/>
+              <a:tabLst>
+                <a:tab algn="l" pos="0"/>
+              </a:tabLst>
             </a:pPr>
             <a:r>
               <a:rPr lang="en-US" sz="4400" b="0" u="none" strike="noStrike">
@@ -1571,18 +3462,18 @@
             </a:r>
             <a:endParaRPr lang="en-US" sz="4400" b="0" u="none" strike="noStrike">
               <a:solidFill>
-                <a:schemeClr val="dk1"/>
-              </a:solidFill>
-              <a:effectLst/>
-              <a:uFillTx/>
-              <a:latin typeface="Calibri"/>
+                <a:srgbClr val="000000"/>
+              </a:solidFill>
+              <a:effectLst/>
+              <a:uFillTx/>
+              <a:latin typeface="Arial"/>
             </a:endParaRPr>
           </a:p>
         </p:txBody>
       </p:sp>
       <p:sp>
         <p:nvSpPr>
-          <p:cNvPr id="7" name="PlaceHolder 2"/>
+          <p:cNvPr id="24" name="PlaceHolder 2"/>
           <p:cNvSpPr>
             <a:spLocks noGrp="1"/>
           </p:cNvSpPr>
@@ -1593,7 +3484,7 @@
         <p:spPr>
           <a:xfrm>
             <a:off x="457200" y="1600200"/>
-            <a:ext cx="8229240" cy="4525560"/>
+            <a:ext cx="8228880" cy="4525200"/>
           </a:xfrm>
           <a:prstGeom prst="rect">
             <a:avLst/>
@@ -1634,11 +3525,11 @@
             </a:r>
             <a:endParaRPr lang="en-US" sz="3200" b="0" u="none" strike="noStrike">
               <a:solidFill>
-                <a:schemeClr val="dk1"/>
-              </a:solidFill>
-              <a:effectLst/>
-              <a:uFillTx/>
-              <a:latin typeface="Calibri"/>
+                <a:srgbClr val="000000"/>
+              </a:solidFill>
+              <a:effectLst/>
+              <a:uFillTx/>
+              <a:latin typeface="Arial"/>
             </a:endParaRPr>
           </a:p>
           <a:p>
@@ -1668,11 +3559,11 @@
             </a:r>
             <a:endParaRPr lang="en-US" sz="2800" b="0" u="none" strike="noStrike">
               <a:solidFill>
-                <a:schemeClr val="dk1"/>
-              </a:solidFill>
-              <a:effectLst/>
-              <a:uFillTx/>
-              <a:latin typeface="Calibri"/>
+                <a:srgbClr val="000000"/>
+              </a:solidFill>
+              <a:effectLst/>
+              <a:uFillTx/>
+              <a:latin typeface="Arial"/>
             </a:endParaRPr>
           </a:p>
           <a:p>
@@ -1702,11 +3593,11 @@
             </a:r>
             <a:endParaRPr lang="en-US" sz="2400" b="0" u="none" strike="noStrike">
               <a:solidFill>
-                <a:schemeClr val="dk1"/>
-              </a:solidFill>
-              <a:effectLst/>
-              <a:uFillTx/>
-              <a:latin typeface="Calibri"/>
+                <a:srgbClr val="000000"/>
+              </a:solidFill>
+              <a:effectLst/>
+              <a:uFillTx/>
+              <a:latin typeface="Arial"/>
             </a:endParaRPr>
           </a:p>
           <a:p>
@@ -1736,11 +3627,11 @@
             </a:r>
             <a:endParaRPr lang="en-US" sz="2000" b="0" u="none" strike="noStrike">
               <a:solidFill>
-                <a:schemeClr val="dk1"/>
-              </a:solidFill>
-              <a:effectLst/>
-              <a:uFillTx/>
-              <a:latin typeface="Calibri"/>
+                <a:srgbClr val="000000"/>
+              </a:solidFill>
+              <a:effectLst/>
+              <a:uFillTx/>
+              <a:latin typeface="Arial"/>
             </a:endParaRPr>
           </a:p>
           <a:p>
@@ -1770,29 +3661,29 @@
             </a:r>
             <a:endParaRPr lang="en-US" sz="2000" b="0" u="none" strike="noStrike">
               <a:solidFill>
-                <a:schemeClr val="dk1"/>
-              </a:solidFill>
-              <a:effectLst/>
-              <a:uFillTx/>
-              <a:latin typeface="Calibri"/>
+                <a:srgbClr val="000000"/>
+              </a:solidFill>
+              <a:effectLst/>
+              <a:uFillTx/>
+              <a:latin typeface="Arial"/>
             </a:endParaRPr>
           </a:p>
         </p:txBody>
       </p:sp>
       <p:sp>
         <p:nvSpPr>
-          <p:cNvPr id="8" name="PlaceHolder 3"/>
+          <p:cNvPr id="25" name="PlaceHolder 3"/>
           <p:cNvSpPr>
             <a:spLocks noGrp="1"/>
           </p:cNvSpPr>
           <p:nvPr>
-            <p:ph type="dt" idx="4"/>
+            <p:ph type="dt" idx="13"/>
           </p:nvPr>
         </p:nvSpPr>
         <p:spPr>
           <a:xfrm>
             <a:off x="457200" y="6356520"/>
-            <a:ext cx="2133360" cy="364680"/>
+            <a:ext cx="2133000" cy="364320"/>
           </a:xfrm>
           <a:prstGeom prst="rect">
             <a:avLst/>
@@ -1812,6 +3703,9 @@
                 <a:spcPct val="100000"/>
               </a:lnSpc>
               <a:buNone/>
+              <a:tabLst>
+                <a:tab algn="l" pos="0"/>
+              </a:tabLst>
               <a:defRPr lang="en-US" sz="1200" b="0" u="none" strike="noStrike">
                 <a:solidFill>
                   <a:schemeClr val="dk1">
@@ -1830,6 +3724,9 @@
                 <a:spcPct val="100000"/>
               </a:lnSpc>
               <a:buNone/>
+              <a:tabLst>
+                <a:tab algn="l" pos="0"/>
+              </a:tabLst>
             </a:pPr>
             <a:r>
               <a:rPr lang="en-US" sz="1200" b="0" u="none" strike="noStrike">
@@ -1857,18 +3754,18 @@
       </p:sp>
       <p:sp>
         <p:nvSpPr>
-          <p:cNvPr id="9" name="PlaceHolder 4"/>
+          <p:cNvPr id="26" name="PlaceHolder 4"/>
           <p:cNvSpPr>
             <a:spLocks noGrp="1"/>
           </p:cNvSpPr>
           <p:nvPr>
-            <p:ph type="ftr" idx="5"/>
+            <p:ph type="ftr" idx="14"/>
           </p:nvPr>
         </p:nvSpPr>
         <p:spPr>
           <a:xfrm>
             <a:off x="3124080" y="6356520"/>
-            <a:ext cx="2895120" cy="364680"/>
+            <a:ext cx="2894760" cy="364320"/>
           </a:xfrm>
           <a:prstGeom prst="rect">
             <a:avLst/>
@@ -1884,7 +3781,13 @@
           </a:bodyPr>
           <a:lstStyle>
             <a:lvl1pPr indent="0" algn="ctr">
+              <a:lnSpc>
+                <a:spcPct val="100000"/>
+              </a:lnSpc>
               <a:buNone/>
+              <a:tabLst>
+                <a:tab algn="l" pos="0"/>
+              </a:tabLst>
               <a:defRPr lang="en-US" sz="1400" b="0" u="none" strike="noStrike">
                 <a:solidFill>
                   <a:srgbClr val="000000"/>
@@ -1897,7 +3800,13 @@
           </a:lstStyle>
           <a:p>
             <a:pPr indent="0" algn="ctr">
+              <a:lnSpc>
+                <a:spcPct val="100000"/>
+              </a:lnSpc>
               <a:buNone/>
+              <a:tabLst>
+                <a:tab algn="l" pos="0"/>
+              </a:tabLst>
             </a:pPr>
             <a:r>
               <a:rPr lang="en-US" sz="1400" b="0" u="none" strike="noStrike">
@@ -1923,18 +3832,18 @@
       </p:sp>
       <p:sp>
         <p:nvSpPr>
-          <p:cNvPr id="10" name="PlaceHolder 5"/>
+          <p:cNvPr id="27" name="PlaceHolder 5"/>
           <p:cNvSpPr>
             <a:spLocks noGrp="1"/>
           </p:cNvSpPr>
           <p:nvPr>
-            <p:ph type="sldNum" idx="6"/>
+            <p:ph type="sldNum" idx="15"/>
           </p:nvPr>
         </p:nvSpPr>
         <p:spPr>
           <a:xfrm>
             <a:off x="6553080" y="6356520"/>
-            <a:ext cx="2133360" cy="364680"/>
+            <a:ext cx="2133000" cy="364320"/>
           </a:xfrm>
           <a:prstGeom prst="rect">
             <a:avLst/>
@@ -1954,6 +3863,9 @@
                 <a:spcPct val="100000"/>
               </a:lnSpc>
               <a:buNone/>
+              <a:tabLst>
+                <a:tab algn="l" pos="0"/>
+              </a:tabLst>
               <a:defRPr lang="en-US" sz="1200" b="0" u="none" strike="noStrike">
                 <a:solidFill>
                   <a:schemeClr val="dk1">
@@ -1972,8 +3884,11 @@
                 <a:spcPct val="100000"/>
               </a:lnSpc>
               <a:buNone/>
-            </a:pPr>
-            <a:fld id="{1AE3BE8C-F3A4-4826-9A9B-E28574BDBEC1}" type="slidenum">
+              <a:tabLst>
+                <a:tab algn="l" pos="0"/>
+              </a:tabLst>
+            </a:pPr>
+            <a:fld id="{5C9BAFA1-FA51-4280-B563-61B381D5C5C4}" type="slidenum">
               <a:rPr lang="en-US" sz="1200" b="0" u="none" strike="noStrike">
                 <a:solidFill>
                   <a:schemeClr val="dk1">
@@ -2002,7 +3917,7 @@
 </p:sldLayout>
 </file>
 
-<file path=ppt/slideLayouts/slideLayout3.xml><?xml version="1.0" encoding="utf-8"?>
+<file path=ppt/slideLayouts/slideLayout6.xml><?xml version="1.0" encoding="utf-8"?>
 <p:sldLayout xmlns:a="http://schemas.openxmlformats.org/drawingml/2006/main" xmlns:p="http://schemas.openxmlformats.org/presentationml/2006/main" xmlns:r="http://schemas.openxmlformats.org/officeDocument/2006/relationships" xmlns:p14="http://schemas.microsoft.com/office/powerpoint/2010/main" xmlns:p15="http://schemas.microsoft.com/office/powerpoint/2012/main" xmlns:mc="http://schemas.openxmlformats.org/markup-compatibility/2006" type="vertTitleAndTx" preserve="1">
   <p:cSld name="Vertical Title and Text">
     <p:bg>
@@ -2028,7 +3943,7 @@
       </p:grpSpPr>
       <p:sp>
         <p:nvSpPr>
-          <p:cNvPr id="11" name="PlaceHolder 1"/>
+          <p:cNvPr id="28" name="PlaceHolder 1"/>
           <p:cNvSpPr>
             <a:spLocks noGrp="1"/>
           </p:cNvSpPr>
@@ -2039,7 +3954,7 @@
         <p:spPr>
           <a:xfrm>
             <a:off x="6629400" y="274680"/>
-            <a:ext cx="2057040" cy="5851080"/>
+            <a:ext cx="2056680" cy="5850720"/>
           </a:xfrm>
           <a:prstGeom prst="rect">
             <a:avLst/>
@@ -2059,6 +3974,9 @@
                 <a:spcPct val="100000"/>
               </a:lnSpc>
               <a:buNone/>
+              <a:tabLst>
+                <a:tab algn="l" pos="0"/>
+              </a:tabLst>
             </a:pPr>
             <a:r>
               <a:rPr lang="en-US" sz="4400" b="0" u="none" strike="noStrike">
@@ -2073,18 +3991,18 @@
             </a:r>
             <a:endParaRPr lang="en-US" sz="4400" b="0" u="none" strike="noStrike">
               <a:solidFill>
-                <a:schemeClr val="dk1"/>
-              </a:solidFill>
-              <a:effectLst/>
-              <a:uFillTx/>
-              <a:latin typeface="Calibri"/>
+                <a:srgbClr val="000000"/>
+              </a:solidFill>
+              <a:effectLst/>
+              <a:uFillTx/>
+              <a:latin typeface="Arial"/>
             </a:endParaRPr>
           </a:p>
         </p:txBody>
       </p:sp>
       <p:sp>
         <p:nvSpPr>
-          <p:cNvPr id="12" name="PlaceHolder 2"/>
+          <p:cNvPr id="29" name="PlaceHolder 2"/>
           <p:cNvSpPr>
             <a:spLocks noGrp="1"/>
           </p:cNvSpPr>
@@ -2095,7 +4013,7 @@
         <p:spPr>
           <a:xfrm>
             <a:off x="457200" y="274680"/>
-            <a:ext cx="6019560" cy="5851080"/>
+            <a:ext cx="6019200" cy="5850720"/>
           </a:xfrm>
           <a:prstGeom prst="rect">
             <a:avLst/>
@@ -2136,11 +4054,11 @@
             </a:r>
             <a:endParaRPr lang="en-US" sz="3200" b="0" u="none" strike="noStrike">
               <a:solidFill>
-                <a:schemeClr val="dk1"/>
-              </a:solidFill>
-              <a:effectLst/>
-              <a:uFillTx/>
-              <a:latin typeface="Calibri"/>
+                <a:srgbClr val="000000"/>
+              </a:solidFill>
+              <a:effectLst/>
+              <a:uFillTx/>
+              <a:latin typeface="Arial"/>
             </a:endParaRPr>
           </a:p>
           <a:p>
@@ -2170,11 +4088,11 @@
             </a:r>
             <a:endParaRPr lang="en-US" sz="2800" b="0" u="none" strike="noStrike">
               <a:solidFill>
-                <a:schemeClr val="dk1"/>
-              </a:solidFill>
-              <a:effectLst/>
-              <a:uFillTx/>
-              <a:latin typeface="Calibri"/>
+                <a:srgbClr val="000000"/>
+              </a:solidFill>
+              <a:effectLst/>
+              <a:uFillTx/>
+              <a:latin typeface="Arial"/>
             </a:endParaRPr>
           </a:p>
           <a:p>
@@ -2204,11 +4122,11 @@
             </a:r>
             <a:endParaRPr lang="en-US" sz="2400" b="0" u="none" strike="noStrike">
               <a:solidFill>
-                <a:schemeClr val="dk1"/>
-              </a:solidFill>
-              <a:effectLst/>
-              <a:uFillTx/>
-              <a:latin typeface="Calibri"/>
+                <a:srgbClr val="000000"/>
+              </a:solidFill>
+              <a:effectLst/>
+              <a:uFillTx/>
+              <a:latin typeface="Arial"/>
             </a:endParaRPr>
           </a:p>
           <a:p>
@@ -2238,11 +4156,11 @@
             </a:r>
             <a:endParaRPr lang="en-US" sz="2000" b="0" u="none" strike="noStrike">
               <a:solidFill>
-                <a:schemeClr val="dk1"/>
-              </a:solidFill>
-              <a:effectLst/>
-              <a:uFillTx/>
-              <a:latin typeface="Calibri"/>
+                <a:srgbClr val="000000"/>
+              </a:solidFill>
+              <a:effectLst/>
+              <a:uFillTx/>
+              <a:latin typeface="Arial"/>
             </a:endParaRPr>
           </a:p>
           <a:p>
@@ -2272,29 +4190,29 @@
             </a:r>
             <a:endParaRPr lang="en-US" sz="2000" b="0" u="none" strike="noStrike">
               <a:solidFill>
-                <a:schemeClr val="dk1"/>
-              </a:solidFill>
-              <a:effectLst/>
-              <a:uFillTx/>
-              <a:latin typeface="Calibri"/>
+                <a:srgbClr val="000000"/>
+              </a:solidFill>
+              <a:effectLst/>
+              <a:uFillTx/>
+              <a:latin typeface="Arial"/>
             </a:endParaRPr>
           </a:p>
         </p:txBody>
       </p:sp>
       <p:sp>
         <p:nvSpPr>
-          <p:cNvPr id="13" name="PlaceHolder 3"/>
+          <p:cNvPr id="30" name="PlaceHolder 3"/>
           <p:cNvSpPr>
             <a:spLocks noGrp="1"/>
           </p:cNvSpPr>
           <p:nvPr>
-            <p:ph type="dt" idx="7"/>
+            <p:ph type="dt" idx="16"/>
           </p:nvPr>
         </p:nvSpPr>
         <p:spPr>
           <a:xfrm>
             <a:off x="457200" y="6356520"/>
-            <a:ext cx="2133360" cy="364680"/>
+            <a:ext cx="2133000" cy="364320"/>
           </a:xfrm>
           <a:prstGeom prst="rect">
             <a:avLst/>
@@ -2314,6 +4232,9 @@
                 <a:spcPct val="100000"/>
               </a:lnSpc>
               <a:buNone/>
+              <a:tabLst>
+                <a:tab algn="l" pos="0"/>
+              </a:tabLst>
               <a:defRPr lang="en-US" sz="1200" b="0" u="none" strike="noStrike">
                 <a:solidFill>
                   <a:schemeClr val="dk1">
@@ -2332,6 +4253,9 @@
                 <a:spcPct val="100000"/>
               </a:lnSpc>
               <a:buNone/>
+              <a:tabLst>
+                <a:tab algn="l" pos="0"/>
+              </a:tabLst>
             </a:pPr>
             <a:r>
               <a:rPr lang="en-US" sz="1200" b="0" u="none" strike="noStrike">
@@ -2359,18 +4283,18 @@
       </p:sp>
       <p:sp>
         <p:nvSpPr>
-          <p:cNvPr id="14" name="PlaceHolder 4"/>
+          <p:cNvPr id="31" name="PlaceHolder 4"/>
           <p:cNvSpPr>
             <a:spLocks noGrp="1"/>
           </p:cNvSpPr>
           <p:nvPr>
-            <p:ph type="ftr" idx="8"/>
+            <p:ph type="ftr" idx="17"/>
           </p:nvPr>
         </p:nvSpPr>
         <p:spPr>
           <a:xfrm>
             <a:off x="3124080" y="6356520"/>
-            <a:ext cx="2895120" cy="364680"/>
+            <a:ext cx="2894760" cy="364320"/>
           </a:xfrm>
           <a:prstGeom prst="rect">
             <a:avLst/>
@@ -2386,7 +4310,13 @@
           </a:bodyPr>
           <a:lstStyle>
             <a:lvl1pPr indent="0" algn="ctr">
+              <a:lnSpc>
+                <a:spcPct val="100000"/>
+              </a:lnSpc>
               <a:buNone/>
+              <a:tabLst>
+                <a:tab algn="l" pos="0"/>
+              </a:tabLst>
               <a:defRPr lang="en-US" sz="1400" b="0" u="none" strike="noStrike">
                 <a:solidFill>
                   <a:srgbClr val="000000"/>
@@ -2399,7 +4329,13 @@
           </a:lstStyle>
           <a:p>
             <a:pPr indent="0" algn="ctr">
+              <a:lnSpc>
+                <a:spcPct val="100000"/>
+              </a:lnSpc>
               <a:buNone/>
+              <a:tabLst>
+                <a:tab algn="l" pos="0"/>
+              </a:tabLst>
             </a:pPr>
             <a:r>
               <a:rPr lang="en-US" sz="1400" b="0" u="none" strike="noStrike">
@@ -2425,18 +4361,18 @@
       </p:sp>
       <p:sp>
         <p:nvSpPr>
-          <p:cNvPr id="15" name="PlaceHolder 5"/>
+          <p:cNvPr id="32" name="PlaceHolder 5"/>
           <p:cNvSpPr>
             <a:spLocks noGrp="1"/>
           </p:cNvSpPr>
           <p:nvPr>
-            <p:ph type="sldNum" idx="9"/>
+            <p:ph type="sldNum" idx="18"/>
           </p:nvPr>
         </p:nvSpPr>
         <p:spPr>
           <a:xfrm>
             <a:off x="6553080" y="6356520"/>
-            <a:ext cx="2133360" cy="364680"/>
+            <a:ext cx="2133000" cy="364320"/>
           </a:xfrm>
           <a:prstGeom prst="rect">
             <a:avLst/>
@@ -2456,6 +4392,9 @@
                 <a:spcPct val="100000"/>
               </a:lnSpc>
               <a:buNone/>
+              <a:tabLst>
+                <a:tab algn="l" pos="0"/>
+              </a:tabLst>
               <a:defRPr lang="en-US" sz="1200" b="0" u="none" strike="noStrike">
                 <a:solidFill>
                   <a:schemeClr val="dk1">
@@ -2474,8 +4413,11 @@
                 <a:spcPct val="100000"/>
               </a:lnSpc>
               <a:buNone/>
-            </a:pPr>
-            <a:fld id="{885FA272-3F62-43E6-A4E9-17051895272C}" type="slidenum">
+              <a:tabLst>
+                <a:tab algn="l" pos="0"/>
+              </a:tabLst>
+            </a:pPr>
+            <a:fld id="{647E6C6C-EFAC-45EF-B689-E12A2F3D870A}" type="slidenum">
               <a:rPr lang="en-US" sz="1200" b="0" u="none" strike="noStrike">
                 <a:solidFill>
                   <a:schemeClr val="dk1">
@@ -2504,7 +4446,7 @@
 </p:sldLayout>
 </file>
 
-<file path=ppt/slideLayouts/slideLayout4.xml><?xml version="1.0" encoding="utf-8"?>
+<file path=ppt/slideLayouts/slideLayout7.xml><?xml version="1.0" encoding="utf-8"?>
 <p:sldLayout xmlns:a="http://schemas.openxmlformats.org/drawingml/2006/main" xmlns:p="http://schemas.openxmlformats.org/presentationml/2006/main" xmlns:r="http://schemas.openxmlformats.org/officeDocument/2006/relationships" xmlns:p14="http://schemas.microsoft.com/office/powerpoint/2010/main" xmlns:p15="http://schemas.microsoft.com/office/powerpoint/2012/main" xmlns:mc="http://schemas.openxmlformats.org/markup-compatibility/2006" type="obj" preserve="1">
   <p:cSld name="Title and Content">
     <p:bg>
@@ -2530,7 +4472,7 @@
       </p:grpSpPr>
       <p:sp>
         <p:nvSpPr>
-          <p:cNvPr id="16" name="PlaceHolder 1"/>
+          <p:cNvPr id="33" name="PlaceHolder 1"/>
           <p:cNvSpPr>
             <a:spLocks noGrp="1"/>
           </p:cNvSpPr>
@@ -2541,7 +4483,7 @@
         <p:spPr>
           <a:xfrm>
             <a:off x="457200" y="274680"/>
-            <a:ext cx="8229240" cy="1142640"/>
+            <a:ext cx="8228880" cy="1142280"/>
           </a:xfrm>
           <a:prstGeom prst="rect">
             <a:avLst/>
@@ -2561,6 +4503,9 @@
                 <a:spcPct val="100000"/>
               </a:lnSpc>
               <a:buNone/>
+              <a:tabLst>
+                <a:tab algn="l" pos="0"/>
+              </a:tabLst>
             </a:pPr>
             <a:r>
               <a:rPr lang="en-US" sz="4400" b="0" u="none" strike="noStrike">
@@ -2575,18 +4520,18 @@
             </a:r>
             <a:endParaRPr lang="en-US" sz="4400" b="0" u="none" strike="noStrike">
               <a:solidFill>
-                <a:schemeClr val="dk1"/>
-              </a:solidFill>
-              <a:effectLst/>
-              <a:uFillTx/>
-              <a:latin typeface="Calibri"/>
+                <a:srgbClr val="000000"/>
+              </a:solidFill>
+              <a:effectLst/>
+              <a:uFillTx/>
+              <a:latin typeface="Arial"/>
             </a:endParaRPr>
           </a:p>
         </p:txBody>
       </p:sp>
       <p:sp>
         <p:nvSpPr>
-          <p:cNvPr id="17" name="PlaceHolder 2"/>
+          <p:cNvPr id="34" name="PlaceHolder 2"/>
           <p:cNvSpPr>
             <a:spLocks noGrp="1"/>
           </p:cNvSpPr>
@@ -2597,7 +4542,7 @@
         <p:spPr>
           <a:xfrm>
             <a:off x="457200" y="1600200"/>
-            <a:ext cx="8229240" cy="4525560"/>
+            <a:ext cx="8228880" cy="4525200"/>
           </a:xfrm>
           <a:prstGeom prst="rect">
             <a:avLst/>
@@ -2638,11 +4583,11 @@
             </a:r>
             <a:endParaRPr lang="en-US" sz="3200" b="0" u="none" strike="noStrike">
               <a:solidFill>
-                <a:schemeClr val="dk1"/>
-              </a:solidFill>
-              <a:effectLst/>
-              <a:uFillTx/>
-              <a:latin typeface="Calibri"/>
+                <a:srgbClr val="000000"/>
+              </a:solidFill>
+              <a:effectLst/>
+              <a:uFillTx/>
+              <a:latin typeface="Arial"/>
             </a:endParaRPr>
           </a:p>
           <a:p>
@@ -2672,11 +4617,11 @@
             </a:r>
             <a:endParaRPr lang="en-US" sz="2800" b="0" u="none" strike="noStrike">
               <a:solidFill>
-                <a:schemeClr val="dk1"/>
-              </a:solidFill>
-              <a:effectLst/>
-              <a:uFillTx/>
-              <a:latin typeface="Calibri"/>
+                <a:srgbClr val="000000"/>
+              </a:solidFill>
+              <a:effectLst/>
+              <a:uFillTx/>
+              <a:latin typeface="Arial"/>
             </a:endParaRPr>
           </a:p>
           <a:p>
@@ -2706,11 +4651,11 @@
             </a:r>
             <a:endParaRPr lang="en-US" sz="2400" b="0" u="none" strike="noStrike">
               <a:solidFill>
-                <a:schemeClr val="dk1"/>
-              </a:solidFill>
-              <a:effectLst/>
-              <a:uFillTx/>
-              <a:latin typeface="Calibri"/>
+                <a:srgbClr val="000000"/>
+              </a:solidFill>
+              <a:effectLst/>
+              <a:uFillTx/>
+              <a:latin typeface="Arial"/>
             </a:endParaRPr>
           </a:p>
           <a:p>
@@ -2740,11 +4685,11 @@
             </a:r>
             <a:endParaRPr lang="en-US" sz="2000" b="0" u="none" strike="noStrike">
               <a:solidFill>
-                <a:schemeClr val="dk1"/>
-              </a:solidFill>
-              <a:effectLst/>
-              <a:uFillTx/>
-              <a:latin typeface="Calibri"/>
+                <a:srgbClr val="000000"/>
+              </a:solidFill>
+              <a:effectLst/>
+              <a:uFillTx/>
+              <a:latin typeface="Arial"/>
             </a:endParaRPr>
           </a:p>
           <a:p>
@@ -2774,29 +4719,29 @@
             </a:r>
             <a:endParaRPr lang="en-US" sz="2000" b="0" u="none" strike="noStrike">
               <a:solidFill>
-                <a:schemeClr val="dk1"/>
-              </a:solidFill>
-              <a:effectLst/>
-              <a:uFillTx/>
-              <a:latin typeface="Calibri"/>
+                <a:srgbClr val="000000"/>
+              </a:solidFill>
+              <a:effectLst/>
+              <a:uFillTx/>
+              <a:latin typeface="Arial"/>
             </a:endParaRPr>
           </a:p>
         </p:txBody>
       </p:sp>
       <p:sp>
         <p:nvSpPr>
-          <p:cNvPr id="18" name="PlaceHolder 3"/>
+          <p:cNvPr id="35" name="PlaceHolder 3"/>
           <p:cNvSpPr>
             <a:spLocks noGrp="1"/>
           </p:cNvSpPr>
           <p:nvPr>
-            <p:ph type="dt" idx="10"/>
+            <p:ph type="dt" idx="19"/>
           </p:nvPr>
         </p:nvSpPr>
         <p:spPr>
           <a:xfrm>
             <a:off x="457200" y="6356520"/>
-            <a:ext cx="2133360" cy="364680"/>
+            <a:ext cx="2133000" cy="364320"/>
           </a:xfrm>
           <a:prstGeom prst="rect">
             <a:avLst/>
@@ -2816,6 +4761,9 @@
                 <a:spcPct val="100000"/>
               </a:lnSpc>
               <a:buNone/>
+              <a:tabLst>
+                <a:tab algn="l" pos="0"/>
+              </a:tabLst>
               <a:defRPr lang="en-US" sz="1200" b="0" u="none" strike="noStrike">
                 <a:solidFill>
                   <a:schemeClr val="dk1">
@@ -2834,6 +4782,9 @@
                 <a:spcPct val="100000"/>
               </a:lnSpc>
               <a:buNone/>
+              <a:tabLst>
+                <a:tab algn="l" pos="0"/>
+              </a:tabLst>
             </a:pPr>
             <a:r>
               <a:rPr lang="en-US" sz="1200" b="0" u="none" strike="noStrike">
@@ -2861,18 +4812,18 @@
       </p:sp>
       <p:sp>
         <p:nvSpPr>
-          <p:cNvPr id="19" name="PlaceHolder 4"/>
+          <p:cNvPr id="36" name="PlaceHolder 4"/>
           <p:cNvSpPr>
             <a:spLocks noGrp="1"/>
           </p:cNvSpPr>
           <p:nvPr>
-            <p:ph type="ftr" idx="11"/>
+            <p:ph type="ftr" idx="20"/>
           </p:nvPr>
         </p:nvSpPr>
         <p:spPr>
           <a:xfrm>
             <a:off x="3124080" y="6356520"/>
-            <a:ext cx="2895120" cy="364680"/>
+            <a:ext cx="2894760" cy="364320"/>
           </a:xfrm>
           <a:prstGeom prst="rect">
             <a:avLst/>
@@ -2888,7 +4839,13 @@
           </a:bodyPr>
           <a:lstStyle>
             <a:lvl1pPr indent="0" algn="ctr">
+              <a:lnSpc>
+                <a:spcPct val="100000"/>
+              </a:lnSpc>
               <a:buNone/>
+              <a:tabLst>
+                <a:tab algn="l" pos="0"/>
+              </a:tabLst>
               <a:defRPr lang="en-US" sz="1400" b="0" u="none" strike="noStrike">
                 <a:solidFill>
                   <a:srgbClr val="000000"/>
@@ -2901,7 +4858,13 @@
           </a:lstStyle>
           <a:p>
             <a:pPr indent="0" algn="ctr">
+              <a:lnSpc>
+                <a:spcPct val="100000"/>
+              </a:lnSpc>
               <a:buNone/>
+              <a:tabLst>
+                <a:tab algn="l" pos="0"/>
+              </a:tabLst>
             </a:pPr>
             <a:r>
               <a:rPr lang="en-US" sz="1400" b="0" u="none" strike="noStrike">
@@ -2927,18 +4890,18 @@
       </p:sp>
       <p:sp>
         <p:nvSpPr>
-          <p:cNvPr id="20" name="PlaceHolder 5"/>
+          <p:cNvPr id="37" name="PlaceHolder 5"/>
           <p:cNvSpPr>
             <a:spLocks noGrp="1"/>
           </p:cNvSpPr>
           <p:nvPr>
-            <p:ph type="sldNum" idx="12"/>
+            <p:ph type="sldNum" idx="21"/>
           </p:nvPr>
         </p:nvSpPr>
         <p:spPr>
           <a:xfrm>
             <a:off x="6553080" y="6356520"/>
-            <a:ext cx="2133360" cy="364680"/>
+            <a:ext cx="2133000" cy="364320"/>
           </a:xfrm>
           <a:prstGeom prst="rect">
             <a:avLst/>
@@ -2958,6 +4921,9 @@
                 <a:spcPct val="100000"/>
               </a:lnSpc>
               <a:buNone/>
+              <a:tabLst>
+                <a:tab algn="l" pos="0"/>
+              </a:tabLst>
               <a:defRPr lang="en-US" sz="1200" b="0" u="none" strike="noStrike">
                 <a:solidFill>
                   <a:schemeClr val="dk1">
@@ -2976,8 +4942,11 @@
                 <a:spcPct val="100000"/>
               </a:lnSpc>
               <a:buNone/>
-            </a:pPr>
-            <a:fld id="{08070EC8-2A96-486D-BCF7-260C83A8D9C2}" type="slidenum">
+              <a:tabLst>
+                <a:tab algn="l" pos="0"/>
+              </a:tabLst>
+            </a:pPr>
+            <a:fld id="{921A14FB-9F5B-4CE6-A388-9F100874A4BF}" type="slidenum">
               <a:rPr lang="en-US" sz="1200" b="0" u="none" strike="noStrike">
                 <a:solidFill>
                   <a:schemeClr val="dk1">
@@ -3006,7 +4975,7 @@
 </p:sldLayout>
 </file>
 
-<file path=ppt/slideLayouts/slideLayout5.xml><?xml version="1.0" encoding="utf-8"?>
+<file path=ppt/slideLayouts/slideLayout8.xml><?xml version="1.0" encoding="utf-8"?>
 <p:sldLayout xmlns:a="http://schemas.openxmlformats.org/drawingml/2006/main" xmlns:p="http://schemas.openxmlformats.org/presentationml/2006/main" xmlns:r="http://schemas.openxmlformats.org/officeDocument/2006/relationships" xmlns:p14="http://schemas.microsoft.com/office/powerpoint/2010/main" xmlns:p15="http://schemas.microsoft.com/office/powerpoint/2012/main" xmlns:mc="http://schemas.openxmlformats.org/markup-compatibility/2006" type="blank" preserve="1">
   <p:cSld name="Section Header">
     <p:bg>
@@ -3032,7 +5001,7 @@
       </p:grpSpPr>
       <p:sp>
         <p:nvSpPr>
-          <p:cNvPr id="21" name="PlaceHolder 1"/>
+          <p:cNvPr id="38" name="PlaceHolder 1"/>
           <p:cNvSpPr>
             <a:spLocks noGrp="1"/>
           </p:cNvSpPr>
@@ -3043,7 +5012,7 @@
         <p:spPr>
           <a:xfrm>
             <a:off x="722160" y="4406760"/>
-            <a:ext cx="7772040" cy="1361880"/>
+            <a:ext cx="7771680" cy="1361520"/>
           </a:xfrm>
           <a:prstGeom prst="rect">
             <a:avLst/>
@@ -3063,6 +5032,9 @@
                 <a:spcPct val="100000"/>
               </a:lnSpc>
               <a:buNone/>
+              <a:tabLst>
+                <a:tab algn="l" pos="0"/>
+              </a:tabLst>
             </a:pPr>
             <a:r>
               <a:rPr lang="en-US" sz="4000" b="1" u="none" strike="noStrike" cap="all">
@@ -3077,18 +5049,18 @@
             </a:r>
             <a:endParaRPr lang="en-US" sz="4000" b="0" u="none" strike="noStrike">
               <a:solidFill>
-                <a:schemeClr val="dk1"/>
-              </a:solidFill>
-              <a:effectLst/>
-              <a:uFillTx/>
-              <a:latin typeface="Calibri"/>
+                <a:srgbClr val="000000"/>
+              </a:solidFill>
+              <a:effectLst/>
+              <a:uFillTx/>
+              <a:latin typeface="Arial"/>
             </a:endParaRPr>
           </a:p>
         </p:txBody>
       </p:sp>
       <p:sp>
         <p:nvSpPr>
-          <p:cNvPr id="22" name="PlaceHolder 2"/>
+          <p:cNvPr id="39" name="PlaceHolder 2"/>
           <p:cNvSpPr>
             <a:spLocks noGrp="1"/>
           </p:cNvSpPr>
@@ -3099,7 +5071,7 @@
         <p:spPr>
           <a:xfrm>
             <a:off x="722160" y="2906640"/>
-            <a:ext cx="7772040" cy="1499760"/>
+            <a:ext cx="7771680" cy="1499400"/>
           </a:xfrm>
           <a:prstGeom prst="rect">
             <a:avLst/>
@@ -3141,29 +5113,29 @@
             </a:r>
             <a:endParaRPr lang="en-US" sz="2000" b="0" u="none" strike="noStrike">
               <a:solidFill>
-                <a:schemeClr val="dk1"/>
-              </a:solidFill>
-              <a:effectLst/>
-              <a:uFillTx/>
-              <a:latin typeface="Calibri"/>
+                <a:srgbClr val="000000"/>
+              </a:solidFill>
+              <a:effectLst/>
+              <a:uFillTx/>
+              <a:latin typeface="Arial"/>
             </a:endParaRPr>
           </a:p>
         </p:txBody>
       </p:sp>
       <p:sp>
         <p:nvSpPr>
-          <p:cNvPr id="23" name="PlaceHolder 3"/>
+          <p:cNvPr id="40" name="PlaceHolder 3"/>
           <p:cNvSpPr>
             <a:spLocks noGrp="1"/>
           </p:cNvSpPr>
           <p:nvPr>
-            <p:ph type="dt" idx="13"/>
+            <p:ph type="dt" idx="22"/>
           </p:nvPr>
         </p:nvSpPr>
         <p:spPr>
           <a:xfrm>
             <a:off x="457200" y="6356520"/>
-            <a:ext cx="2133360" cy="364680"/>
+            <a:ext cx="2133000" cy="364320"/>
           </a:xfrm>
           <a:prstGeom prst="rect">
             <a:avLst/>
@@ -3183,6 +5155,9 @@
                 <a:spcPct val="100000"/>
               </a:lnSpc>
               <a:buNone/>
+              <a:tabLst>
+                <a:tab algn="l" pos="0"/>
+              </a:tabLst>
               <a:defRPr lang="en-US" sz="1200" b="0" u="none" strike="noStrike">
                 <a:solidFill>
                   <a:schemeClr val="dk1">
@@ -3201,6 +5176,9 @@
                 <a:spcPct val="100000"/>
               </a:lnSpc>
               <a:buNone/>
+              <a:tabLst>
+                <a:tab algn="l" pos="0"/>
+              </a:tabLst>
             </a:pPr>
             <a:r>
               <a:rPr lang="en-US" sz="1200" b="0" u="none" strike="noStrike">
@@ -3228,18 +5206,18 @@
       </p:sp>
       <p:sp>
         <p:nvSpPr>
-          <p:cNvPr id="24" name="PlaceHolder 4"/>
+          <p:cNvPr id="41" name="PlaceHolder 4"/>
           <p:cNvSpPr>
             <a:spLocks noGrp="1"/>
           </p:cNvSpPr>
           <p:nvPr>
-            <p:ph type="ftr" idx="14"/>
+            <p:ph type="ftr" idx="23"/>
           </p:nvPr>
         </p:nvSpPr>
         <p:spPr>
           <a:xfrm>
             <a:off x="3124080" y="6356520"/>
-            <a:ext cx="2895120" cy="364680"/>
+            <a:ext cx="2894760" cy="364320"/>
           </a:xfrm>
           <a:prstGeom prst="rect">
             <a:avLst/>
@@ -3255,7 +5233,13 @@
           </a:bodyPr>
           <a:lstStyle>
             <a:lvl1pPr indent="0" algn="ctr">
+              <a:lnSpc>
+                <a:spcPct val="100000"/>
+              </a:lnSpc>
               <a:buNone/>
+              <a:tabLst>
+                <a:tab algn="l" pos="0"/>
+              </a:tabLst>
               <a:defRPr lang="en-US" sz="1400" b="0" u="none" strike="noStrike">
                 <a:solidFill>
                   <a:srgbClr val="000000"/>
@@ -3268,7 +5252,13 @@
           </a:lstStyle>
           <a:p>
             <a:pPr indent="0" algn="ctr">
+              <a:lnSpc>
+                <a:spcPct val="100000"/>
+              </a:lnSpc>
               <a:buNone/>
+              <a:tabLst>
+                <a:tab algn="l" pos="0"/>
+              </a:tabLst>
             </a:pPr>
             <a:r>
               <a:rPr lang="en-US" sz="1400" b="0" u="none" strike="noStrike">
@@ -3294,18 +5284,18 @@
       </p:sp>
       <p:sp>
         <p:nvSpPr>
-          <p:cNvPr id="25" name="PlaceHolder 5"/>
+          <p:cNvPr id="42" name="PlaceHolder 5"/>
           <p:cNvSpPr>
             <a:spLocks noGrp="1"/>
           </p:cNvSpPr>
           <p:nvPr>
-            <p:ph type="sldNum" idx="15"/>
+            <p:ph type="sldNum" idx="24"/>
           </p:nvPr>
         </p:nvSpPr>
         <p:spPr>
           <a:xfrm>
             <a:off x="6553080" y="6356520"/>
-            <a:ext cx="2133360" cy="364680"/>
+            <a:ext cx="2133000" cy="364320"/>
           </a:xfrm>
           <a:prstGeom prst="rect">
             <a:avLst/>
@@ -3325,6 +5315,9 @@
                 <a:spcPct val="100000"/>
               </a:lnSpc>
               <a:buNone/>
+              <a:tabLst>
+                <a:tab algn="l" pos="0"/>
+              </a:tabLst>
               <a:defRPr lang="en-US" sz="1200" b="0" u="none" strike="noStrike">
                 <a:solidFill>
                   <a:schemeClr val="dk1">
@@ -3343,8 +5336,11 @@
                 <a:spcPct val="100000"/>
               </a:lnSpc>
               <a:buNone/>
-            </a:pPr>
-            <a:fld id="{A831A36E-CEDA-443A-BE51-B5450F81E9FD}" type="slidenum">
+              <a:tabLst>
+                <a:tab algn="l" pos="0"/>
+              </a:tabLst>
+            </a:pPr>
+            <a:fld id="{58E383DA-DBDC-4CD6-8E5D-393EAC71128B}" type="slidenum">
               <a:rPr lang="en-US" sz="1200" b="0" u="none" strike="noStrike">
                 <a:solidFill>
                   <a:schemeClr val="dk1">
@@ -3373,7 +5369,7 @@
 </p:sldLayout>
 </file>
 
-<file path=ppt/slideLayouts/slideLayout6.xml><?xml version="1.0" encoding="utf-8"?>
+<file path=ppt/slideLayouts/slideLayout9.xml><?xml version="1.0" encoding="utf-8"?>
 <p:sldLayout xmlns:a="http://schemas.openxmlformats.org/drawingml/2006/main" xmlns:p="http://schemas.openxmlformats.org/presentationml/2006/main" xmlns:r="http://schemas.openxmlformats.org/officeDocument/2006/relationships" xmlns:p14="http://schemas.microsoft.com/office/powerpoint/2010/main" xmlns:p15="http://schemas.microsoft.com/office/powerpoint/2012/main" xmlns:mc="http://schemas.openxmlformats.org/markup-compatibility/2006" type="twoObj" preserve="1">
   <p:cSld name="Two Content">
     <p:bg>
@@ -3399,7 +5395,7 @@
       </p:grpSpPr>
       <p:sp>
         <p:nvSpPr>
-          <p:cNvPr id="26" name="PlaceHolder 1"/>
+          <p:cNvPr id="43" name="PlaceHolder 1"/>
           <p:cNvSpPr>
             <a:spLocks noGrp="1"/>
           </p:cNvSpPr>
@@ -3410,7 +5406,7 @@
         <p:spPr>
           <a:xfrm>
             <a:off x="457200" y="274680"/>
-            <a:ext cx="8229240" cy="1142640"/>
+            <a:ext cx="8228880" cy="1142280"/>
           </a:xfrm>
           <a:prstGeom prst="rect">
             <a:avLst/>
@@ -3430,6 +5426,9 @@
                 <a:spcPct val="100000"/>
               </a:lnSpc>
               <a:buNone/>
+              <a:tabLst>
+                <a:tab algn="l" pos="0"/>
+              </a:tabLst>
             </a:pPr>
             <a:r>
               <a:rPr lang="en-US" sz="4400" b="0" u="none" strike="noStrike">
@@ -3444,18 +5443,18 @@
             </a:r>
             <a:endParaRPr lang="en-US" sz="4400" b="0" u="none" strike="noStrike">
               <a:solidFill>
-                <a:schemeClr val="dk1"/>
-              </a:solidFill>
-              <a:effectLst/>
-              <a:uFillTx/>
-              <a:latin typeface="Calibri"/>
+                <a:srgbClr val="000000"/>
+              </a:solidFill>
+              <a:effectLst/>
+              <a:uFillTx/>
+              <a:latin typeface="Arial"/>
             </a:endParaRPr>
           </a:p>
         </p:txBody>
       </p:sp>
       <p:sp>
         <p:nvSpPr>
-          <p:cNvPr id="27" name="PlaceHolder 2"/>
+          <p:cNvPr id="44" name="PlaceHolder 2"/>
           <p:cNvSpPr>
             <a:spLocks noGrp="1"/>
           </p:cNvSpPr>
@@ -3466,7 +5465,7 @@
         <p:spPr>
           <a:xfrm>
             <a:off x="457200" y="1600200"/>
-            <a:ext cx="4038120" cy="4525560"/>
+            <a:ext cx="4037760" cy="4525200"/>
           </a:xfrm>
           <a:prstGeom prst="rect">
             <a:avLst/>
@@ -3507,11 +5506,11 @@
             </a:r>
             <a:endParaRPr lang="en-US" sz="2800" b="0" u="none" strike="noStrike">
               <a:solidFill>
-                <a:schemeClr val="dk1"/>
-              </a:solidFill>
-              <a:effectLst/>
-              <a:uFillTx/>
-              <a:latin typeface="Calibri"/>
+                <a:srgbClr val="000000"/>
+              </a:solidFill>
+              <a:effectLst/>
+              <a:uFillTx/>
+              <a:latin typeface="Arial"/>
             </a:endParaRPr>
           </a:p>
           <a:p>
@@ -3541,11 +5540,11 @@
             </a:r>
             <a:endParaRPr lang="en-US" sz="2400" b="0" u="none" strike="noStrike">
               <a:solidFill>
-                <a:schemeClr val="dk1"/>
-              </a:solidFill>
-              <a:effectLst/>
-              <a:uFillTx/>
-              <a:latin typeface="Calibri"/>
+                <a:srgbClr val="000000"/>
+              </a:solidFill>
+              <a:effectLst/>
+              <a:uFillTx/>
+              <a:latin typeface="Arial"/>
             </a:endParaRPr>
           </a:p>
           <a:p>
@@ -3575,11 +5574,11 @@
             </a:r>
             <a:endParaRPr lang="en-US" sz="2000" b="0" u="none" strike="noStrike">
               <a:solidFill>
-                <a:schemeClr val="dk1"/>
-              </a:solidFill>
-              <a:effectLst/>
-              <a:uFillTx/>
-              <a:latin typeface="Calibri"/>
+                <a:srgbClr val="000000"/>
+              </a:solidFill>
+              <a:effectLst/>
+              <a:uFillTx/>
+              <a:latin typeface="Arial"/>
             </a:endParaRPr>
           </a:p>
           <a:p>
@@ -3609,11 +5608,11 @@
             </a:r>
             <a:endParaRPr lang="en-US" sz="1800" b="0" u="none" strike="noStrike">
               <a:solidFill>
-                <a:schemeClr val="dk1"/>
-              </a:solidFill>
-              <a:effectLst/>
-              <a:uFillTx/>
-              <a:latin typeface="Calibri"/>
+                <a:srgbClr val="000000"/>
+              </a:solidFill>
+              <a:effectLst/>
+              <a:uFillTx/>
+              <a:latin typeface="Arial"/>
             </a:endParaRPr>
           </a:p>
           <a:p>
@@ -3643,18 +5642,18 @@
             </a:r>
             <a:endParaRPr lang="en-US" sz="1800" b="0" u="none" strike="noStrike">
               <a:solidFill>
-                <a:schemeClr val="dk1"/>
-              </a:solidFill>
-              <a:effectLst/>
-              <a:uFillTx/>
-              <a:latin typeface="Calibri"/>
+                <a:srgbClr val="000000"/>
+              </a:solidFill>
+              <a:effectLst/>
+              <a:uFillTx/>
+              <a:latin typeface="Arial"/>
             </a:endParaRPr>
           </a:p>
         </p:txBody>
       </p:sp>
       <p:sp>
         <p:nvSpPr>
-          <p:cNvPr id="28" name="PlaceHolder 3"/>
+          <p:cNvPr id="45" name="PlaceHolder 3"/>
           <p:cNvSpPr>
             <a:spLocks noGrp="1"/>
           </p:cNvSpPr>
@@ -3665,7 +5664,7 @@
         <p:spPr>
           <a:xfrm>
             <a:off x="4648320" y="1600200"/>
-            <a:ext cx="4038120" cy="4525560"/>
+            <a:ext cx="4037760" cy="4525200"/>
           </a:xfrm>
           <a:prstGeom prst="rect">
             <a:avLst/>
@@ -3706,11 +5705,11 @@
             </a:r>
             <a:endParaRPr lang="en-US" sz="2800" b="0" u="none" strike="noStrike">
               <a:solidFill>
-                <a:schemeClr val="dk1"/>
-              </a:solidFill>
-              <a:effectLst/>
-              <a:uFillTx/>
-              <a:latin typeface="Calibri"/>
+                <a:srgbClr val="000000"/>
+              </a:solidFill>
+              <a:effectLst/>
+              <a:uFillTx/>
+              <a:latin typeface="Arial"/>
             </a:endParaRPr>
           </a:p>
           <a:p>
@@ -3740,11 +5739,11 @@
             </a:r>
             <a:endParaRPr lang="en-US" sz="2400" b="0" u="none" strike="noStrike">
               <a:solidFill>
-                <a:schemeClr val="dk1"/>
-              </a:solidFill>
-              <a:effectLst/>
-              <a:uFillTx/>
-              <a:latin typeface="Calibri"/>
+                <a:srgbClr val="000000"/>
+              </a:solidFill>
+              <a:effectLst/>
+              <a:uFillTx/>
+              <a:latin typeface="Arial"/>
             </a:endParaRPr>
           </a:p>
           <a:p>
@@ -3774,11 +5773,11 @@
             </a:r>
             <a:endParaRPr lang="en-US" sz="2000" b="0" u="none" strike="noStrike">
               <a:solidFill>
-                <a:schemeClr val="dk1"/>
-              </a:solidFill>
-              <a:effectLst/>
-              <a:uFillTx/>
-              <a:latin typeface="Calibri"/>
+                <a:srgbClr val="000000"/>
+              </a:solidFill>
+              <a:effectLst/>
+              <a:uFillTx/>
+              <a:latin typeface="Arial"/>
             </a:endParaRPr>
           </a:p>
           <a:p>
@@ -3808,11 +5807,11 @@
             </a:r>
             <a:endParaRPr lang="en-US" sz="1800" b="0" u="none" strike="noStrike">
               <a:solidFill>
-                <a:schemeClr val="dk1"/>
-              </a:solidFill>
-              <a:effectLst/>
-              <a:uFillTx/>
-              <a:latin typeface="Calibri"/>
+                <a:srgbClr val="000000"/>
+              </a:solidFill>
+              <a:effectLst/>
+              <a:uFillTx/>
+              <a:latin typeface="Arial"/>
             </a:endParaRPr>
           </a:p>
           <a:p>
@@ -3842,29 +5841,29 @@
             </a:r>
             <a:endParaRPr lang="en-US" sz="1800" b="0" u="none" strike="noStrike">
               <a:solidFill>
-                <a:schemeClr val="dk1"/>
-              </a:solidFill>
-              <a:effectLst/>
-              <a:uFillTx/>
-              <a:latin typeface="Calibri"/>
+                <a:srgbClr val="000000"/>
+              </a:solidFill>
+              <a:effectLst/>
+              <a:uFillTx/>
+              <a:latin typeface="Arial"/>
             </a:endParaRPr>
           </a:p>
         </p:txBody>
       </p:sp>
       <p:sp>
         <p:nvSpPr>
-          <p:cNvPr id="29" name="PlaceHolder 4"/>
+          <p:cNvPr id="46" name="PlaceHolder 4"/>
           <p:cNvSpPr>
             <a:spLocks noGrp="1"/>
           </p:cNvSpPr>
           <p:nvPr>
-            <p:ph type="dt" idx="16"/>
+            <p:ph type="dt" idx="25"/>
           </p:nvPr>
         </p:nvSpPr>
         <p:spPr>
           <a:xfrm>
             <a:off x="457200" y="6356520"/>
-            <a:ext cx="2133360" cy="364680"/>
+            <a:ext cx="2133000" cy="364320"/>
           </a:xfrm>
           <a:prstGeom prst="rect">
             <a:avLst/>
@@ -3884,6 +5883,9 @@
                 <a:spcPct val="100000"/>
               </a:lnSpc>
               <a:buNone/>
+              <a:tabLst>
+                <a:tab algn="l" pos="0"/>
+              </a:tabLst>
               <a:defRPr lang="en-US" sz="1200" b="0" u="none" strike="noStrike">
                 <a:solidFill>
                   <a:schemeClr val="dk1">
@@ -3902,6 +5904,9 @@
                 <a:spcPct val="100000"/>
               </a:lnSpc>
               <a:buNone/>
+              <a:tabLst>
+                <a:tab algn="l" pos="0"/>
+              </a:tabLst>
             </a:pPr>
             <a:r>
               <a:rPr lang="en-US" sz="1200" b="0" u="none" strike="noStrike">
@@ -3929,18 +5934,18 @@
       </p:sp>
       <p:sp>
         <p:nvSpPr>
-          <p:cNvPr id="30" name="PlaceHolder 5"/>
+          <p:cNvPr id="47" name="PlaceHolder 5"/>
           <p:cNvSpPr>
             <a:spLocks noGrp="1"/>
           </p:cNvSpPr>
           <p:nvPr>
-            <p:ph type="ftr" idx="17"/>
+            <p:ph type="ftr" idx="26"/>
           </p:nvPr>
         </p:nvSpPr>
         <p:spPr>
           <a:xfrm>
             <a:off x="3124080" y="6356520"/>
-            <a:ext cx="2895120" cy="364680"/>
+            <a:ext cx="2894760" cy="364320"/>
           </a:xfrm>
           <a:prstGeom prst="rect">
             <a:avLst/>
@@ -3956,7 +5961,13 @@
           </a:bodyPr>
           <a:lstStyle>
             <a:lvl1pPr indent="0" algn="ctr">
+              <a:lnSpc>
+                <a:spcPct val="100000"/>
+              </a:lnSpc>
               <a:buNone/>
+              <a:tabLst>
+                <a:tab algn="l" pos="0"/>
+              </a:tabLst>
               <a:defRPr lang="en-US" sz="1400" b="0" u="none" strike="noStrike">
                 <a:solidFill>
                   <a:srgbClr val="000000"/>
@@ -3969,7 +5980,13 @@
           </a:lstStyle>
           <a:p>
             <a:pPr indent="0" algn="ctr">
+              <a:lnSpc>
+                <a:spcPct val="100000"/>
+              </a:lnSpc>
               <a:buNone/>
+              <a:tabLst>
+                <a:tab algn="l" pos="0"/>
+              </a:tabLst>
             </a:pPr>
             <a:r>
               <a:rPr lang="en-US" sz="1400" b="0" u="none" strike="noStrike">
@@ -3995,18 +6012,18 @@
       </p:sp>
       <p:sp>
         <p:nvSpPr>
-          <p:cNvPr id="31" name="PlaceHolder 6"/>
+          <p:cNvPr id="48" name="PlaceHolder 6"/>
           <p:cNvSpPr>
             <a:spLocks noGrp="1"/>
           </p:cNvSpPr>
           <p:nvPr>
-            <p:ph type="sldNum" idx="18"/>
+            <p:ph type="sldNum" idx="27"/>
           </p:nvPr>
         </p:nvSpPr>
         <p:spPr>
           <a:xfrm>
             <a:off x="6553080" y="6356520"/>
-            <a:ext cx="2133360" cy="364680"/>
+            <a:ext cx="2133000" cy="364320"/>
           </a:xfrm>
           <a:prstGeom prst="rect">
             <a:avLst/>
@@ -4026,6 +6043,9 @@
                 <a:spcPct val="100000"/>
               </a:lnSpc>
               <a:buNone/>
+              <a:tabLst>
+                <a:tab algn="l" pos="0"/>
+              </a:tabLst>
               <a:defRPr lang="en-US" sz="1200" b="0" u="none" strike="noStrike">
                 <a:solidFill>
                   <a:schemeClr val="dk1">
@@ -4043,673 +6063,13 @@
               <a:lnSpc>
                 <a:spcPct val="100000"/>
               </a:lnSpc>
-              <a:buNone/>
-            </a:pPr>
-            <a:fld id="{798B49F0-2405-4480-B689-4FF0F5489C37}" type="slidenum">
-              <a:rPr lang="en-US" sz="1200" b="0" u="none" strike="noStrike">
-                <a:solidFill>
-                  <a:schemeClr val="dk1">
-                    <a:tint val="75000"/>
-                  </a:schemeClr>
-                </a:solidFill>
-                <a:effectLst/>
-                <a:uFillTx/>
-                <a:latin typeface="Calibri"/>
-              </a:rPr>
-              <a:t>&lt;number&gt;</a:t>
-            </a:fld>
-            <a:endParaRPr lang="en-US" sz="1200" b="0" u="none" strike="noStrike">
-              <a:solidFill>
-                <a:srgbClr val="000000"/>
-              </a:solidFill>
-              <a:effectLst/>
-              <a:uFillTx/>
-              <a:latin typeface="Times New Roman"/>
-            </a:endParaRPr>
-          </a:p>
-        </p:txBody>
-      </p:sp>
-    </p:spTree>
-  </p:cSld>
-</p:sldLayout>
-</file>
-
-<file path=ppt/slideLayouts/slideLayout7.xml><?xml version="1.0" encoding="utf-8"?>
-<p:sldLayout xmlns:a="http://schemas.openxmlformats.org/drawingml/2006/main" xmlns:p="http://schemas.openxmlformats.org/presentationml/2006/main" xmlns:r="http://schemas.openxmlformats.org/officeDocument/2006/relationships" xmlns:p14="http://schemas.microsoft.com/office/powerpoint/2010/main" xmlns:p15="http://schemas.microsoft.com/office/powerpoint/2012/main" xmlns:mc="http://schemas.openxmlformats.org/markup-compatibility/2006" type="blank" preserve="1">
-  <p:cSld name="Comparison">
-    <p:bg>
-      <p:bgPr>
-        <a:solidFill>
-          <a:srgbClr val="ffffff"/>
-        </a:solidFill>
-      </p:bgPr>
-    </p:bg>
-    <p:spTree>
-      <p:nvGrpSpPr>
-        <p:cNvPr id="1" name=""/>
-        <p:cNvGrpSpPr/>
-        <p:nvPr/>
-      </p:nvGrpSpPr>
-      <p:grpSpPr>
-        <a:xfrm>
-          <a:off x="0" y="0"/>
-          <a:ext cx="0" cy="0"/>
-          <a:chOff x="0" y="0"/>
-          <a:chExt cx="0" cy="0"/>
-        </a:xfrm>
-      </p:grpSpPr>
-      <p:sp>
-        <p:nvSpPr>
-          <p:cNvPr id="32" name="PlaceHolder 1"/>
-          <p:cNvSpPr>
-            <a:spLocks noGrp="1"/>
-          </p:cNvSpPr>
-          <p:nvPr>
-            <p:ph type="title"/>
-          </p:nvPr>
-        </p:nvSpPr>
-        <p:spPr>
-          <a:xfrm>
-            <a:off x="457200" y="274680"/>
-            <a:ext cx="8229240" cy="1142640"/>
-          </a:xfrm>
-          <a:prstGeom prst="rect">
-            <a:avLst/>
-          </a:prstGeom>
-          <a:noFill/>
-          <a:ln w="0">
-            <a:noFill/>
-          </a:ln>
-        </p:spPr>
-        <p:txBody>
-          <a:bodyPr lIns="91440" rIns="91440" tIns="45720" bIns="45720" anchor="ctr">
-            <a:noAutofit/>
-          </a:bodyPr>
-          <a:p>
-            <a:pPr indent="0" algn="ctr" defTabSz="457200">
-              <a:lnSpc>
-                <a:spcPct val="100000"/>
-              </a:lnSpc>
-              <a:buNone/>
-            </a:pPr>
-            <a:r>
-              <a:rPr lang="en-US" sz="4400" b="0" u="none" strike="noStrike">
-                <a:solidFill>
-                  <a:schemeClr val="dk1"/>
-                </a:solidFill>
-                <a:effectLst/>
-                <a:uFillTx/>
-                <a:latin typeface="Calibri"/>
-              </a:rPr>
-              <a:t>Click to edit Master title style</a:t>
-            </a:r>
-            <a:endParaRPr lang="en-US" sz="4400" b="0" u="none" strike="noStrike">
-              <a:solidFill>
-                <a:schemeClr val="dk1"/>
-              </a:solidFill>
-              <a:effectLst/>
-              <a:uFillTx/>
-              <a:latin typeface="Calibri"/>
-            </a:endParaRPr>
-          </a:p>
-        </p:txBody>
-      </p:sp>
-      <p:sp>
-        <p:nvSpPr>
-          <p:cNvPr id="33" name="PlaceHolder 2"/>
-          <p:cNvSpPr>
-            <a:spLocks noGrp="1"/>
-          </p:cNvSpPr>
-          <p:nvPr>
-            <p:ph type="body"/>
-          </p:nvPr>
-        </p:nvSpPr>
-        <p:spPr>
-          <a:xfrm>
-            <a:off x="457200" y="1535040"/>
-            <a:ext cx="4039920" cy="639360"/>
-          </a:xfrm>
-          <a:prstGeom prst="rect">
-            <a:avLst/>
-          </a:prstGeom>
-          <a:noFill/>
-          <a:ln w="0">
-            <a:noFill/>
-          </a:ln>
-        </p:spPr>
-        <p:txBody>
-          <a:bodyPr lIns="91440" rIns="91440" tIns="45720" bIns="45720" anchor="b">
-            <a:noAutofit/>
-          </a:bodyPr>
-          <a:p>
-            <a:pPr indent="0" defTabSz="457200">
-              <a:lnSpc>
-                <a:spcPct val="100000"/>
-              </a:lnSpc>
-              <a:spcBef>
-                <a:spcPts val="479"/>
-              </a:spcBef>
               <a:buNone/>
               <a:tabLst>
                 <a:tab algn="l" pos="0"/>
               </a:tabLst>
             </a:pPr>
-            <a:r>
-              <a:rPr lang="en-US" sz="2400" b="1" u="none" strike="noStrike">
-                <a:solidFill>
-                  <a:schemeClr val="dk1"/>
-                </a:solidFill>
-                <a:effectLst/>
-                <a:uFillTx/>
-                <a:latin typeface="Calibri"/>
-              </a:rPr>
-              <a:t>Click to edit Master text styles</a:t>
-            </a:r>
-            <a:endParaRPr lang="en-US" sz="2400" b="0" u="none" strike="noStrike">
-              <a:solidFill>
-                <a:schemeClr val="dk1"/>
-              </a:solidFill>
-              <a:effectLst/>
-              <a:uFillTx/>
-              <a:latin typeface="Calibri"/>
-            </a:endParaRPr>
-          </a:p>
-        </p:txBody>
-      </p:sp>
-      <p:sp>
-        <p:nvSpPr>
-          <p:cNvPr id="34" name="PlaceHolder 3"/>
-          <p:cNvSpPr>
-            <a:spLocks noGrp="1"/>
-          </p:cNvSpPr>
-          <p:nvPr>
-            <p:ph type="body"/>
-          </p:nvPr>
-        </p:nvSpPr>
-        <p:spPr>
-          <a:xfrm>
-            <a:off x="457200" y="2174760"/>
-            <a:ext cx="4039920" cy="3951000"/>
-          </a:xfrm>
-          <a:prstGeom prst="rect">
-            <a:avLst/>
-          </a:prstGeom>
-          <a:noFill/>
-          <a:ln w="0">
-            <a:noFill/>
-          </a:ln>
-        </p:spPr>
-        <p:txBody>
-          <a:bodyPr lIns="91440" rIns="91440" tIns="45720" bIns="45720" anchor="t">
-            <a:noAutofit/>
-          </a:bodyPr>
-          <a:p>
-            <a:pPr marL="343080" indent="-343080" defTabSz="457200">
-              <a:lnSpc>
-                <a:spcPct val="100000"/>
-              </a:lnSpc>
-              <a:spcBef>
-                <a:spcPts val="479"/>
-              </a:spcBef>
-              <a:buClr>
-                <a:srgbClr val="000000"/>
-              </a:buClr>
-              <a:buFont typeface="Arial"/>
-              <a:buChar char="•"/>
-            </a:pPr>
-            <a:r>
-              <a:rPr lang="en-US" sz="2400" b="0" u="none" strike="noStrike">
-                <a:solidFill>
-                  <a:schemeClr val="dk1"/>
-                </a:solidFill>
-                <a:effectLst/>
-                <a:uFillTx/>
-                <a:latin typeface="Calibri"/>
-              </a:rPr>
-              <a:t>Click to edit Master text styles</a:t>
-            </a:r>
-            <a:endParaRPr lang="en-US" sz="2400" b="0" u="none" strike="noStrike">
-              <a:solidFill>
-                <a:schemeClr val="dk1"/>
-              </a:solidFill>
-              <a:effectLst/>
-              <a:uFillTx/>
-              <a:latin typeface="Calibri"/>
-            </a:endParaRPr>
-          </a:p>
-          <a:p>
-            <a:pPr marL="743040" lvl="1" indent="-285840" defTabSz="457200">
-              <a:lnSpc>
-                <a:spcPct val="100000"/>
-              </a:lnSpc>
-              <a:spcBef>
-                <a:spcPts val="400"/>
-              </a:spcBef>
-              <a:buClr>
-                <a:srgbClr val="000000"/>
-              </a:buClr>
-              <a:buFont typeface="Arial"/>
-              <a:buChar char="–"/>
-            </a:pPr>
-            <a:r>
-              <a:rPr lang="en-US" sz="2000" b="0" u="none" strike="noStrike">
-                <a:solidFill>
-                  <a:schemeClr val="dk1"/>
-                </a:solidFill>
-                <a:effectLst/>
-                <a:uFillTx/>
-                <a:latin typeface="Calibri"/>
-              </a:rPr>
-              <a:t>Second level</a:t>
-            </a:r>
-            <a:endParaRPr lang="en-US" sz="2000" b="0" u="none" strike="noStrike">
-              <a:solidFill>
-                <a:schemeClr val="dk1"/>
-              </a:solidFill>
-              <a:effectLst/>
-              <a:uFillTx/>
-              <a:latin typeface="Calibri"/>
-            </a:endParaRPr>
-          </a:p>
-          <a:p>
-            <a:pPr marL="1143000" lvl="2" indent="-228600" defTabSz="457200">
-              <a:lnSpc>
-                <a:spcPct val="100000"/>
-              </a:lnSpc>
-              <a:spcBef>
-                <a:spcPts val="360"/>
-              </a:spcBef>
-              <a:buClr>
-                <a:srgbClr val="000000"/>
-              </a:buClr>
-              <a:buFont typeface="Arial"/>
-              <a:buChar char="•"/>
-            </a:pPr>
-            <a:r>
-              <a:rPr lang="en-US" sz="1800" b="0" u="none" strike="noStrike">
-                <a:solidFill>
-                  <a:schemeClr val="dk1"/>
-                </a:solidFill>
-                <a:effectLst/>
-                <a:uFillTx/>
-                <a:latin typeface="Calibri"/>
-              </a:rPr>
-              <a:t>Third level</a:t>
-            </a:r>
-            <a:endParaRPr lang="en-US" sz="1800" b="0" u="none" strike="noStrike">
-              <a:solidFill>
-                <a:schemeClr val="dk1"/>
-              </a:solidFill>
-              <a:effectLst/>
-              <a:uFillTx/>
-              <a:latin typeface="Calibri"/>
-            </a:endParaRPr>
-          </a:p>
-          <a:p>
-            <a:pPr marL="1600200" lvl="3" indent="-228600" defTabSz="457200">
-              <a:lnSpc>
-                <a:spcPct val="100000"/>
-              </a:lnSpc>
-              <a:spcBef>
-                <a:spcPts val="320"/>
-              </a:spcBef>
-              <a:buClr>
-                <a:srgbClr val="000000"/>
-              </a:buClr>
-              <a:buFont typeface="Arial"/>
-              <a:buChar char="–"/>
-            </a:pPr>
-            <a:r>
-              <a:rPr lang="en-US" sz="1600" b="0" u="none" strike="noStrike">
-                <a:solidFill>
-                  <a:schemeClr val="dk1"/>
-                </a:solidFill>
-                <a:effectLst/>
-                <a:uFillTx/>
-                <a:latin typeface="Calibri"/>
-              </a:rPr>
-              <a:t>Fourth level</a:t>
-            </a:r>
-            <a:endParaRPr lang="en-US" sz="1600" b="0" u="none" strike="noStrike">
-              <a:solidFill>
-                <a:schemeClr val="dk1"/>
-              </a:solidFill>
-              <a:effectLst/>
-              <a:uFillTx/>
-              <a:latin typeface="Calibri"/>
-            </a:endParaRPr>
-          </a:p>
-          <a:p>
-            <a:pPr marL="2057400" lvl="4" indent="-228600" defTabSz="457200">
-              <a:lnSpc>
-                <a:spcPct val="100000"/>
-              </a:lnSpc>
-              <a:spcBef>
-                <a:spcPts val="320"/>
-              </a:spcBef>
-              <a:buClr>
-                <a:srgbClr val="000000"/>
-              </a:buClr>
-              <a:buFont typeface="Arial"/>
-              <a:buChar char="»"/>
-            </a:pPr>
-            <a:r>
-              <a:rPr lang="en-US" sz="1600" b="0" u="none" strike="noStrike">
-                <a:solidFill>
-                  <a:schemeClr val="dk1"/>
-                </a:solidFill>
-                <a:effectLst/>
-                <a:uFillTx/>
-                <a:latin typeface="Calibri"/>
-              </a:rPr>
-              <a:t>Fifth level</a:t>
-            </a:r>
-            <a:endParaRPr lang="en-US" sz="1600" b="0" u="none" strike="noStrike">
-              <a:solidFill>
-                <a:schemeClr val="dk1"/>
-              </a:solidFill>
-              <a:effectLst/>
-              <a:uFillTx/>
-              <a:latin typeface="Calibri"/>
-            </a:endParaRPr>
-          </a:p>
-        </p:txBody>
-      </p:sp>
-      <p:sp>
-        <p:nvSpPr>
-          <p:cNvPr id="35" name="PlaceHolder 4"/>
-          <p:cNvSpPr>
-            <a:spLocks noGrp="1"/>
-          </p:cNvSpPr>
-          <p:nvPr>
-            <p:ph type="body"/>
-          </p:nvPr>
-        </p:nvSpPr>
-        <p:spPr>
-          <a:xfrm>
-            <a:off x="4645080" y="1535040"/>
-            <a:ext cx="4041360" cy="639360"/>
-          </a:xfrm>
-          <a:prstGeom prst="rect">
-            <a:avLst/>
-          </a:prstGeom>
-          <a:noFill/>
-          <a:ln w="0">
-            <a:noFill/>
-          </a:ln>
-        </p:spPr>
-        <p:txBody>
-          <a:bodyPr lIns="91440" rIns="91440" tIns="45720" bIns="45720" anchor="b">
-            <a:noAutofit/>
-          </a:bodyPr>
-          <a:p>
-            <a:pPr indent="0" defTabSz="457200">
-              <a:lnSpc>
-                <a:spcPct val="100000"/>
-              </a:lnSpc>
-              <a:spcBef>
-                <a:spcPts val="479"/>
-              </a:spcBef>
-              <a:buNone/>
-              <a:tabLst>
-                <a:tab algn="l" pos="0"/>
-              </a:tabLst>
-            </a:pPr>
-            <a:r>
-              <a:rPr lang="en-US" sz="2400" b="1" u="none" strike="noStrike">
-                <a:solidFill>
-                  <a:schemeClr val="dk1"/>
-                </a:solidFill>
-                <a:effectLst/>
-                <a:uFillTx/>
-                <a:latin typeface="Calibri"/>
-              </a:rPr>
-              <a:t>Click to edit Master text styles</a:t>
-            </a:r>
-            <a:endParaRPr lang="en-US" sz="2400" b="0" u="none" strike="noStrike">
-              <a:solidFill>
-                <a:schemeClr val="dk1"/>
-              </a:solidFill>
-              <a:effectLst/>
-              <a:uFillTx/>
-              <a:latin typeface="Calibri"/>
-            </a:endParaRPr>
-          </a:p>
-        </p:txBody>
-      </p:sp>
-      <p:sp>
-        <p:nvSpPr>
-          <p:cNvPr id="36" name="PlaceHolder 5"/>
-          <p:cNvSpPr>
-            <a:spLocks noGrp="1"/>
-          </p:cNvSpPr>
-          <p:nvPr>
-            <p:ph type="body"/>
-          </p:nvPr>
-        </p:nvSpPr>
-        <p:spPr>
-          <a:xfrm>
-            <a:off x="4645080" y="2174760"/>
-            <a:ext cx="4041360" cy="3951000"/>
-          </a:xfrm>
-          <a:prstGeom prst="rect">
-            <a:avLst/>
-          </a:prstGeom>
-          <a:noFill/>
-          <a:ln w="0">
-            <a:noFill/>
-          </a:ln>
-        </p:spPr>
-        <p:txBody>
-          <a:bodyPr lIns="91440" rIns="91440" tIns="45720" bIns="45720" anchor="t">
-            <a:noAutofit/>
-          </a:bodyPr>
-          <a:p>
-            <a:pPr marL="343080" indent="-343080" defTabSz="457200">
-              <a:lnSpc>
-                <a:spcPct val="100000"/>
-              </a:lnSpc>
-              <a:spcBef>
-                <a:spcPts val="479"/>
-              </a:spcBef>
-              <a:buClr>
-                <a:srgbClr val="000000"/>
-              </a:buClr>
-              <a:buFont typeface="Arial"/>
-              <a:buChar char="•"/>
-            </a:pPr>
-            <a:r>
-              <a:rPr lang="en-US" sz="2400" b="0" u="none" strike="noStrike">
-                <a:solidFill>
-                  <a:schemeClr val="dk1"/>
-                </a:solidFill>
-                <a:effectLst/>
-                <a:uFillTx/>
-                <a:latin typeface="Calibri"/>
-              </a:rPr>
-              <a:t>Click to edit Master text styles</a:t>
-            </a:r>
-            <a:endParaRPr lang="en-US" sz="2400" b="0" u="none" strike="noStrike">
-              <a:solidFill>
-                <a:schemeClr val="dk1"/>
-              </a:solidFill>
-              <a:effectLst/>
-              <a:uFillTx/>
-              <a:latin typeface="Calibri"/>
-            </a:endParaRPr>
-          </a:p>
-          <a:p>
-            <a:pPr marL="743040" lvl="1" indent="-285840" defTabSz="457200">
-              <a:lnSpc>
-                <a:spcPct val="100000"/>
-              </a:lnSpc>
-              <a:spcBef>
-                <a:spcPts val="400"/>
-              </a:spcBef>
-              <a:buClr>
-                <a:srgbClr val="000000"/>
-              </a:buClr>
-              <a:buFont typeface="Arial"/>
-              <a:buChar char="–"/>
-            </a:pPr>
-            <a:r>
-              <a:rPr lang="en-US" sz="2000" b="0" u="none" strike="noStrike">
-                <a:solidFill>
-                  <a:schemeClr val="dk1"/>
-                </a:solidFill>
-                <a:effectLst/>
-                <a:uFillTx/>
-                <a:latin typeface="Calibri"/>
-              </a:rPr>
-              <a:t>Second level</a:t>
-            </a:r>
-            <a:endParaRPr lang="en-US" sz="2000" b="0" u="none" strike="noStrike">
-              <a:solidFill>
-                <a:schemeClr val="dk1"/>
-              </a:solidFill>
-              <a:effectLst/>
-              <a:uFillTx/>
-              <a:latin typeface="Calibri"/>
-            </a:endParaRPr>
-          </a:p>
-          <a:p>
-            <a:pPr marL="1143000" lvl="2" indent="-228600" defTabSz="457200">
-              <a:lnSpc>
-                <a:spcPct val="100000"/>
-              </a:lnSpc>
-              <a:spcBef>
-                <a:spcPts val="360"/>
-              </a:spcBef>
-              <a:buClr>
-                <a:srgbClr val="000000"/>
-              </a:buClr>
-              <a:buFont typeface="Arial"/>
-              <a:buChar char="•"/>
-            </a:pPr>
-            <a:r>
-              <a:rPr lang="en-US" sz="1800" b="0" u="none" strike="noStrike">
-                <a:solidFill>
-                  <a:schemeClr val="dk1"/>
-                </a:solidFill>
-                <a:effectLst/>
-                <a:uFillTx/>
-                <a:latin typeface="Calibri"/>
-              </a:rPr>
-              <a:t>Third level</a:t>
-            </a:r>
-            <a:endParaRPr lang="en-US" sz="1800" b="0" u="none" strike="noStrike">
-              <a:solidFill>
-                <a:schemeClr val="dk1"/>
-              </a:solidFill>
-              <a:effectLst/>
-              <a:uFillTx/>
-              <a:latin typeface="Calibri"/>
-            </a:endParaRPr>
-          </a:p>
-          <a:p>
-            <a:pPr marL="1600200" lvl="3" indent="-228600" defTabSz="457200">
-              <a:lnSpc>
-                <a:spcPct val="100000"/>
-              </a:lnSpc>
-              <a:spcBef>
-                <a:spcPts val="320"/>
-              </a:spcBef>
-              <a:buClr>
-                <a:srgbClr val="000000"/>
-              </a:buClr>
-              <a:buFont typeface="Arial"/>
-              <a:buChar char="–"/>
-            </a:pPr>
-            <a:r>
-              <a:rPr lang="en-US" sz="1600" b="0" u="none" strike="noStrike">
-                <a:solidFill>
-                  <a:schemeClr val="dk1"/>
-                </a:solidFill>
-                <a:effectLst/>
-                <a:uFillTx/>
-                <a:latin typeface="Calibri"/>
-              </a:rPr>
-              <a:t>Fourth level</a:t>
-            </a:r>
-            <a:endParaRPr lang="en-US" sz="1600" b="0" u="none" strike="noStrike">
-              <a:solidFill>
-                <a:schemeClr val="dk1"/>
-              </a:solidFill>
-              <a:effectLst/>
-              <a:uFillTx/>
-              <a:latin typeface="Calibri"/>
-            </a:endParaRPr>
-          </a:p>
-          <a:p>
-            <a:pPr marL="2057400" lvl="4" indent="-228600" defTabSz="457200">
-              <a:lnSpc>
-                <a:spcPct val="100000"/>
-              </a:lnSpc>
-              <a:spcBef>
-                <a:spcPts val="320"/>
-              </a:spcBef>
-              <a:buClr>
-                <a:srgbClr val="000000"/>
-              </a:buClr>
-              <a:buFont typeface="Arial"/>
-              <a:buChar char="»"/>
-            </a:pPr>
-            <a:r>
-              <a:rPr lang="en-US" sz="1600" b="0" u="none" strike="noStrike">
-                <a:solidFill>
-                  <a:schemeClr val="dk1"/>
-                </a:solidFill>
-                <a:effectLst/>
-                <a:uFillTx/>
-                <a:latin typeface="Calibri"/>
-              </a:rPr>
-              <a:t>Fifth level</a:t>
-            </a:r>
-            <a:endParaRPr lang="en-US" sz="1600" b="0" u="none" strike="noStrike">
-              <a:solidFill>
-                <a:schemeClr val="dk1"/>
-              </a:solidFill>
-              <a:effectLst/>
-              <a:uFillTx/>
-              <a:latin typeface="Calibri"/>
-            </a:endParaRPr>
-          </a:p>
-        </p:txBody>
-      </p:sp>
-      <p:sp>
-        <p:nvSpPr>
-          <p:cNvPr id="37" name="PlaceHolder 6"/>
-          <p:cNvSpPr>
-            <a:spLocks noGrp="1"/>
-          </p:cNvSpPr>
-          <p:nvPr>
-            <p:ph type="dt" idx="19"/>
-          </p:nvPr>
-        </p:nvSpPr>
-        <p:spPr>
-          <a:xfrm>
-            <a:off x="457200" y="6356520"/>
-            <a:ext cx="2133360" cy="364680"/>
-          </a:xfrm>
-          <a:prstGeom prst="rect">
-            <a:avLst/>
-          </a:prstGeom>
-          <a:noFill/>
-          <a:ln w="0">
-            <a:noFill/>
-          </a:ln>
-        </p:spPr>
-        <p:txBody>
-          <a:bodyPr lIns="91440" rIns="91440" tIns="45720" bIns="45720" anchor="ctr">
-            <a:noAutofit/>
-          </a:bodyPr>
-          <a:lstStyle>
-            <a:lvl1pPr indent="0" defTabSz="457200">
-              <a:lnSpc>
-                <a:spcPct val="100000"/>
-              </a:lnSpc>
-              <a:buNone/>
-              <a:defRPr lang="en-US" sz="1200" b="0" u="none" strike="noStrike">
+            <a:fld id="{F54A9508-6C39-4218-9CD1-C5332D383188}" type="slidenum">
+              <a:rPr lang="en-US" sz="1200" b="0" u="none" strike="noStrike">
                 <a:solidFill>
                   <a:schemeClr val="dk1">
                     <a:tint val="75000"/>
@@ -4718,168 +6078,6 @@
                 <a:effectLst/>
                 <a:uFillTx/>
                 <a:latin typeface="Calibri"/>
-              </a:defRPr>
-            </a:lvl1pPr>
-          </a:lstStyle>
-          <a:p>
-            <a:pPr indent="0" defTabSz="457200">
-              <a:lnSpc>
-                <a:spcPct val="100000"/>
-              </a:lnSpc>
-              <a:buNone/>
-            </a:pPr>
-            <a:r>
-              <a:rPr lang="en-US" sz="1200" b="0" u="none" strike="noStrike">
-                <a:solidFill>
-                  <a:schemeClr val="dk1">
-                    <a:tint val="75000"/>
-                  </a:schemeClr>
-                </a:solidFill>
-                <a:effectLst/>
-                <a:uFillTx/>
-                <a:latin typeface="Calibri"/>
-              </a:rPr>
-              <a:t>&lt;date/time&gt;</a:t>
-            </a:r>
-            <a:endParaRPr lang="en-US" sz="1200" b="0" u="none" strike="noStrike">
-              <a:solidFill>
-                <a:srgbClr val="000000"/>
-              </a:solidFill>
-              <a:effectLst/>
-              <a:uFillTx/>
-              <a:latin typeface="Times New Roman"/>
-            </a:endParaRPr>
-          </a:p>
-        </p:txBody>
-      </p:sp>
-      <p:sp>
-        <p:nvSpPr>
-          <p:cNvPr id="38" name="PlaceHolder 7"/>
-          <p:cNvSpPr>
-            <a:spLocks noGrp="1"/>
-          </p:cNvSpPr>
-          <p:nvPr>
-            <p:ph type="ftr" idx="20"/>
-          </p:nvPr>
-        </p:nvSpPr>
-        <p:spPr>
-          <a:xfrm>
-            <a:off x="3124080" y="6356520"/>
-            <a:ext cx="2895120" cy="364680"/>
-          </a:xfrm>
-          <a:prstGeom prst="rect">
-            <a:avLst/>
-          </a:prstGeom>
-          <a:noFill/>
-          <a:ln w="0">
-            <a:noFill/>
-          </a:ln>
-        </p:spPr>
-        <p:txBody>
-          <a:bodyPr lIns="91440" rIns="91440" tIns="45720" bIns="45720" anchor="ctr">
-            <a:noAutofit/>
-          </a:bodyPr>
-          <a:lstStyle>
-            <a:lvl1pPr indent="0" algn="ctr">
-              <a:buNone/>
-              <a:defRPr lang="en-US" sz="1400" b="0" u="none" strike="noStrike">
-                <a:solidFill>
-                  <a:srgbClr val="000000"/>
-                </a:solidFill>
-                <a:effectLst/>
-                <a:uFillTx/>
-                <a:latin typeface="Times New Roman"/>
-              </a:defRPr>
-            </a:lvl1pPr>
-          </a:lstStyle>
-          <a:p>
-            <a:pPr indent="0" algn="ctr">
-              <a:buNone/>
-            </a:pPr>
-            <a:r>
-              <a:rPr lang="en-US" sz="1400" b="0" u="none" strike="noStrike">
-                <a:solidFill>
-                  <a:srgbClr val="000000"/>
-                </a:solidFill>
-                <a:effectLst/>
-                <a:uFillTx/>
-                <a:latin typeface="Times New Roman"/>
-              </a:rPr>
-              <a:t>&lt;footer&gt;</a:t>
-            </a:r>
-            <a:endParaRPr lang="en-US" sz="1400" b="0" u="none" strike="noStrike">
-              <a:solidFill>
-                <a:srgbClr val="000000"/>
-              </a:solidFill>
-              <a:effectLst/>
-              <a:uFillTx/>
-              <a:latin typeface="Times New Roman"/>
-            </a:endParaRPr>
-          </a:p>
-        </p:txBody>
-      </p:sp>
-      <p:sp>
-        <p:nvSpPr>
-          <p:cNvPr id="39" name="PlaceHolder 8"/>
-          <p:cNvSpPr>
-            <a:spLocks noGrp="1"/>
-          </p:cNvSpPr>
-          <p:nvPr>
-            <p:ph type="sldNum" idx="21"/>
-          </p:nvPr>
-        </p:nvSpPr>
-        <p:spPr>
-          <a:xfrm>
-            <a:off x="6553080" y="6356520"/>
-            <a:ext cx="2133360" cy="364680"/>
-          </a:xfrm>
-          <a:prstGeom prst="rect">
-            <a:avLst/>
-          </a:prstGeom>
-          <a:noFill/>
-          <a:ln w="0">
-            <a:noFill/>
-          </a:ln>
-        </p:spPr>
-        <p:txBody>
-          <a:bodyPr lIns="91440" rIns="91440" tIns="45720" bIns="45720" anchor="ctr">
-            <a:noAutofit/>
-          </a:bodyPr>
-          <a:lstStyle>
-            <a:lvl1pPr indent="0" algn="r" defTabSz="457200">
-              <a:lnSpc>
-                <a:spcPct val="100000"/>
-              </a:lnSpc>
-              <a:buNone/>
-              <a:defRPr lang="en-US" sz="1200" b="0" u="none" strike="noStrike">
-                <a:solidFill>
-                  <a:schemeClr val="dk1">
-                    <a:tint val="75000"/>
-                  </a:schemeClr>
-                </a:solidFill>
-                <a:effectLst/>
-                <a:uFillTx/>
-                <a:latin typeface="Calibri"/>
-              </a:defRPr>
-            </a:lvl1pPr>
-          </a:lstStyle>
-          <a:p>
-            <a:pPr indent="0" algn="r" defTabSz="457200">
-              <a:lnSpc>
-                <a:spcPct val="100000"/>
-              </a:lnSpc>
-              <a:buNone/>
-            </a:pPr>
-            <a:fld id="{CDDBDC07-5636-4852-89CB-BF5487C576C7}" type="slidenum">
-              <a:rPr lang="en-US" sz="1200" b="0" u="none" strike="noStrike">
-                <a:solidFill>
-                  <a:schemeClr val="dk1">
-                    <a:tint val="75000"/>
-                  </a:schemeClr>
-                </a:solidFill>
-                <a:effectLst/>
-                <a:uFillTx/>
-                <a:latin typeface="Calibri"/>
               </a:rPr>
               <a:t>&lt;number&gt;</a:t>
             </a:fld>
@@ -4890,862 +6088,6 @@
               <a:effectLst/>
               <a:uFillTx/>
               <a:latin typeface="Times New Roman"/>
-            </a:endParaRPr>
-          </a:p>
-        </p:txBody>
-      </p:sp>
-    </p:spTree>
-  </p:cSld>
-</p:sldLayout>
-</file>
-
-<file path=ppt/slideLayouts/slideLayout8.xml><?xml version="1.0" encoding="utf-8"?>
-<p:sldLayout xmlns:a="http://schemas.openxmlformats.org/drawingml/2006/main" xmlns:p="http://schemas.openxmlformats.org/presentationml/2006/main" xmlns:r="http://schemas.openxmlformats.org/officeDocument/2006/relationships" xmlns:p14="http://schemas.microsoft.com/office/powerpoint/2010/main" xmlns:p15="http://schemas.microsoft.com/office/powerpoint/2012/main" xmlns:mc="http://schemas.openxmlformats.org/markup-compatibility/2006" type="titleOnly" preserve="1">
-  <p:cSld name="Title Only">
-    <p:bg>
-      <p:bgPr>
-        <a:solidFill>
-          <a:srgbClr val="ffffff"/>
-        </a:solidFill>
-      </p:bgPr>
-    </p:bg>
-    <p:spTree>
-      <p:nvGrpSpPr>
-        <p:cNvPr id="1" name=""/>
-        <p:cNvGrpSpPr/>
-        <p:nvPr/>
-      </p:nvGrpSpPr>
-      <p:grpSpPr>
-        <a:xfrm>
-          <a:off x="0" y="0"/>
-          <a:ext cx="0" cy="0"/>
-          <a:chOff x="0" y="0"/>
-          <a:chExt cx="0" cy="0"/>
-        </a:xfrm>
-      </p:grpSpPr>
-      <p:sp>
-        <p:nvSpPr>
-          <p:cNvPr id="40" name="PlaceHolder 1"/>
-          <p:cNvSpPr>
-            <a:spLocks noGrp="1"/>
-          </p:cNvSpPr>
-          <p:nvPr>
-            <p:ph type="title"/>
-          </p:nvPr>
-        </p:nvSpPr>
-        <p:spPr>
-          <a:xfrm>
-            <a:off x="457200" y="274680"/>
-            <a:ext cx="8229240" cy="1142640"/>
-          </a:xfrm>
-          <a:prstGeom prst="rect">
-            <a:avLst/>
-          </a:prstGeom>
-          <a:noFill/>
-          <a:ln w="0">
-            <a:noFill/>
-          </a:ln>
-        </p:spPr>
-        <p:txBody>
-          <a:bodyPr lIns="91440" rIns="91440" tIns="45720" bIns="45720" anchor="ctr">
-            <a:noAutofit/>
-          </a:bodyPr>
-          <a:p>
-            <a:pPr indent="0" algn="ctr" defTabSz="457200">
-              <a:lnSpc>
-                <a:spcPct val="100000"/>
-              </a:lnSpc>
-              <a:buNone/>
-            </a:pPr>
-            <a:r>
-              <a:rPr lang="en-US" sz="4400" b="0" u="none" strike="noStrike">
-                <a:solidFill>
-                  <a:schemeClr val="dk1"/>
-                </a:solidFill>
-                <a:effectLst/>
-                <a:uFillTx/>
-                <a:latin typeface="Calibri"/>
-              </a:rPr>
-              <a:t>Click to edit Master title style</a:t>
-            </a:r>
-            <a:endParaRPr lang="en-US" sz="4400" b="0" u="none" strike="noStrike">
-              <a:solidFill>
-                <a:schemeClr val="dk1"/>
-              </a:solidFill>
-              <a:effectLst/>
-              <a:uFillTx/>
-              <a:latin typeface="Calibri"/>
-            </a:endParaRPr>
-          </a:p>
-        </p:txBody>
-      </p:sp>
-      <p:sp>
-        <p:nvSpPr>
-          <p:cNvPr id="41" name="PlaceHolder 2"/>
-          <p:cNvSpPr>
-            <a:spLocks noGrp="1"/>
-          </p:cNvSpPr>
-          <p:nvPr>
-            <p:ph type="dt" idx="22"/>
-          </p:nvPr>
-        </p:nvSpPr>
-        <p:spPr>
-          <a:xfrm>
-            <a:off x="457200" y="6356520"/>
-            <a:ext cx="2133360" cy="364680"/>
-          </a:xfrm>
-          <a:prstGeom prst="rect">
-            <a:avLst/>
-          </a:prstGeom>
-          <a:noFill/>
-          <a:ln w="0">
-            <a:noFill/>
-          </a:ln>
-        </p:spPr>
-        <p:txBody>
-          <a:bodyPr lIns="91440" rIns="91440" tIns="45720" bIns="45720" anchor="ctr">
-            <a:noAutofit/>
-          </a:bodyPr>
-          <a:lstStyle>
-            <a:lvl1pPr indent="0" defTabSz="457200">
-              <a:lnSpc>
-                <a:spcPct val="100000"/>
-              </a:lnSpc>
-              <a:buNone/>
-              <a:defRPr lang="en-US" sz="1200" b="0" u="none" strike="noStrike">
-                <a:solidFill>
-                  <a:schemeClr val="dk1">
-                    <a:tint val="75000"/>
-                  </a:schemeClr>
-                </a:solidFill>
-                <a:effectLst/>
-                <a:uFillTx/>
-                <a:latin typeface="Calibri"/>
-              </a:defRPr>
-            </a:lvl1pPr>
-          </a:lstStyle>
-          <a:p>
-            <a:pPr indent="0" defTabSz="457200">
-              <a:lnSpc>
-                <a:spcPct val="100000"/>
-              </a:lnSpc>
-              <a:buNone/>
-            </a:pPr>
-            <a:r>
-              <a:rPr lang="en-US" sz="1200" b="0" u="none" strike="noStrike">
-                <a:solidFill>
-                  <a:schemeClr val="dk1">
-                    <a:tint val="75000"/>
-                  </a:schemeClr>
-                </a:solidFill>
-                <a:effectLst/>
-                <a:uFillTx/>
-                <a:latin typeface="Calibri"/>
-              </a:rPr>
-              <a:t>&lt;date/time&gt;</a:t>
-            </a:r>
-            <a:endParaRPr lang="en-US" sz="1200" b="0" u="none" strike="noStrike">
-              <a:solidFill>
-                <a:srgbClr val="000000"/>
-              </a:solidFill>
-              <a:effectLst/>
-              <a:uFillTx/>
-              <a:latin typeface="Times New Roman"/>
-            </a:endParaRPr>
-          </a:p>
-        </p:txBody>
-      </p:sp>
-      <p:sp>
-        <p:nvSpPr>
-          <p:cNvPr id="42" name="PlaceHolder 3"/>
-          <p:cNvSpPr>
-            <a:spLocks noGrp="1"/>
-          </p:cNvSpPr>
-          <p:nvPr>
-            <p:ph type="ftr" idx="23"/>
-          </p:nvPr>
-        </p:nvSpPr>
-        <p:spPr>
-          <a:xfrm>
-            <a:off x="3124080" y="6356520"/>
-            <a:ext cx="2895120" cy="364680"/>
-          </a:xfrm>
-          <a:prstGeom prst="rect">
-            <a:avLst/>
-          </a:prstGeom>
-          <a:noFill/>
-          <a:ln w="0">
-            <a:noFill/>
-          </a:ln>
-        </p:spPr>
-        <p:txBody>
-          <a:bodyPr lIns="91440" rIns="91440" tIns="45720" bIns="45720" anchor="ctr">
-            <a:noAutofit/>
-          </a:bodyPr>
-          <a:lstStyle>
-            <a:lvl1pPr indent="0" algn="ctr">
-              <a:buNone/>
-              <a:defRPr lang="en-US" sz="1400" b="0" u="none" strike="noStrike">
-                <a:solidFill>
-                  <a:srgbClr val="000000"/>
-                </a:solidFill>
-                <a:effectLst/>
-                <a:uFillTx/>
-                <a:latin typeface="Times New Roman"/>
-              </a:defRPr>
-            </a:lvl1pPr>
-          </a:lstStyle>
-          <a:p>
-            <a:pPr indent="0" algn="ctr">
-              <a:buNone/>
-            </a:pPr>
-            <a:r>
-              <a:rPr lang="en-US" sz="1400" b="0" u="none" strike="noStrike">
-                <a:solidFill>
-                  <a:srgbClr val="000000"/>
-                </a:solidFill>
-                <a:effectLst/>
-                <a:uFillTx/>
-                <a:latin typeface="Times New Roman"/>
-              </a:rPr>
-              <a:t>&lt;footer&gt;</a:t>
-            </a:r>
-            <a:endParaRPr lang="en-US" sz="1400" b="0" u="none" strike="noStrike">
-              <a:solidFill>
-                <a:srgbClr val="000000"/>
-              </a:solidFill>
-              <a:effectLst/>
-              <a:uFillTx/>
-              <a:latin typeface="Times New Roman"/>
-            </a:endParaRPr>
-          </a:p>
-        </p:txBody>
-      </p:sp>
-      <p:sp>
-        <p:nvSpPr>
-          <p:cNvPr id="43" name="PlaceHolder 4"/>
-          <p:cNvSpPr>
-            <a:spLocks noGrp="1"/>
-          </p:cNvSpPr>
-          <p:nvPr>
-            <p:ph type="sldNum" idx="24"/>
-          </p:nvPr>
-        </p:nvSpPr>
-        <p:spPr>
-          <a:xfrm>
-            <a:off x="6553080" y="6356520"/>
-            <a:ext cx="2133360" cy="364680"/>
-          </a:xfrm>
-          <a:prstGeom prst="rect">
-            <a:avLst/>
-          </a:prstGeom>
-          <a:noFill/>
-          <a:ln w="0">
-            <a:noFill/>
-          </a:ln>
-        </p:spPr>
-        <p:txBody>
-          <a:bodyPr lIns="91440" rIns="91440" tIns="45720" bIns="45720" anchor="ctr">
-            <a:noAutofit/>
-          </a:bodyPr>
-          <a:lstStyle>
-            <a:lvl1pPr indent="0" algn="r" defTabSz="457200">
-              <a:lnSpc>
-                <a:spcPct val="100000"/>
-              </a:lnSpc>
-              <a:buNone/>
-              <a:defRPr lang="en-US" sz="1200" b="0" u="none" strike="noStrike">
-                <a:solidFill>
-                  <a:schemeClr val="dk1">
-                    <a:tint val="75000"/>
-                  </a:schemeClr>
-                </a:solidFill>
-                <a:effectLst/>
-                <a:uFillTx/>
-                <a:latin typeface="Calibri"/>
-              </a:defRPr>
-            </a:lvl1pPr>
-          </a:lstStyle>
-          <a:p>
-            <a:pPr indent="0" algn="r" defTabSz="457200">
-              <a:lnSpc>
-                <a:spcPct val="100000"/>
-              </a:lnSpc>
-              <a:buNone/>
-            </a:pPr>
-            <a:fld id="{D4ABFE02-E662-48DC-8182-ED2EC897E673}" type="slidenum">
-              <a:rPr lang="en-US" sz="1200" b="0" u="none" strike="noStrike">
-                <a:solidFill>
-                  <a:schemeClr val="dk1">
-                    <a:tint val="75000"/>
-                  </a:schemeClr>
-                </a:solidFill>
-                <a:effectLst/>
-                <a:uFillTx/>
-                <a:latin typeface="Calibri"/>
-              </a:rPr>
-              <a:t>&lt;number&gt;</a:t>
-            </a:fld>
-            <a:endParaRPr lang="en-US" sz="1200" b="0" u="none" strike="noStrike">
-              <a:solidFill>
-                <a:srgbClr val="000000"/>
-              </a:solidFill>
-              <a:effectLst/>
-              <a:uFillTx/>
-              <a:latin typeface="Times New Roman"/>
-            </a:endParaRPr>
-          </a:p>
-        </p:txBody>
-      </p:sp>
-    </p:spTree>
-  </p:cSld>
-</p:sldLayout>
-</file>
-
-<file path=ppt/slideLayouts/slideLayout9.xml><?xml version="1.0" encoding="utf-8"?>
-<p:sldLayout xmlns:a="http://schemas.openxmlformats.org/drawingml/2006/main" xmlns:p="http://schemas.openxmlformats.org/presentationml/2006/main" xmlns:r="http://schemas.openxmlformats.org/officeDocument/2006/relationships" xmlns:p14="http://schemas.microsoft.com/office/powerpoint/2010/main" xmlns:p15="http://schemas.microsoft.com/office/powerpoint/2012/main" xmlns:mc="http://schemas.openxmlformats.org/markup-compatibility/2006" type="blank" preserve="1">
-  <p:cSld name="Blank">
-    <p:bg>
-      <p:bgPr>
-        <a:solidFill>
-          <a:srgbClr val="ffffff"/>
-        </a:solidFill>
-      </p:bgPr>
-    </p:bg>
-    <p:spTree>
-      <p:nvGrpSpPr>
-        <p:cNvPr id="1" name=""/>
-        <p:cNvGrpSpPr/>
-        <p:nvPr/>
-      </p:nvGrpSpPr>
-      <p:grpSpPr>
-        <a:xfrm>
-          <a:off x="0" y="0"/>
-          <a:ext cx="0" cy="0"/>
-          <a:chOff x="0" y="0"/>
-          <a:chExt cx="0" cy="0"/>
-        </a:xfrm>
-      </p:grpSpPr>
-      <p:sp>
-        <p:nvSpPr>
-          <p:cNvPr id="44" name="PlaceHolder 1"/>
-          <p:cNvSpPr>
-            <a:spLocks noGrp="1"/>
-          </p:cNvSpPr>
-          <p:nvPr>
-            <p:ph type="dt" idx="25"/>
-          </p:nvPr>
-        </p:nvSpPr>
-        <p:spPr>
-          <a:xfrm>
-            <a:off x="457200" y="6356520"/>
-            <a:ext cx="2133360" cy="364680"/>
-          </a:xfrm>
-          <a:prstGeom prst="rect">
-            <a:avLst/>
-          </a:prstGeom>
-          <a:noFill/>
-          <a:ln w="0">
-            <a:noFill/>
-          </a:ln>
-        </p:spPr>
-        <p:txBody>
-          <a:bodyPr lIns="91440" rIns="91440" tIns="45720" bIns="45720" anchor="ctr">
-            <a:noAutofit/>
-          </a:bodyPr>
-          <a:lstStyle>
-            <a:lvl1pPr indent="0" defTabSz="457200">
-              <a:lnSpc>
-                <a:spcPct val="100000"/>
-              </a:lnSpc>
-              <a:buNone/>
-              <a:defRPr lang="en-US" sz="1200" b="0" u="none" strike="noStrike">
-                <a:solidFill>
-                  <a:schemeClr val="dk1">
-                    <a:tint val="75000"/>
-                  </a:schemeClr>
-                </a:solidFill>
-                <a:effectLst/>
-                <a:uFillTx/>
-                <a:latin typeface="Calibri"/>
-              </a:defRPr>
-            </a:lvl1pPr>
-          </a:lstStyle>
-          <a:p>
-            <a:pPr indent="0" defTabSz="457200">
-              <a:lnSpc>
-                <a:spcPct val="100000"/>
-              </a:lnSpc>
-              <a:buNone/>
-            </a:pPr>
-            <a:r>
-              <a:rPr lang="en-US" sz="1200" b="0" u="none" strike="noStrike">
-                <a:solidFill>
-                  <a:schemeClr val="dk1">
-                    <a:tint val="75000"/>
-                  </a:schemeClr>
-                </a:solidFill>
-                <a:effectLst/>
-                <a:uFillTx/>
-                <a:latin typeface="Calibri"/>
-              </a:rPr>
-              <a:t>&lt;date/time&gt;</a:t>
-            </a:r>
-            <a:endParaRPr lang="en-US" sz="1200" b="0" u="none" strike="noStrike">
-              <a:solidFill>
-                <a:srgbClr val="000000"/>
-              </a:solidFill>
-              <a:effectLst/>
-              <a:uFillTx/>
-              <a:latin typeface="Times New Roman"/>
-            </a:endParaRPr>
-          </a:p>
-        </p:txBody>
-      </p:sp>
-      <p:sp>
-        <p:nvSpPr>
-          <p:cNvPr id="45" name="PlaceHolder 2"/>
-          <p:cNvSpPr>
-            <a:spLocks noGrp="1"/>
-          </p:cNvSpPr>
-          <p:nvPr>
-            <p:ph type="ftr" idx="26"/>
-          </p:nvPr>
-        </p:nvSpPr>
-        <p:spPr>
-          <a:xfrm>
-            <a:off x="3124080" y="6356520"/>
-            <a:ext cx="2895120" cy="364680"/>
-          </a:xfrm>
-          <a:prstGeom prst="rect">
-            <a:avLst/>
-          </a:prstGeom>
-          <a:noFill/>
-          <a:ln w="0">
-            <a:noFill/>
-          </a:ln>
-        </p:spPr>
-        <p:txBody>
-          <a:bodyPr lIns="91440" rIns="91440" tIns="45720" bIns="45720" anchor="ctr">
-            <a:noAutofit/>
-          </a:bodyPr>
-          <a:lstStyle>
-            <a:lvl1pPr indent="0" algn="ctr">
-              <a:buNone/>
-              <a:defRPr lang="en-US" sz="1400" b="0" u="none" strike="noStrike">
-                <a:solidFill>
-                  <a:srgbClr val="000000"/>
-                </a:solidFill>
-                <a:effectLst/>
-                <a:uFillTx/>
-                <a:latin typeface="Times New Roman"/>
-              </a:defRPr>
-            </a:lvl1pPr>
-          </a:lstStyle>
-          <a:p>
-            <a:pPr indent="0" algn="ctr">
-              <a:buNone/>
-            </a:pPr>
-            <a:r>
-              <a:rPr lang="en-US" sz="1400" b="0" u="none" strike="noStrike">
-                <a:solidFill>
-                  <a:srgbClr val="000000"/>
-                </a:solidFill>
-                <a:effectLst/>
-                <a:uFillTx/>
-                <a:latin typeface="Times New Roman"/>
-              </a:rPr>
-              <a:t>&lt;footer&gt;</a:t>
-            </a:r>
-            <a:endParaRPr lang="en-US" sz="1400" b="0" u="none" strike="noStrike">
-              <a:solidFill>
-                <a:srgbClr val="000000"/>
-              </a:solidFill>
-              <a:effectLst/>
-              <a:uFillTx/>
-              <a:latin typeface="Times New Roman"/>
-            </a:endParaRPr>
-          </a:p>
-        </p:txBody>
-      </p:sp>
-      <p:sp>
-        <p:nvSpPr>
-          <p:cNvPr id="46" name="PlaceHolder 3"/>
-          <p:cNvSpPr>
-            <a:spLocks noGrp="1"/>
-          </p:cNvSpPr>
-          <p:nvPr>
-            <p:ph type="sldNum" idx="27"/>
-          </p:nvPr>
-        </p:nvSpPr>
-        <p:spPr>
-          <a:xfrm>
-            <a:off x="6553080" y="6356520"/>
-            <a:ext cx="2133360" cy="364680"/>
-          </a:xfrm>
-          <a:prstGeom prst="rect">
-            <a:avLst/>
-          </a:prstGeom>
-          <a:noFill/>
-          <a:ln w="0">
-            <a:noFill/>
-          </a:ln>
-        </p:spPr>
-        <p:txBody>
-          <a:bodyPr lIns="91440" rIns="91440" tIns="45720" bIns="45720" anchor="ctr">
-            <a:noAutofit/>
-          </a:bodyPr>
-          <a:lstStyle>
-            <a:lvl1pPr indent="0" algn="r" defTabSz="457200">
-              <a:lnSpc>
-                <a:spcPct val="100000"/>
-              </a:lnSpc>
-              <a:buNone/>
-              <a:defRPr lang="en-US" sz="1200" b="0" u="none" strike="noStrike">
-                <a:solidFill>
-                  <a:schemeClr val="dk1">
-                    <a:tint val="75000"/>
-                  </a:schemeClr>
-                </a:solidFill>
-                <a:effectLst/>
-                <a:uFillTx/>
-                <a:latin typeface="Calibri"/>
-              </a:defRPr>
-            </a:lvl1pPr>
-          </a:lstStyle>
-          <a:p>
-            <a:pPr indent="0" algn="r" defTabSz="457200">
-              <a:lnSpc>
-                <a:spcPct val="100000"/>
-              </a:lnSpc>
-              <a:buNone/>
-            </a:pPr>
-            <a:fld id="{EF43974B-0903-4D23-982C-E59C808FF6D2}" type="slidenum">
-              <a:rPr lang="en-US" sz="1200" b="0" u="none" strike="noStrike">
-                <a:solidFill>
-                  <a:schemeClr val="dk1">
-                    <a:tint val="75000"/>
-                  </a:schemeClr>
-                </a:solidFill>
-                <a:effectLst/>
-                <a:uFillTx/>
-                <a:latin typeface="Calibri"/>
-              </a:rPr>
-              <a:t>&lt;number&gt;</a:t>
-            </a:fld>
-            <a:endParaRPr lang="en-US" sz="1200" b="0" u="none" strike="noStrike">
-              <a:solidFill>
-                <a:srgbClr val="000000"/>
-              </a:solidFill>
-              <a:effectLst/>
-              <a:uFillTx/>
-              <a:latin typeface="Times New Roman"/>
-            </a:endParaRPr>
-          </a:p>
-        </p:txBody>
-      </p:sp>
-      <p:sp>
-        <p:nvSpPr>
-          <p:cNvPr id="47" name="PlaceHolder 4"/>
-          <p:cNvSpPr>
-            <a:spLocks noGrp="1"/>
-          </p:cNvSpPr>
-          <p:nvPr>
-            <p:ph type="title"/>
-          </p:nvPr>
-        </p:nvSpPr>
-        <p:spPr>
-          <a:xfrm>
-            <a:off x="609480" y="273600"/>
-            <a:ext cx="10972080" cy="1144800"/>
-          </a:xfrm>
-          <a:prstGeom prst="rect">
-            <a:avLst/>
-          </a:prstGeom>
-          <a:noFill/>
-          <a:ln w="0">
-            <a:noFill/>
-          </a:ln>
-        </p:spPr>
-        <p:txBody>
-          <a:bodyPr lIns="0" rIns="0" tIns="0" bIns="0" anchor="ctr">
-            <a:noAutofit/>
-          </a:bodyPr>
-          <a:p>
-            <a:pPr indent="0">
-              <a:buNone/>
-            </a:pPr>
-            <a:r>
-              <a:rPr lang="en-US" sz="1800" b="0" u="none" strike="noStrike">
-                <a:solidFill>
-                  <a:schemeClr val="dk1"/>
-                </a:solidFill>
-                <a:effectLst/>
-                <a:uFillTx/>
-                <a:latin typeface="Calibri"/>
-              </a:rPr>
-              <a:t>Click to edit the title text format</a:t>
-            </a:r>
-            <a:endParaRPr lang="en-US" sz="1800" b="0" u="none" strike="noStrike">
-              <a:solidFill>
-                <a:schemeClr val="dk1"/>
-              </a:solidFill>
-              <a:effectLst/>
-              <a:uFillTx/>
-              <a:latin typeface="Calibri"/>
-            </a:endParaRPr>
-          </a:p>
-        </p:txBody>
-      </p:sp>
-      <p:sp>
-        <p:nvSpPr>
-          <p:cNvPr id="48" name="PlaceHolder 5"/>
-          <p:cNvSpPr>
-            <a:spLocks noGrp="1"/>
-          </p:cNvSpPr>
-          <p:nvPr>
-            <p:ph type="body"/>
-          </p:nvPr>
-        </p:nvSpPr>
-        <p:spPr>
-          <a:xfrm>
-            <a:off x="609480" y="1604520"/>
-            <a:ext cx="10972080" cy="3977280"/>
-          </a:xfrm>
-          <a:prstGeom prst="rect">
-            <a:avLst/>
-          </a:prstGeom>
-          <a:noFill/>
-          <a:ln w="0">
-            <a:noFill/>
-          </a:ln>
-        </p:spPr>
-        <p:txBody>
-          <a:bodyPr lIns="0" rIns="0" tIns="0" bIns="0" anchor="t">
-            <a:normAutofit/>
-          </a:bodyPr>
-          <a:p>
-            <a:pPr marL="432000" indent="-324000">
-              <a:spcBef>
-                <a:spcPts val="1417"/>
-              </a:spcBef>
-              <a:buClr>
-                <a:srgbClr val="000000"/>
-              </a:buClr>
-              <a:buSzPct val="45000"/>
-              <a:buFont typeface="Wingdings" charset="2"/>
-              <a:buChar char=""/>
-            </a:pPr>
-            <a:r>
-              <a:rPr lang="en-US" sz="3200" b="0" u="none" strike="noStrike">
-                <a:solidFill>
-                  <a:schemeClr val="dk1"/>
-                </a:solidFill>
-                <a:effectLst/>
-                <a:uFillTx/>
-                <a:latin typeface="Calibri"/>
-              </a:rPr>
-              <a:t>Click to edit the outline text format</a:t>
-            </a:r>
-            <a:endParaRPr lang="en-US" sz="3200" b="0" u="none" strike="noStrike">
-              <a:solidFill>
-                <a:schemeClr val="dk1"/>
-              </a:solidFill>
-              <a:effectLst/>
-              <a:uFillTx/>
-              <a:latin typeface="Calibri"/>
-            </a:endParaRPr>
-          </a:p>
-          <a:p>
-            <a:pPr marL="864000" lvl="1" indent="-324000">
-              <a:spcBef>
-                <a:spcPts val="1134"/>
-              </a:spcBef>
-              <a:buClr>
-                <a:srgbClr val="000000"/>
-              </a:buClr>
-              <a:buSzPct val="75000"/>
-              <a:buFont typeface="Symbol" charset="2"/>
-              <a:buChar char=""/>
-            </a:pPr>
-            <a:r>
-              <a:rPr lang="en-US" sz="2400" b="0" u="none" strike="noStrike">
-                <a:solidFill>
-                  <a:schemeClr val="dk1"/>
-                </a:solidFill>
-                <a:effectLst/>
-                <a:uFillTx/>
-                <a:latin typeface="Calibri"/>
-              </a:rPr>
-              <a:t>Second Outline Level</a:t>
-            </a:r>
-            <a:endParaRPr lang="en-US" sz="2400" b="0" u="none" strike="noStrike">
-              <a:solidFill>
-                <a:schemeClr val="dk1"/>
-              </a:solidFill>
-              <a:effectLst/>
-              <a:uFillTx/>
-              <a:latin typeface="Calibri"/>
-            </a:endParaRPr>
-          </a:p>
-          <a:p>
-            <a:pPr marL="1296000" lvl="2" indent="-288000">
-              <a:spcBef>
-                <a:spcPts val="850"/>
-              </a:spcBef>
-              <a:buClr>
-                <a:srgbClr val="000000"/>
-              </a:buClr>
-              <a:buSzPct val="45000"/>
-              <a:buFont typeface="Wingdings" charset="2"/>
-              <a:buChar char=""/>
-            </a:pPr>
-            <a:r>
-              <a:rPr lang="en-US" sz="2000" b="0" u="none" strike="noStrike">
-                <a:solidFill>
-                  <a:schemeClr val="dk1"/>
-                </a:solidFill>
-                <a:effectLst/>
-                <a:uFillTx/>
-                <a:latin typeface="Calibri"/>
-              </a:rPr>
-              <a:t>Third Outline Level</a:t>
-            </a:r>
-            <a:endParaRPr lang="en-US" sz="2000" b="0" u="none" strike="noStrike">
-              <a:solidFill>
-                <a:schemeClr val="dk1"/>
-              </a:solidFill>
-              <a:effectLst/>
-              <a:uFillTx/>
-              <a:latin typeface="Calibri"/>
-            </a:endParaRPr>
-          </a:p>
-          <a:p>
-            <a:pPr marL="1728000" lvl="3" indent="-216000">
-              <a:spcBef>
-                <a:spcPts val="567"/>
-              </a:spcBef>
-              <a:buClr>
-                <a:srgbClr val="000000"/>
-              </a:buClr>
-              <a:buSzPct val="75000"/>
-              <a:buFont typeface="Symbol" charset="2"/>
-              <a:buChar char=""/>
-            </a:pPr>
-            <a:r>
-              <a:rPr lang="en-US" sz="2000" b="0" u="none" strike="noStrike">
-                <a:solidFill>
-                  <a:schemeClr val="dk1"/>
-                </a:solidFill>
-                <a:effectLst/>
-                <a:uFillTx/>
-                <a:latin typeface="Calibri"/>
-              </a:rPr>
-              <a:t>Fourth Outline Level</a:t>
-            </a:r>
-            <a:endParaRPr lang="en-US" sz="2000" b="0" u="none" strike="noStrike">
-              <a:solidFill>
-                <a:schemeClr val="dk1"/>
-              </a:solidFill>
-              <a:effectLst/>
-              <a:uFillTx/>
-              <a:latin typeface="Calibri"/>
-            </a:endParaRPr>
-          </a:p>
-          <a:p>
-            <a:pPr marL="2160000" lvl="4" indent="-216000">
-              <a:spcBef>
-                <a:spcPts val="283"/>
-              </a:spcBef>
-              <a:buClr>
-                <a:srgbClr val="000000"/>
-              </a:buClr>
-              <a:buSzPct val="45000"/>
-              <a:buFont typeface="Wingdings" charset="2"/>
-              <a:buChar char=""/>
-            </a:pPr>
-            <a:r>
-              <a:rPr lang="en-US" sz="2000" b="0" u="none" strike="noStrike">
-                <a:solidFill>
-                  <a:schemeClr val="dk1"/>
-                </a:solidFill>
-                <a:effectLst/>
-                <a:uFillTx/>
-                <a:latin typeface="Calibri"/>
-              </a:rPr>
-              <a:t>Fifth Outline Level</a:t>
-            </a:r>
-            <a:endParaRPr lang="en-US" sz="2000" b="0" u="none" strike="noStrike">
-              <a:solidFill>
-                <a:schemeClr val="dk1"/>
-              </a:solidFill>
-              <a:effectLst/>
-              <a:uFillTx/>
-              <a:latin typeface="Calibri"/>
-            </a:endParaRPr>
-          </a:p>
-          <a:p>
-            <a:pPr marL="2592000" lvl="5" indent="-216000">
-              <a:spcBef>
-                <a:spcPts val="283"/>
-              </a:spcBef>
-              <a:buClr>
-                <a:srgbClr val="000000"/>
-              </a:buClr>
-              <a:buSzPct val="45000"/>
-              <a:buFont typeface="Wingdings" charset="2"/>
-              <a:buChar char=""/>
-            </a:pPr>
-            <a:r>
-              <a:rPr lang="en-US" sz="2000" b="0" u="none" strike="noStrike">
-                <a:solidFill>
-                  <a:schemeClr val="dk1"/>
-                </a:solidFill>
-                <a:effectLst/>
-                <a:uFillTx/>
-                <a:latin typeface="Calibri"/>
-              </a:rPr>
-              <a:t>Sixth Outline Level</a:t>
-            </a:r>
-            <a:endParaRPr lang="en-US" sz="2000" b="0" u="none" strike="noStrike">
-              <a:solidFill>
-                <a:schemeClr val="dk1"/>
-              </a:solidFill>
-              <a:effectLst/>
-              <a:uFillTx/>
-              <a:latin typeface="Calibri"/>
-            </a:endParaRPr>
-          </a:p>
-          <a:p>
-            <a:pPr marL="3024000" lvl="6" indent="-216000">
-              <a:spcBef>
-                <a:spcPts val="283"/>
-              </a:spcBef>
-              <a:buClr>
-                <a:srgbClr val="000000"/>
-              </a:buClr>
-              <a:buSzPct val="45000"/>
-              <a:buFont typeface="Wingdings" charset="2"/>
-              <a:buChar char=""/>
-            </a:pPr>
-            <a:r>
-              <a:rPr lang="en-US" sz="2000" b="0" u="none" strike="noStrike">
-                <a:solidFill>
-                  <a:schemeClr val="dk1"/>
-                </a:solidFill>
-                <a:effectLst/>
-                <a:uFillTx/>
-                <a:latin typeface="Calibri"/>
-              </a:rPr>
-              <a:t>Seventh Outline Level</a:t>
-            </a:r>
-            <a:endParaRPr lang="en-US" sz="2000" b="0" u="none" strike="noStrike">
-              <a:solidFill>
-                <a:schemeClr val="dk1"/>
-              </a:solidFill>
-              <a:effectLst/>
-              <a:uFillTx/>
-              <a:latin typeface="Calibri"/>
             </a:endParaRPr>
           </a:p>
         </p:txBody>
@@ -5824,7 +6166,7 @@
         <p:spPr>
           <a:xfrm>
             <a:off x="1981080" y="1417320"/>
-            <a:ext cx="8229240" cy="3657240"/>
+            <a:ext cx="8228880" cy="3656880"/>
           </a:xfrm>
           <a:prstGeom prst="roundRect">
             <a:avLst>
@@ -5887,7 +6229,7 @@
         <p:spPr>
           <a:xfrm>
             <a:off x="5181480" y="1691640"/>
-            <a:ext cx="1828440" cy="50400"/>
+            <a:ext cx="1828080" cy="50040"/>
           </a:xfrm>
           <a:prstGeom prst="rect">
             <a:avLst/>
@@ -5948,7 +6290,7 @@
         <p:spPr>
           <a:xfrm>
             <a:off x="2438280" y="2057400"/>
-            <a:ext cx="7314840" cy="822600"/>
+            <a:ext cx="7314480" cy="822240"/>
           </a:xfrm>
           <a:prstGeom prst="rect">
             <a:avLst/>
@@ -6005,7 +6347,7 @@
         <p:spPr>
           <a:xfrm>
             <a:off x="2438280" y="2880360"/>
-            <a:ext cx="7314840" cy="456840"/>
+            <a:ext cx="7314480" cy="456480"/>
           </a:xfrm>
           <a:prstGeom prst="rect">
             <a:avLst/>
@@ -6062,7 +6404,7 @@
         <p:spPr>
           <a:xfrm>
             <a:off x="3809880" y="3474720"/>
-            <a:ext cx="4571640" cy="25200"/>
+            <a:ext cx="4571280" cy="24840"/>
           </a:xfrm>
           <a:prstGeom prst="rect">
             <a:avLst/>
@@ -6123,7 +6465,7 @@
         <p:spPr>
           <a:xfrm>
             <a:off x="2438280" y="3703320"/>
-            <a:ext cx="7314840" cy="878040"/>
+            <a:ext cx="7314480" cy="877320"/>
           </a:xfrm>
           <a:prstGeom prst="rect">
             <a:avLst/>
@@ -6238,7 +6580,7 @@
         <p:spPr>
           <a:xfrm>
             <a:off x="2255400" y="2130480"/>
-            <a:ext cx="109440" cy="109440"/>
+            <a:ext cx="109080" cy="109080"/>
           </a:xfrm>
           <a:prstGeom prst="ellipse">
             <a:avLst/>
@@ -6336,7 +6678,7 @@
         <p:spPr>
           <a:xfrm>
             <a:off x="0" y="0"/>
-            <a:ext cx="12191400" cy="914040"/>
+            <a:ext cx="12191040" cy="913680"/>
           </a:xfrm>
           <a:prstGeom prst="rect">
             <a:avLst/>
@@ -6397,7 +6739,7 @@
         <p:spPr>
           <a:xfrm>
             <a:off x="0" y="137160"/>
-            <a:ext cx="12191400" cy="639720"/>
+            <a:ext cx="12191040" cy="639360"/>
           </a:xfrm>
           <a:prstGeom prst="rect">
             <a:avLst/>
@@ -6454,7 +6796,7 @@
         <p:spPr>
           <a:xfrm>
             <a:off x="472320" y="1371600"/>
-            <a:ext cx="3474360" cy="1554120"/>
+            <a:ext cx="3474000" cy="1553760"/>
           </a:xfrm>
           <a:prstGeom prst="roundRect">
             <a:avLst>
@@ -6589,7 +6931,7 @@
         <p:spPr>
           <a:xfrm>
             <a:off x="4358520" y="1371600"/>
-            <a:ext cx="3474360" cy="1554120"/>
+            <a:ext cx="3474000" cy="1553760"/>
           </a:xfrm>
           <a:prstGeom prst="roundRect">
             <a:avLst>
@@ -6724,7 +7066,7 @@
         <p:spPr>
           <a:xfrm>
             <a:off x="8244720" y="1371600"/>
-            <a:ext cx="3474360" cy="1554120"/>
+            <a:ext cx="3474000" cy="1553760"/>
           </a:xfrm>
           <a:prstGeom prst="roundRect">
             <a:avLst>
@@ -6859,7 +7201,7 @@
         <p:spPr>
           <a:xfrm>
             <a:off x="1523880" y="3566160"/>
-            <a:ext cx="9143640" cy="1188360"/>
+            <a:ext cx="9143280" cy="1188000"/>
           </a:xfrm>
           <a:prstGeom prst="roundRect">
             <a:avLst>
@@ -6984,7 +7326,7 @@
         <p:spPr>
           <a:xfrm>
             <a:off x="0" y="0"/>
-            <a:ext cx="12191400" cy="914040"/>
+            <a:ext cx="12191040" cy="913680"/>
           </a:xfrm>
           <a:prstGeom prst="rect">
             <a:avLst/>
@@ -7045,7 +7387,7 @@
         <p:spPr>
           <a:xfrm>
             <a:off x="0" y="137160"/>
-            <a:ext cx="12191400" cy="639720"/>
+            <a:ext cx="12191040" cy="639360"/>
           </a:xfrm>
           <a:prstGeom prst="rect">
             <a:avLst/>
@@ -7102,7 +7444,7 @@
         <p:spPr>
           <a:xfrm>
             <a:off x="548640" y="1188720"/>
-            <a:ext cx="5303160" cy="4754520"/>
+            <a:ext cx="5302800" cy="4754160"/>
           </a:xfrm>
           <a:prstGeom prst="roundRect">
             <a:avLst>
@@ -7353,7 +7695,7 @@
         <p:spPr>
           <a:xfrm>
             <a:off x="6126480" y="1188720"/>
-            <a:ext cx="5668920" cy="2194200"/>
+            <a:ext cx="5668560" cy="2193840"/>
           </a:xfrm>
           <a:prstGeom prst="roundRect">
             <a:avLst>
@@ -7694,7 +8036,7 @@
         <p:spPr>
           <a:xfrm>
             <a:off x="6126480" y="3657600"/>
-            <a:ext cx="5668920" cy="2285640"/>
+            <a:ext cx="5668560" cy="2285280"/>
           </a:xfrm>
           <a:prstGeom prst="roundRect">
             <a:avLst>
@@ -7953,7 +8295,7 @@
         <p:spPr>
           <a:xfrm>
             <a:off x="0" y="0"/>
-            <a:ext cx="12191400" cy="914040"/>
+            <a:ext cx="12191040" cy="913680"/>
           </a:xfrm>
           <a:prstGeom prst="rect">
             <a:avLst/>
@@ -8014,7 +8356,7 @@
         <p:spPr>
           <a:xfrm>
             <a:off x="0" y="137160"/>
-            <a:ext cx="12191400" cy="639720"/>
+            <a:ext cx="12191040" cy="639360"/>
           </a:xfrm>
           <a:prstGeom prst="rect">
             <a:avLst/>
@@ -8071,7 +8413,7 @@
         <p:spPr>
           <a:xfrm>
             <a:off x="1020960" y="1371600"/>
-            <a:ext cx="4754520" cy="2377080"/>
+            <a:ext cx="4754160" cy="2376720"/>
           </a:xfrm>
           <a:prstGeom prst="roundRect">
             <a:avLst>
@@ -8203,7 +8545,7 @@
         <p:spPr>
           <a:xfrm>
             <a:off x="6415920" y="1371600"/>
-            <a:ext cx="4754520" cy="2377080"/>
+            <a:ext cx="4754160" cy="2376720"/>
           </a:xfrm>
           <a:prstGeom prst="roundRect">
             <a:avLst>
@@ -8339,7 +8681,7 @@
         <p:spPr>
           <a:xfrm>
             <a:off x="2712600" y="4297680"/>
-            <a:ext cx="1371240" cy="1371240"/>
+            <a:ext cx="1370880" cy="1370880"/>
           </a:xfrm>
           <a:prstGeom prst="rect">
             <a:avLst/>
@@ -8363,7 +8705,7 @@
         <p:spPr>
           <a:xfrm>
             <a:off x="8107560" y="4297680"/>
-            <a:ext cx="1371240" cy="1371240"/>
+            <a:ext cx="1370880" cy="1370880"/>
           </a:xfrm>
           <a:prstGeom prst="rect">
             <a:avLst/>
@@ -8383,7 +8725,7 @@
         <p:spPr>
           <a:xfrm>
             <a:off x="2529720" y="5806440"/>
-            <a:ext cx="1737000" cy="319680"/>
+            <a:ext cx="1736640" cy="319320"/>
           </a:xfrm>
           <a:prstGeom prst="rect">
             <a:avLst/>
@@ -8440,7 +8782,7 @@
         <p:spPr>
           <a:xfrm>
             <a:off x="7924680" y="5806440"/>
-            <a:ext cx="1737000" cy="319680"/>
+            <a:ext cx="1736640" cy="319320"/>
           </a:xfrm>
           <a:prstGeom prst="rect">
             <a:avLst/>
